--- a/docs/content/05-teaching-resources/slides/core/17-virtual-cloud-and-resilient-environments.pptx
+++ b/docs/content/05-teaching-resources/slides/core/17-virtual-cloud-and-resilient-environments.pptx
@@ -10,10 +10,16 @@
     <p:sldId id="258" r:id="rId9"/>
     <p:sldId id="259" r:id="rId10"/>
     <p:sldId id="260" r:id="rId11"/>
-    <p:sldId id="261" r:id="rId12"/>
+    <p:sldId id="261" r:id="rId13"/>
     <p:sldId id="262" r:id="rId14"/>
     <p:sldId id="263" r:id="rId15"/>
     <p:sldId id="264" r:id="rId16"/>
+    <p:sldId id="265" r:id="rId17"/>
+    <p:sldId id="266" r:id="rId18"/>
+    <p:sldId id="267" r:id="rId19"/>
+    <p:sldId id="268" r:id="rId20"/>
+    <p:sldId id="269" r:id="rId21"/>
+    <p:sldId id="270" r:id="rId22"/>
   </p:sldIdLst>
   <p:sldSz cx="12191695" cy="6858000" type="screen4x3"/>
   <p:notesSz cx="6858000" cy="9144000"/>
@@ -510,7 +516,22 @@
           <a:lstStyle/>
           <a:p>
             <a:r>
-              <a:t>Give students a few minutes to answer on mini whiteboards or paper, then reveal the answers on the next slide.</a:t>
+              <a:t>Answers:</a:t>
+            </a:r>
+          </a:p>
+          <a:p>
+            <a:r>
+              <a:t>1. A hypervisor.</a:t>
+            </a:r>
+          </a:p>
+          <a:p>
+            <a:r>
+              <a:t>2. Testing on different systems without extra hardware.</a:t>
+            </a:r>
+          </a:p>
+          <a:p>
+            <a:r>
+              <a:t>3. Extra hardware load or slower running.</a:t>
             </a:r>
           </a:p>
         </p:txBody>
@@ -580,7 +601,22 @@
           <a:lstStyle/>
           <a:p>
             <a:r>
-              <a:t>Talk through any answers the class found difficult.</a:t>
+              <a:t>Answers:</a:t>
+            </a:r>
+          </a:p>
+          <a:p>
+            <a:r>
+              <a:t>1. PaaS.</a:t>
+            </a:r>
+          </a:p>
+          <a:p>
+            <a:r>
+              <a:t>2. The client.</a:t>
+            </a:r>
+          </a:p>
+          <a:p>
+            <a:r>
+              <a:t>3. Scaling resources up and down with demand.</a:t>
             </a:r>
           </a:p>
         </p:txBody>
@@ -606,6 +642,231 @@
 </file>
 
 <file path=ppt/notesSlides/notesSlide3.xml><?xml version="1.0" encoding="utf-8"?>
+<p:notes xmlns:a="http://schemas.openxmlformats.org/drawingml/2006/main" xmlns:p="http://schemas.openxmlformats.org/presentationml/2006/main" xmlns:r="http://schemas.openxmlformats.org/officeDocument/2006/relationships">
+  <p:cSld>
+    <p:spTree>
+      <p:nvGrpSpPr>
+        <p:cNvPr id="1" name=""/>
+        <p:cNvGrpSpPr/>
+        <p:nvPr/>
+      </p:nvGrpSpPr>
+      <p:grpSpPr>
+        <a:xfrm>
+          <a:off x="0" y="0"/>
+          <a:ext cx="0" cy="0"/>
+          <a:chOff x="0" y="0"/>
+          <a:chExt cx="0" cy="0"/>
+        </a:xfrm>
+      </p:grpSpPr>
+      <p:sp>
+        <p:nvSpPr>
+          <p:cNvPr id="2" name="Slide Image Placeholder 1"/>
+          <p:cNvSpPr>
+            <a:spLocks noGrp="1"/>
+          </p:cNvSpPr>
+          <p:nvPr>
+            <p:ph type="sldImg" idx="2"/>
+          </p:nvPr>
+        </p:nvSpPr>
+        <p:spPr/>
+      </p:sp>
+      <p:sp>
+        <p:nvSpPr>
+          <p:cNvPr id="3" name="Notes Placeholder 2"/>
+          <p:cNvSpPr>
+            <a:spLocks noGrp="1"/>
+          </p:cNvSpPr>
+          <p:nvPr>
+            <p:ph type="body" idx="3" sz="quarter"/>
+          </p:nvPr>
+        </p:nvSpPr>
+        <p:spPr/>
+        <p:txBody>
+          <a:bodyPr/>
+          <a:lstStyle/>
+          <a:p>
+            <a:r>
+              <a:t>Answers:</a:t>
+            </a:r>
+          </a:p>
+          <a:p>
+            <a:r>
+              <a:t>1. Duplicates so one failure doesn't stop the service.</a:t>
+            </a:r>
+          </a:p>
+          <a:p>
+            <a:r>
+              <a:t>2. To make sure they can be restored.</a:t>
+            </a:r>
+          </a:p>
+          <a:p>
+            <a:r>
+              <a:t>3. A fully ready backup site.</a:t>
+            </a:r>
+          </a:p>
+        </p:txBody>
+      </p:sp>
+      <p:sp>
+        <p:nvSpPr>
+          <p:cNvPr id="4" name="Slide Number Placeholder 3"/>
+          <p:cNvSpPr>
+            <a:spLocks noGrp="1"/>
+          </p:cNvSpPr>
+          <p:nvPr>
+            <p:ph type="sldNum" idx="5" sz="quarter"/>
+          </p:nvPr>
+        </p:nvSpPr>
+        <p:spPr/>
+      </p:sp>
+    </p:spTree>
+  </p:cSld>
+  <p:clrMapOvr>
+    <a:masterClrMapping/>
+  </p:clrMapOvr>
+</p:notes>
+</file>
+
+<file path=ppt/notesSlides/notesSlide4.xml><?xml version="1.0" encoding="utf-8"?>
+<p:notes xmlns:a="http://schemas.openxmlformats.org/drawingml/2006/main" xmlns:p="http://schemas.openxmlformats.org/presentationml/2006/main" xmlns:r="http://schemas.openxmlformats.org/officeDocument/2006/relationships">
+  <p:cSld>
+    <p:spTree>
+      <p:nvGrpSpPr>
+        <p:cNvPr id="1" name=""/>
+        <p:cNvGrpSpPr/>
+        <p:nvPr/>
+      </p:nvGrpSpPr>
+      <p:grpSpPr>
+        <a:xfrm>
+          <a:off x="0" y="0"/>
+          <a:ext cx="0" cy="0"/>
+          <a:chOff x="0" y="0"/>
+          <a:chExt cx="0" cy="0"/>
+        </a:xfrm>
+      </p:grpSpPr>
+      <p:sp>
+        <p:nvSpPr>
+          <p:cNvPr id="2" name="Slide Image Placeholder 1"/>
+          <p:cNvSpPr>
+            <a:spLocks noGrp="1"/>
+          </p:cNvSpPr>
+          <p:nvPr>
+            <p:ph type="sldImg" idx="2"/>
+          </p:nvPr>
+        </p:nvSpPr>
+        <p:spPr/>
+      </p:sp>
+      <p:sp>
+        <p:nvSpPr>
+          <p:cNvPr id="3" name="Notes Placeholder 2"/>
+          <p:cNvSpPr>
+            <a:spLocks noGrp="1"/>
+          </p:cNvSpPr>
+          <p:nvPr>
+            <p:ph type="body" idx="3" sz="quarter"/>
+          </p:nvPr>
+        </p:nvSpPr>
+        <p:spPr/>
+        <p:txBody>
+          <a:bodyPr/>
+          <a:lstStyle/>
+          <a:p>
+            <a:r>
+              <a:t>Give students a few minutes to answer on mini whiteboards or paper, then reveal the answers on the next slide.</a:t>
+            </a:r>
+          </a:p>
+        </p:txBody>
+      </p:sp>
+      <p:sp>
+        <p:nvSpPr>
+          <p:cNvPr id="4" name="Slide Number Placeholder 3"/>
+          <p:cNvSpPr>
+            <a:spLocks noGrp="1"/>
+          </p:cNvSpPr>
+          <p:nvPr>
+            <p:ph type="sldNum" idx="5" sz="quarter"/>
+          </p:nvPr>
+        </p:nvSpPr>
+        <p:spPr/>
+      </p:sp>
+    </p:spTree>
+  </p:cSld>
+  <p:clrMapOvr>
+    <a:masterClrMapping/>
+  </p:clrMapOvr>
+</p:notes>
+</file>
+
+<file path=ppt/notesSlides/notesSlide5.xml><?xml version="1.0" encoding="utf-8"?>
+<p:notes xmlns:a="http://schemas.openxmlformats.org/drawingml/2006/main" xmlns:p="http://schemas.openxmlformats.org/presentationml/2006/main" xmlns:r="http://schemas.openxmlformats.org/officeDocument/2006/relationships">
+  <p:cSld>
+    <p:spTree>
+      <p:nvGrpSpPr>
+        <p:cNvPr id="1" name=""/>
+        <p:cNvGrpSpPr/>
+        <p:nvPr/>
+      </p:nvGrpSpPr>
+      <p:grpSpPr>
+        <a:xfrm>
+          <a:off x="0" y="0"/>
+          <a:ext cx="0" cy="0"/>
+          <a:chOff x="0" y="0"/>
+          <a:chExt cx="0" cy="0"/>
+        </a:xfrm>
+      </p:grpSpPr>
+      <p:sp>
+        <p:nvSpPr>
+          <p:cNvPr id="2" name="Slide Image Placeholder 1"/>
+          <p:cNvSpPr>
+            <a:spLocks noGrp="1"/>
+          </p:cNvSpPr>
+          <p:nvPr>
+            <p:ph type="sldImg" idx="2"/>
+          </p:nvPr>
+        </p:nvSpPr>
+        <p:spPr/>
+      </p:sp>
+      <p:sp>
+        <p:nvSpPr>
+          <p:cNvPr id="3" name="Notes Placeholder 2"/>
+          <p:cNvSpPr>
+            <a:spLocks noGrp="1"/>
+          </p:cNvSpPr>
+          <p:nvPr>
+            <p:ph type="body" idx="3" sz="quarter"/>
+          </p:nvPr>
+        </p:nvSpPr>
+        <p:spPr/>
+        <p:txBody>
+          <a:bodyPr/>
+          <a:lstStyle/>
+          <a:p>
+            <a:r>
+              <a:t>Talk through any answers the class found difficult.</a:t>
+            </a:r>
+          </a:p>
+        </p:txBody>
+      </p:sp>
+      <p:sp>
+        <p:nvSpPr>
+          <p:cNvPr id="4" name="Slide Number Placeholder 3"/>
+          <p:cNvSpPr>
+            <a:spLocks noGrp="1"/>
+          </p:cNvSpPr>
+          <p:nvPr>
+            <p:ph type="sldNum" idx="5" sz="quarter"/>
+          </p:nvPr>
+        </p:nvSpPr>
+        <p:spPr/>
+      </p:sp>
+    </p:spTree>
+  </p:cSld>
+  <p:clrMapOvr>
+    <a:masterClrMapping/>
+  </p:clrMapOvr>
+</p:notes>
+</file>
+
+<file path=ppt/notesSlides/notesSlide6.xml><?xml version="1.0" encoding="utf-8"?>
 <p:notes xmlns:a="http://schemas.openxmlformats.org/drawingml/2006/main" xmlns:p="http://schemas.openxmlformats.org/presentationml/2006/main" xmlns:r="http://schemas.openxmlformats.org/officeDocument/2006/relationships">
   <p:cSld>
     <p:spTree>
@@ -3975,6 +4236,3940 @@
 </p:sld>
 </file>
 
+<file path=ppt/slides/slide10.xml><?xml version="1.0" encoding="utf-8"?>
+<p:sld xmlns:a="http://schemas.openxmlformats.org/drawingml/2006/main" xmlns:p="http://schemas.openxmlformats.org/presentationml/2006/main" xmlns:r="http://schemas.openxmlformats.org/officeDocument/2006/relationships">
+  <p:cSld>
+    <p:bg>
+      <p:bgPr>
+        <a:solidFill>
+          <a:srgbClr val="FFFFFF"/>
+        </a:solidFill>
+        <a:effectLst/>
+      </p:bgPr>
+    </p:bg>
+    <p:spTree>
+      <p:nvGrpSpPr>
+        <p:cNvPr id="1" name=""/>
+        <p:cNvGrpSpPr/>
+        <p:nvPr/>
+      </p:nvGrpSpPr>
+      <p:grpSpPr/>
+      <p:sp>
+        <p:nvSpPr>
+          <p:cNvPr id="2" name="TextBox 1"/>
+          <p:cNvSpPr txBox="1"/>
+          <p:nvPr/>
+        </p:nvSpPr>
+        <p:spPr>
+          <a:xfrm>
+            <a:off x="548640" y="320040"/>
+            <a:ext cx="11094415" cy="274320"/>
+          </a:xfrm>
+          <a:prstGeom prst="rect">
+            <a:avLst/>
+          </a:prstGeom>
+          <a:noFill/>
+        </p:spPr>
+        <p:txBody>
+          <a:bodyPr wrap="square" anchor="t" lIns="0" rIns="0" tIns="0" bIns="0"/>
+          <a:lstStyle/>
+          <a:p>
+            <a:pPr algn="l"/>
+            <a:r>
+              <a:rPr sz="1100" b="1" i="0">
+                <a:solidFill>
+                  <a:srgbClr val="54595D"/>
+                </a:solidFill>
+                <a:latin typeface="Calibri"/>
+              </a:rPr>
+              <a:t>CORE COMPONENT  ·  Core Paper 2</a:t>
+            </a:r>
+          </a:p>
+        </p:txBody>
+      </p:sp>
+      <p:sp>
+        <p:nvSpPr>
+          <p:cNvPr id="3" name="TextBox 2"/>
+          <p:cNvSpPr txBox="1"/>
+          <p:nvPr/>
+        </p:nvSpPr>
+        <p:spPr>
+          <a:xfrm>
+            <a:off x="548640" y="566928"/>
+            <a:ext cx="11094415" cy="822960"/>
+          </a:xfrm>
+          <a:prstGeom prst="rect">
+            <a:avLst/>
+          </a:prstGeom>
+          <a:noFill/>
+        </p:spPr>
+        <p:txBody>
+          <a:bodyPr wrap="square" anchor="ctr" lIns="0" rIns="0" tIns="0" bIns="0"/>
+          <a:lstStyle/>
+          <a:p>
+            <a:pPr algn="l"/>
+            <a:r>
+              <a:rPr sz="3200" b="1" i="0">
+                <a:solidFill>
+                  <a:srgbClr val="03306E"/>
+                </a:solidFill>
+                <a:latin typeface="Cambria"/>
+              </a:rPr>
+              <a:t>Making environments resilient</a:t>
+            </a:r>
+          </a:p>
+        </p:txBody>
+      </p:sp>
+      <p:sp>
+        <p:nvSpPr>
+          <p:cNvPr id="4" name="TextBox 3"/>
+          <p:cNvSpPr txBox="1"/>
+          <p:nvPr/>
+        </p:nvSpPr>
+        <p:spPr>
+          <a:xfrm>
+            <a:off x="548640" y="6446520"/>
+            <a:ext cx="8229600" cy="274320"/>
+          </a:xfrm>
+          <a:prstGeom prst="rect">
+            <a:avLst/>
+          </a:prstGeom>
+          <a:noFill/>
+        </p:spPr>
+        <p:txBody>
+          <a:bodyPr wrap="square" anchor="t" lIns="0" rIns="0" tIns="0" bIns="0"/>
+          <a:lstStyle/>
+          <a:p>
+            <a:pPr algn="l"/>
+            <a:r>
+              <a:rPr sz="1000" b="0" i="0">
+                <a:solidFill>
+                  <a:srgbClr val="54595D"/>
+                </a:solidFill>
+                <a:latin typeface="Calibri"/>
+              </a:rPr>
+              <a:t>Digital Software Development T Level  ·  Virtual, Cloud and Resilient Environments</a:t>
+            </a:r>
+          </a:p>
+        </p:txBody>
+      </p:sp>
+      <p:sp>
+        <p:nvSpPr>
+          <p:cNvPr id="5" name="TextBox 4"/>
+          <p:cNvSpPr txBox="1"/>
+          <p:nvPr/>
+        </p:nvSpPr>
+        <p:spPr>
+          <a:xfrm>
+            <a:off x="10728655" y="6446520"/>
+            <a:ext cx="914400" cy="274320"/>
+          </a:xfrm>
+          <a:prstGeom prst="rect">
+            <a:avLst/>
+          </a:prstGeom>
+          <a:noFill/>
+        </p:spPr>
+        <p:txBody>
+          <a:bodyPr wrap="square" anchor="t" lIns="0" rIns="0" tIns="0" bIns="0"/>
+          <a:lstStyle/>
+          <a:p>
+            <a:pPr algn="r"/>
+            <a:r>
+              <a:rPr sz="1000" b="0" i="0">
+                <a:solidFill>
+                  <a:srgbClr val="54595D"/>
+                </a:solidFill>
+                <a:latin typeface="Calibri"/>
+              </a:rPr>
+              <a:t>10</a:t>
+            </a:r>
+          </a:p>
+        </p:txBody>
+      </p:sp>
+      <p:sp>
+        <p:nvSpPr>
+          <p:cNvPr id="6" name="Rounded Rectangle 5"/>
+          <p:cNvSpPr/>
+          <p:nvPr/>
+        </p:nvSpPr>
+        <p:spPr>
+          <a:xfrm>
+            <a:off x="548640" y="1600200"/>
+            <a:ext cx="3515258" cy="2148840"/>
+          </a:xfrm>
+          <a:prstGeom prst="roundRect">
+            <a:avLst>
+              <a:gd name="adj" fmla="val 6000"/>
+            </a:avLst>
+          </a:prstGeom>
+          <a:solidFill>
+            <a:srgbClr val="EAF3FF"/>
+          </a:solidFill>
+          <a:ln>
+            <a:noFill/>
+          </a:ln>
+          <a:effectLst/>
+        </p:spPr>
+        <p:style>
+          <a:lnRef idx="1">
+            <a:schemeClr val="accent1"/>
+          </a:lnRef>
+          <a:fillRef idx="3">
+            <a:schemeClr val="accent1"/>
+          </a:fillRef>
+          <a:effectRef idx="2">
+            <a:schemeClr val="accent1"/>
+          </a:effectRef>
+          <a:fontRef idx="minor">
+            <a:schemeClr val="lt1"/>
+          </a:fontRef>
+        </p:style>
+        <p:txBody>
+          <a:bodyPr rtlCol="0" anchor="ctr"/>
+          <a:lstStyle/>
+          <a:p/>
+        </p:txBody>
+      </p:sp>
+      <p:sp>
+        <p:nvSpPr>
+          <p:cNvPr id="7" name="Oval 6"/>
+          <p:cNvSpPr/>
+          <p:nvPr/>
+        </p:nvSpPr>
+        <p:spPr>
+          <a:xfrm>
+            <a:off x="777240" y="1828800"/>
+            <a:ext cx="457200" cy="457200"/>
+          </a:xfrm>
+          <a:prstGeom prst="ellipse">
+            <a:avLst/>
+          </a:prstGeom>
+          <a:solidFill>
+            <a:srgbClr val="F2B705"/>
+          </a:solidFill>
+          <a:ln>
+            <a:noFill/>
+          </a:ln>
+          <a:effectLst/>
+        </p:spPr>
+        <p:style>
+          <a:lnRef idx="1">
+            <a:schemeClr val="accent1"/>
+          </a:lnRef>
+          <a:fillRef idx="3">
+            <a:schemeClr val="accent1"/>
+          </a:fillRef>
+          <a:effectRef idx="2">
+            <a:schemeClr val="accent1"/>
+          </a:effectRef>
+          <a:fontRef idx="minor">
+            <a:schemeClr val="lt1"/>
+          </a:fontRef>
+        </p:style>
+        <p:txBody>
+          <a:bodyPr rtlCol="0" anchor="ctr" lIns="0" rIns="0" tIns="0" bIns="0"/>
+          <a:lstStyle/>
+          <a:p>
+            <a:pPr algn="ctr"/>
+            <a:r>
+              <a:rPr sz="1500" b="1">
+                <a:solidFill>
+                  <a:srgbClr val="202122"/>
+                </a:solidFill>
+                <a:latin typeface="Calibri"/>
+              </a:rPr>
+              <a:t>1</a:t>
+            </a:r>
+          </a:p>
+        </p:txBody>
+      </p:sp>
+      <p:sp>
+        <p:nvSpPr>
+          <p:cNvPr id="8" name="TextBox 7"/>
+          <p:cNvSpPr txBox="1"/>
+          <p:nvPr/>
+        </p:nvSpPr>
+        <p:spPr>
+          <a:xfrm>
+            <a:off x="1371600" y="1801368"/>
+            <a:ext cx="2509418" cy="512064"/>
+          </a:xfrm>
+          <a:prstGeom prst="rect">
+            <a:avLst/>
+          </a:prstGeom>
+          <a:noFill/>
+        </p:spPr>
+        <p:txBody>
+          <a:bodyPr wrap="square" anchor="ctr" lIns="0" rIns="0" tIns="0" bIns="0"/>
+          <a:lstStyle/>
+          <a:p>
+            <a:pPr algn="l"/>
+            <a:r>
+              <a:rPr sz="1900" b="1" i="0">
+                <a:solidFill>
+                  <a:srgbClr val="03306E"/>
+                </a:solidFill>
+                <a:latin typeface="Calibri"/>
+              </a:rPr>
+              <a:t>Updates and patches</a:t>
+            </a:r>
+          </a:p>
+        </p:txBody>
+      </p:sp>
+      <p:sp>
+        <p:nvSpPr>
+          <p:cNvPr id="9" name="TextBox 8"/>
+          <p:cNvSpPr txBox="1"/>
+          <p:nvPr/>
+        </p:nvSpPr>
+        <p:spPr>
+          <a:xfrm>
+            <a:off x="777240" y="2468880"/>
+            <a:ext cx="3058058" cy="1143000"/>
+          </a:xfrm>
+          <a:prstGeom prst="rect">
+            <a:avLst/>
+          </a:prstGeom>
+          <a:noFill/>
+        </p:spPr>
+        <p:txBody>
+          <a:bodyPr wrap="square" anchor="t" lIns="0" rIns="0" tIns="0" bIns="0"/>
+          <a:lstStyle/>
+          <a:p>
+            <a:pPr algn="l"/>
+            <a:r>
+              <a:rPr sz="2000" b="0" i="0">
+                <a:solidFill>
+                  <a:srgbClr val="202122"/>
+                </a:solidFill>
+                <a:latin typeface="Calibri"/>
+              </a:rPr>
+              <a:t>Fix vulnerabilities quickly.</a:t>
+            </a:r>
+          </a:p>
+        </p:txBody>
+      </p:sp>
+      <p:sp>
+        <p:nvSpPr>
+          <p:cNvPr id="10" name="Rounded Rectangle 9"/>
+          <p:cNvSpPr/>
+          <p:nvPr/>
+        </p:nvSpPr>
+        <p:spPr>
+          <a:xfrm>
+            <a:off x="4338218" y="1600200"/>
+            <a:ext cx="3515258" cy="2148840"/>
+          </a:xfrm>
+          <a:prstGeom prst="roundRect">
+            <a:avLst>
+              <a:gd name="adj" fmla="val 6000"/>
+            </a:avLst>
+          </a:prstGeom>
+          <a:solidFill>
+            <a:srgbClr val="EAF3FF"/>
+          </a:solidFill>
+          <a:ln>
+            <a:noFill/>
+          </a:ln>
+          <a:effectLst/>
+        </p:spPr>
+        <p:style>
+          <a:lnRef idx="1">
+            <a:schemeClr val="accent1"/>
+          </a:lnRef>
+          <a:fillRef idx="3">
+            <a:schemeClr val="accent1"/>
+          </a:fillRef>
+          <a:effectRef idx="2">
+            <a:schemeClr val="accent1"/>
+          </a:effectRef>
+          <a:fontRef idx="minor">
+            <a:schemeClr val="lt1"/>
+          </a:fontRef>
+        </p:style>
+        <p:txBody>
+          <a:bodyPr rtlCol="0" anchor="ctr"/>
+          <a:lstStyle/>
+          <a:p/>
+        </p:txBody>
+      </p:sp>
+      <p:sp>
+        <p:nvSpPr>
+          <p:cNvPr id="11" name="Oval 10"/>
+          <p:cNvSpPr/>
+          <p:nvPr/>
+        </p:nvSpPr>
+        <p:spPr>
+          <a:xfrm>
+            <a:off x="4566818" y="1828800"/>
+            <a:ext cx="457200" cy="457200"/>
+          </a:xfrm>
+          <a:prstGeom prst="ellipse">
+            <a:avLst/>
+          </a:prstGeom>
+          <a:solidFill>
+            <a:srgbClr val="F2B705"/>
+          </a:solidFill>
+          <a:ln>
+            <a:noFill/>
+          </a:ln>
+          <a:effectLst/>
+        </p:spPr>
+        <p:style>
+          <a:lnRef idx="1">
+            <a:schemeClr val="accent1"/>
+          </a:lnRef>
+          <a:fillRef idx="3">
+            <a:schemeClr val="accent1"/>
+          </a:fillRef>
+          <a:effectRef idx="2">
+            <a:schemeClr val="accent1"/>
+          </a:effectRef>
+          <a:fontRef idx="minor">
+            <a:schemeClr val="lt1"/>
+          </a:fontRef>
+        </p:style>
+        <p:txBody>
+          <a:bodyPr rtlCol="0" anchor="ctr" lIns="0" rIns="0" tIns="0" bIns="0"/>
+          <a:lstStyle/>
+          <a:p>
+            <a:pPr algn="ctr"/>
+            <a:r>
+              <a:rPr sz="1500" b="1">
+                <a:solidFill>
+                  <a:srgbClr val="202122"/>
+                </a:solidFill>
+                <a:latin typeface="Calibri"/>
+              </a:rPr>
+              <a:t>2</a:t>
+            </a:r>
+          </a:p>
+        </p:txBody>
+      </p:sp>
+      <p:sp>
+        <p:nvSpPr>
+          <p:cNvPr id="12" name="TextBox 11"/>
+          <p:cNvSpPr txBox="1"/>
+          <p:nvPr/>
+        </p:nvSpPr>
+        <p:spPr>
+          <a:xfrm>
+            <a:off x="5161178" y="1801368"/>
+            <a:ext cx="2509418" cy="512064"/>
+          </a:xfrm>
+          <a:prstGeom prst="rect">
+            <a:avLst/>
+          </a:prstGeom>
+          <a:noFill/>
+        </p:spPr>
+        <p:txBody>
+          <a:bodyPr wrap="square" anchor="ctr" lIns="0" rIns="0" tIns="0" bIns="0"/>
+          <a:lstStyle/>
+          <a:p>
+            <a:pPr algn="l"/>
+            <a:r>
+              <a:rPr sz="1800" b="1" i="0">
+                <a:solidFill>
+                  <a:srgbClr val="03306E"/>
+                </a:solidFill>
+                <a:latin typeface="Calibri"/>
+              </a:rPr>
+              <a:t>Hardware replacement</a:t>
+            </a:r>
+          </a:p>
+        </p:txBody>
+      </p:sp>
+      <p:sp>
+        <p:nvSpPr>
+          <p:cNvPr id="13" name="TextBox 12"/>
+          <p:cNvSpPr txBox="1"/>
+          <p:nvPr/>
+        </p:nvSpPr>
+        <p:spPr>
+          <a:xfrm>
+            <a:off x="4566818" y="2468880"/>
+            <a:ext cx="3058058" cy="1143000"/>
+          </a:xfrm>
+          <a:prstGeom prst="rect">
+            <a:avLst/>
+          </a:prstGeom>
+          <a:noFill/>
+        </p:spPr>
+        <p:txBody>
+          <a:bodyPr wrap="square" anchor="t" lIns="0" rIns="0" tIns="0" bIns="0"/>
+          <a:lstStyle/>
+          <a:p>
+            <a:pPr algn="l"/>
+            <a:r>
+              <a:rPr sz="2000" b="0" i="0">
+                <a:solidFill>
+                  <a:srgbClr val="202122"/>
+                </a:solidFill>
+                <a:latin typeface="Calibri"/>
+              </a:rPr>
+              <a:t>Rolling plans and secure disposal.</a:t>
+            </a:r>
+          </a:p>
+        </p:txBody>
+      </p:sp>
+      <p:sp>
+        <p:nvSpPr>
+          <p:cNvPr id="14" name="Rounded Rectangle 13"/>
+          <p:cNvSpPr/>
+          <p:nvPr/>
+        </p:nvSpPr>
+        <p:spPr>
+          <a:xfrm>
+            <a:off x="8127796" y="1600200"/>
+            <a:ext cx="3515258" cy="2148840"/>
+          </a:xfrm>
+          <a:prstGeom prst="roundRect">
+            <a:avLst>
+              <a:gd name="adj" fmla="val 6000"/>
+            </a:avLst>
+          </a:prstGeom>
+          <a:solidFill>
+            <a:srgbClr val="EAF3FF"/>
+          </a:solidFill>
+          <a:ln>
+            <a:noFill/>
+          </a:ln>
+          <a:effectLst/>
+        </p:spPr>
+        <p:style>
+          <a:lnRef idx="1">
+            <a:schemeClr val="accent1"/>
+          </a:lnRef>
+          <a:fillRef idx="3">
+            <a:schemeClr val="accent1"/>
+          </a:fillRef>
+          <a:effectRef idx="2">
+            <a:schemeClr val="accent1"/>
+          </a:effectRef>
+          <a:fontRef idx="minor">
+            <a:schemeClr val="lt1"/>
+          </a:fontRef>
+        </p:style>
+        <p:txBody>
+          <a:bodyPr rtlCol="0" anchor="ctr"/>
+          <a:lstStyle/>
+          <a:p/>
+        </p:txBody>
+      </p:sp>
+      <p:sp>
+        <p:nvSpPr>
+          <p:cNvPr id="15" name="Oval 14"/>
+          <p:cNvSpPr/>
+          <p:nvPr/>
+        </p:nvSpPr>
+        <p:spPr>
+          <a:xfrm>
+            <a:off x="8356396" y="1828800"/>
+            <a:ext cx="457200" cy="457200"/>
+          </a:xfrm>
+          <a:prstGeom prst="ellipse">
+            <a:avLst/>
+          </a:prstGeom>
+          <a:solidFill>
+            <a:srgbClr val="F2B705"/>
+          </a:solidFill>
+          <a:ln>
+            <a:noFill/>
+          </a:ln>
+          <a:effectLst/>
+        </p:spPr>
+        <p:style>
+          <a:lnRef idx="1">
+            <a:schemeClr val="accent1"/>
+          </a:lnRef>
+          <a:fillRef idx="3">
+            <a:schemeClr val="accent1"/>
+          </a:fillRef>
+          <a:effectRef idx="2">
+            <a:schemeClr val="accent1"/>
+          </a:effectRef>
+          <a:fontRef idx="minor">
+            <a:schemeClr val="lt1"/>
+          </a:fontRef>
+        </p:style>
+        <p:txBody>
+          <a:bodyPr rtlCol="0" anchor="ctr" lIns="0" rIns="0" tIns="0" bIns="0"/>
+          <a:lstStyle/>
+          <a:p>
+            <a:pPr algn="ctr"/>
+            <a:r>
+              <a:rPr sz="1500" b="1">
+                <a:solidFill>
+                  <a:srgbClr val="202122"/>
+                </a:solidFill>
+                <a:latin typeface="Calibri"/>
+              </a:rPr>
+              <a:t>3</a:t>
+            </a:r>
+          </a:p>
+        </p:txBody>
+      </p:sp>
+      <p:sp>
+        <p:nvSpPr>
+          <p:cNvPr id="16" name="TextBox 15"/>
+          <p:cNvSpPr txBox="1"/>
+          <p:nvPr/>
+        </p:nvSpPr>
+        <p:spPr>
+          <a:xfrm>
+            <a:off x="8950756" y="1801368"/>
+            <a:ext cx="2509418" cy="512064"/>
+          </a:xfrm>
+          <a:prstGeom prst="rect">
+            <a:avLst/>
+          </a:prstGeom>
+          <a:noFill/>
+        </p:spPr>
+        <p:txBody>
+          <a:bodyPr wrap="square" anchor="ctr" lIns="0" rIns="0" tIns="0" bIns="0"/>
+          <a:lstStyle/>
+          <a:p>
+            <a:pPr algn="l"/>
+            <a:r>
+              <a:rPr sz="1900" b="1" i="0">
+                <a:solidFill>
+                  <a:srgbClr val="03306E"/>
+                </a:solidFill>
+                <a:latin typeface="Calibri"/>
+              </a:rPr>
+              <a:t>Redundancy</a:t>
+            </a:r>
+          </a:p>
+        </p:txBody>
+      </p:sp>
+      <p:sp>
+        <p:nvSpPr>
+          <p:cNvPr id="17" name="TextBox 16"/>
+          <p:cNvSpPr txBox="1"/>
+          <p:nvPr/>
+        </p:nvSpPr>
+        <p:spPr>
+          <a:xfrm>
+            <a:off x="8356396" y="2468880"/>
+            <a:ext cx="3058058" cy="1143000"/>
+          </a:xfrm>
+          <a:prstGeom prst="rect">
+            <a:avLst/>
+          </a:prstGeom>
+          <a:noFill/>
+        </p:spPr>
+        <p:txBody>
+          <a:bodyPr wrap="square" anchor="t" lIns="0" rIns="0" tIns="0" bIns="0"/>
+          <a:lstStyle/>
+          <a:p>
+            <a:pPr algn="l"/>
+            <a:r>
+              <a:rPr sz="2000" b="0" i="0">
+                <a:solidFill>
+                  <a:srgbClr val="202122"/>
+                </a:solidFill>
+                <a:latin typeface="Calibri"/>
+              </a:rPr>
+              <a:t>Duplicate data and systems.</a:t>
+            </a:r>
+          </a:p>
+        </p:txBody>
+      </p:sp>
+      <p:sp>
+        <p:nvSpPr>
+          <p:cNvPr id="18" name="Rounded Rectangle 17"/>
+          <p:cNvSpPr/>
+          <p:nvPr/>
+        </p:nvSpPr>
+        <p:spPr>
+          <a:xfrm>
+            <a:off x="548640" y="4023360"/>
+            <a:ext cx="3515258" cy="2148840"/>
+          </a:xfrm>
+          <a:prstGeom prst="roundRect">
+            <a:avLst>
+              <a:gd name="adj" fmla="val 6000"/>
+            </a:avLst>
+          </a:prstGeom>
+          <a:solidFill>
+            <a:srgbClr val="EAF3FF"/>
+          </a:solidFill>
+          <a:ln>
+            <a:noFill/>
+          </a:ln>
+          <a:effectLst/>
+        </p:spPr>
+        <p:style>
+          <a:lnRef idx="1">
+            <a:schemeClr val="accent1"/>
+          </a:lnRef>
+          <a:fillRef idx="3">
+            <a:schemeClr val="accent1"/>
+          </a:fillRef>
+          <a:effectRef idx="2">
+            <a:schemeClr val="accent1"/>
+          </a:effectRef>
+          <a:fontRef idx="minor">
+            <a:schemeClr val="lt1"/>
+          </a:fontRef>
+        </p:style>
+        <p:txBody>
+          <a:bodyPr rtlCol="0" anchor="ctr"/>
+          <a:lstStyle/>
+          <a:p/>
+        </p:txBody>
+      </p:sp>
+      <p:sp>
+        <p:nvSpPr>
+          <p:cNvPr id="19" name="Oval 18"/>
+          <p:cNvSpPr/>
+          <p:nvPr/>
+        </p:nvSpPr>
+        <p:spPr>
+          <a:xfrm>
+            <a:off x="777240" y="4251960"/>
+            <a:ext cx="457200" cy="457200"/>
+          </a:xfrm>
+          <a:prstGeom prst="ellipse">
+            <a:avLst/>
+          </a:prstGeom>
+          <a:solidFill>
+            <a:srgbClr val="F2B705"/>
+          </a:solidFill>
+          <a:ln>
+            <a:noFill/>
+          </a:ln>
+          <a:effectLst/>
+        </p:spPr>
+        <p:style>
+          <a:lnRef idx="1">
+            <a:schemeClr val="accent1"/>
+          </a:lnRef>
+          <a:fillRef idx="3">
+            <a:schemeClr val="accent1"/>
+          </a:fillRef>
+          <a:effectRef idx="2">
+            <a:schemeClr val="accent1"/>
+          </a:effectRef>
+          <a:fontRef idx="minor">
+            <a:schemeClr val="lt1"/>
+          </a:fontRef>
+        </p:style>
+        <p:txBody>
+          <a:bodyPr rtlCol="0" anchor="ctr" lIns="0" rIns="0" tIns="0" bIns="0"/>
+          <a:lstStyle/>
+          <a:p>
+            <a:pPr algn="ctr"/>
+            <a:r>
+              <a:rPr sz="1500" b="1">
+                <a:solidFill>
+                  <a:srgbClr val="202122"/>
+                </a:solidFill>
+                <a:latin typeface="Calibri"/>
+              </a:rPr>
+              <a:t>4</a:t>
+            </a:r>
+          </a:p>
+        </p:txBody>
+      </p:sp>
+      <p:sp>
+        <p:nvSpPr>
+          <p:cNvPr id="20" name="TextBox 19"/>
+          <p:cNvSpPr txBox="1"/>
+          <p:nvPr/>
+        </p:nvSpPr>
+        <p:spPr>
+          <a:xfrm>
+            <a:off x="1371600" y="4224528"/>
+            <a:ext cx="2509418" cy="512064"/>
+          </a:xfrm>
+          <a:prstGeom prst="rect">
+            <a:avLst/>
+          </a:prstGeom>
+          <a:noFill/>
+        </p:spPr>
+        <p:txBody>
+          <a:bodyPr wrap="square" anchor="ctr" lIns="0" rIns="0" tIns="0" bIns="0"/>
+          <a:lstStyle/>
+          <a:p>
+            <a:pPr algn="l"/>
+            <a:r>
+              <a:rPr sz="1900" b="1" i="0">
+                <a:solidFill>
+                  <a:srgbClr val="03306E"/>
+                </a:solidFill>
+                <a:latin typeface="Calibri"/>
+              </a:rPr>
+              <a:t>Device hardening</a:t>
+            </a:r>
+          </a:p>
+        </p:txBody>
+      </p:sp>
+      <p:sp>
+        <p:nvSpPr>
+          <p:cNvPr id="21" name="TextBox 20"/>
+          <p:cNvSpPr txBox="1"/>
+          <p:nvPr/>
+        </p:nvSpPr>
+        <p:spPr>
+          <a:xfrm>
+            <a:off x="777240" y="4892040"/>
+            <a:ext cx="3058058" cy="1143000"/>
+          </a:xfrm>
+          <a:prstGeom prst="rect">
+            <a:avLst/>
+          </a:prstGeom>
+          <a:noFill/>
+        </p:spPr>
+        <p:txBody>
+          <a:bodyPr wrap="square" anchor="t" lIns="0" rIns="0" tIns="0" bIns="0"/>
+          <a:lstStyle/>
+          <a:p>
+            <a:pPr algn="l"/>
+            <a:r>
+              <a:rPr sz="2000" b="0" i="0">
+                <a:solidFill>
+                  <a:srgbClr val="202122"/>
+                </a:solidFill>
+                <a:latin typeface="Calibri"/>
+              </a:rPr>
+              <a:t>Remove unneeded ports, apps and access.</a:t>
+            </a:r>
+          </a:p>
+        </p:txBody>
+      </p:sp>
+      <p:sp>
+        <p:nvSpPr>
+          <p:cNvPr id="22" name="Rounded Rectangle 21"/>
+          <p:cNvSpPr/>
+          <p:nvPr/>
+        </p:nvSpPr>
+        <p:spPr>
+          <a:xfrm>
+            <a:off x="4338218" y="4023360"/>
+            <a:ext cx="3515258" cy="2148840"/>
+          </a:xfrm>
+          <a:prstGeom prst="roundRect">
+            <a:avLst>
+              <a:gd name="adj" fmla="val 6000"/>
+            </a:avLst>
+          </a:prstGeom>
+          <a:solidFill>
+            <a:srgbClr val="EAF3FF"/>
+          </a:solidFill>
+          <a:ln>
+            <a:noFill/>
+          </a:ln>
+          <a:effectLst/>
+        </p:spPr>
+        <p:style>
+          <a:lnRef idx="1">
+            <a:schemeClr val="accent1"/>
+          </a:lnRef>
+          <a:fillRef idx="3">
+            <a:schemeClr val="accent1"/>
+          </a:fillRef>
+          <a:effectRef idx="2">
+            <a:schemeClr val="accent1"/>
+          </a:effectRef>
+          <a:fontRef idx="minor">
+            <a:schemeClr val="lt1"/>
+          </a:fontRef>
+        </p:style>
+        <p:txBody>
+          <a:bodyPr rtlCol="0" anchor="ctr"/>
+          <a:lstStyle/>
+          <a:p/>
+        </p:txBody>
+      </p:sp>
+      <p:sp>
+        <p:nvSpPr>
+          <p:cNvPr id="23" name="Oval 22"/>
+          <p:cNvSpPr/>
+          <p:nvPr/>
+        </p:nvSpPr>
+        <p:spPr>
+          <a:xfrm>
+            <a:off x="4566818" y="4251960"/>
+            <a:ext cx="457200" cy="457200"/>
+          </a:xfrm>
+          <a:prstGeom prst="ellipse">
+            <a:avLst/>
+          </a:prstGeom>
+          <a:solidFill>
+            <a:srgbClr val="F2B705"/>
+          </a:solidFill>
+          <a:ln>
+            <a:noFill/>
+          </a:ln>
+          <a:effectLst/>
+        </p:spPr>
+        <p:style>
+          <a:lnRef idx="1">
+            <a:schemeClr val="accent1"/>
+          </a:lnRef>
+          <a:fillRef idx="3">
+            <a:schemeClr val="accent1"/>
+          </a:fillRef>
+          <a:effectRef idx="2">
+            <a:schemeClr val="accent1"/>
+          </a:effectRef>
+          <a:fontRef idx="minor">
+            <a:schemeClr val="lt1"/>
+          </a:fontRef>
+        </p:style>
+        <p:txBody>
+          <a:bodyPr rtlCol="0" anchor="ctr" lIns="0" rIns="0" tIns="0" bIns="0"/>
+          <a:lstStyle/>
+          <a:p>
+            <a:pPr algn="ctr"/>
+            <a:r>
+              <a:rPr sz="1500" b="1">
+                <a:solidFill>
+                  <a:srgbClr val="202122"/>
+                </a:solidFill>
+                <a:latin typeface="Calibri"/>
+              </a:rPr>
+              <a:t>5</a:t>
+            </a:r>
+          </a:p>
+        </p:txBody>
+      </p:sp>
+      <p:sp>
+        <p:nvSpPr>
+          <p:cNvPr id="24" name="TextBox 23"/>
+          <p:cNvSpPr txBox="1"/>
+          <p:nvPr/>
+        </p:nvSpPr>
+        <p:spPr>
+          <a:xfrm>
+            <a:off x="5161178" y="4224528"/>
+            <a:ext cx="2509418" cy="512064"/>
+          </a:xfrm>
+          <a:prstGeom prst="rect">
+            <a:avLst/>
+          </a:prstGeom>
+          <a:noFill/>
+        </p:spPr>
+        <p:txBody>
+          <a:bodyPr wrap="square" anchor="ctr" lIns="0" rIns="0" tIns="0" bIns="0"/>
+          <a:lstStyle/>
+          <a:p>
+            <a:pPr algn="l"/>
+            <a:r>
+              <a:rPr sz="1900" b="1" i="0">
+                <a:solidFill>
+                  <a:srgbClr val="03306E"/>
+                </a:solidFill>
+                <a:latin typeface="Calibri"/>
+              </a:rPr>
+              <a:t>Backups and sites</a:t>
+            </a:r>
+          </a:p>
+        </p:txBody>
+      </p:sp>
+      <p:sp>
+        <p:nvSpPr>
+          <p:cNvPr id="25" name="TextBox 24"/>
+          <p:cNvSpPr txBox="1"/>
+          <p:nvPr/>
+        </p:nvSpPr>
+        <p:spPr>
+          <a:xfrm>
+            <a:off x="4566818" y="4892040"/>
+            <a:ext cx="3058058" cy="1143000"/>
+          </a:xfrm>
+          <a:prstGeom prst="rect">
+            <a:avLst/>
+          </a:prstGeom>
+          <a:noFill/>
+        </p:spPr>
+        <p:txBody>
+          <a:bodyPr wrap="square" anchor="t" lIns="0" rIns="0" tIns="0" bIns="0"/>
+          <a:lstStyle/>
+          <a:p>
+            <a:pPr algn="l"/>
+            <a:r>
+              <a:rPr sz="2000" b="0" i="0">
+                <a:solidFill>
+                  <a:srgbClr val="202122"/>
+                </a:solidFill>
+                <a:latin typeface="Calibri"/>
+              </a:rPr>
+              <a:t>Onsite, offsite, cloud; hot, warm and cold sites.</a:t>
+            </a:r>
+          </a:p>
+        </p:txBody>
+      </p:sp>
+      <p:sp>
+        <p:nvSpPr>
+          <p:cNvPr id="26" name="Rounded Rectangle 25"/>
+          <p:cNvSpPr/>
+          <p:nvPr/>
+        </p:nvSpPr>
+        <p:spPr>
+          <a:xfrm>
+            <a:off x="8127796" y="4023360"/>
+            <a:ext cx="3515258" cy="2148840"/>
+          </a:xfrm>
+          <a:prstGeom prst="roundRect">
+            <a:avLst>
+              <a:gd name="adj" fmla="val 6000"/>
+            </a:avLst>
+          </a:prstGeom>
+          <a:solidFill>
+            <a:srgbClr val="EAF3FF"/>
+          </a:solidFill>
+          <a:ln>
+            <a:noFill/>
+          </a:ln>
+          <a:effectLst/>
+        </p:spPr>
+        <p:style>
+          <a:lnRef idx="1">
+            <a:schemeClr val="accent1"/>
+          </a:lnRef>
+          <a:fillRef idx="3">
+            <a:schemeClr val="accent1"/>
+          </a:fillRef>
+          <a:effectRef idx="2">
+            <a:schemeClr val="accent1"/>
+          </a:effectRef>
+          <a:fontRef idx="minor">
+            <a:schemeClr val="lt1"/>
+          </a:fontRef>
+        </p:style>
+        <p:txBody>
+          <a:bodyPr rtlCol="0" anchor="ctr"/>
+          <a:lstStyle/>
+          <a:p/>
+        </p:txBody>
+      </p:sp>
+      <p:sp>
+        <p:nvSpPr>
+          <p:cNvPr id="27" name="Oval 26"/>
+          <p:cNvSpPr/>
+          <p:nvPr/>
+        </p:nvSpPr>
+        <p:spPr>
+          <a:xfrm>
+            <a:off x="8356396" y="4251960"/>
+            <a:ext cx="457200" cy="457200"/>
+          </a:xfrm>
+          <a:prstGeom prst="ellipse">
+            <a:avLst/>
+          </a:prstGeom>
+          <a:solidFill>
+            <a:srgbClr val="F2B705"/>
+          </a:solidFill>
+          <a:ln>
+            <a:noFill/>
+          </a:ln>
+          <a:effectLst/>
+        </p:spPr>
+        <p:style>
+          <a:lnRef idx="1">
+            <a:schemeClr val="accent1"/>
+          </a:lnRef>
+          <a:fillRef idx="3">
+            <a:schemeClr val="accent1"/>
+          </a:fillRef>
+          <a:effectRef idx="2">
+            <a:schemeClr val="accent1"/>
+          </a:effectRef>
+          <a:fontRef idx="minor">
+            <a:schemeClr val="lt1"/>
+          </a:fontRef>
+        </p:style>
+        <p:txBody>
+          <a:bodyPr rtlCol="0" anchor="ctr" lIns="0" rIns="0" tIns="0" bIns="0"/>
+          <a:lstStyle/>
+          <a:p>
+            <a:pPr algn="ctr"/>
+            <a:r>
+              <a:rPr sz="1500" b="1">
+                <a:solidFill>
+                  <a:srgbClr val="202122"/>
+                </a:solidFill>
+                <a:latin typeface="Calibri"/>
+              </a:rPr>
+              <a:t>6</a:t>
+            </a:r>
+          </a:p>
+        </p:txBody>
+      </p:sp>
+      <p:sp>
+        <p:nvSpPr>
+          <p:cNvPr id="28" name="TextBox 27"/>
+          <p:cNvSpPr txBox="1"/>
+          <p:nvPr/>
+        </p:nvSpPr>
+        <p:spPr>
+          <a:xfrm>
+            <a:off x="8950756" y="4224528"/>
+            <a:ext cx="2509418" cy="512064"/>
+          </a:xfrm>
+          <a:prstGeom prst="rect">
+            <a:avLst/>
+          </a:prstGeom>
+          <a:noFill/>
+        </p:spPr>
+        <p:txBody>
+          <a:bodyPr wrap="square" anchor="ctr" lIns="0" rIns="0" tIns="0" bIns="0"/>
+          <a:lstStyle/>
+          <a:p>
+            <a:pPr algn="l"/>
+            <a:r>
+              <a:rPr sz="1900" b="1" i="0">
+                <a:solidFill>
+                  <a:srgbClr val="03306E"/>
+                </a:solidFill>
+                <a:latin typeface="Calibri"/>
+              </a:rPr>
+              <a:t>Procedures</a:t>
+            </a:r>
+          </a:p>
+        </p:txBody>
+      </p:sp>
+      <p:sp>
+        <p:nvSpPr>
+          <p:cNvPr id="29" name="TextBox 28"/>
+          <p:cNvSpPr txBox="1"/>
+          <p:nvPr/>
+        </p:nvSpPr>
+        <p:spPr>
+          <a:xfrm>
+            <a:off x="8356396" y="4892040"/>
+            <a:ext cx="3058058" cy="1143000"/>
+          </a:xfrm>
+          <a:prstGeom prst="rect">
+            <a:avLst/>
+          </a:prstGeom>
+          <a:noFill/>
+        </p:spPr>
+        <p:txBody>
+          <a:bodyPr wrap="square" anchor="t" lIns="0" rIns="0" tIns="0" bIns="0"/>
+          <a:lstStyle/>
+          <a:p>
+            <a:pPr algn="l"/>
+            <a:r>
+              <a:rPr sz="2000" b="0" i="0">
+                <a:solidFill>
+                  <a:srgbClr val="202122"/>
+                </a:solidFill>
+                <a:latin typeface="Calibri"/>
+              </a:rPr>
+              <a:t>Training, induction and careful rollout.</a:t>
+            </a:r>
+          </a:p>
+        </p:txBody>
+      </p:sp>
+    </p:spTree>
+  </p:cSld>
+  <p:clrMapOvr>
+    <a:masterClrMapping/>
+  </p:clrMapOvr>
+</p:sld>
+</file>
+
+<file path=ppt/slides/slide11.xml><?xml version="1.0" encoding="utf-8"?>
+<p:sld xmlns:a="http://schemas.openxmlformats.org/drawingml/2006/main" xmlns:p="http://schemas.openxmlformats.org/presentationml/2006/main" xmlns:r="http://schemas.openxmlformats.org/officeDocument/2006/relationships">
+  <p:cSld>
+    <p:bg>
+      <p:bgPr>
+        <a:solidFill>
+          <a:srgbClr val="FFFFFF"/>
+        </a:solidFill>
+        <a:effectLst/>
+      </p:bgPr>
+    </p:bg>
+    <p:spTree>
+      <p:nvGrpSpPr>
+        <p:cNvPr id="1" name=""/>
+        <p:cNvGrpSpPr/>
+        <p:nvPr/>
+      </p:nvGrpSpPr>
+      <p:grpSpPr/>
+      <p:sp>
+        <p:nvSpPr>
+          <p:cNvPr id="2" name="TextBox 1"/>
+          <p:cNvSpPr txBox="1"/>
+          <p:nvPr/>
+        </p:nvSpPr>
+        <p:spPr>
+          <a:xfrm>
+            <a:off x="548640" y="320040"/>
+            <a:ext cx="11094415" cy="274320"/>
+          </a:xfrm>
+          <a:prstGeom prst="rect">
+            <a:avLst/>
+          </a:prstGeom>
+          <a:noFill/>
+        </p:spPr>
+        <p:txBody>
+          <a:bodyPr wrap="square" anchor="t" lIns="0" rIns="0" tIns="0" bIns="0"/>
+          <a:lstStyle/>
+          <a:p>
+            <a:pPr algn="l"/>
+            <a:r>
+              <a:rPr sz="1100" b="1" i="0">
+                <a:solidFill>
+                  <a:srgbClr val="54595D"/>
+                </a:solidFill>
+                <a:latin typeface="Calibri"/>
+              </a:rPr>
+              <a:t>CORE COMPONENT  ·  Core Paper 2</a:t>
+            </a:r>
+          </a:p>
+        </p:txBody>
+      </p:sp>
+      <p:sp>
+        <p:nvSpPr>
+          <p:cNvPr id="3" name="TextBox 2"/>
+          <p:cNvSpPr txBox="1"/>
+          <p:nvPr/>
+        </p:nvSpPr>
+        <p:spPr>
+          <a:xfrm>
+            <a:off x="548640" y="566928"/>
+            <a:ext cx="11094415" cy="822960"/>
+          </a:xfrm>
+          <a:prstGeom prst="rect">
+            <a:avLst/>
+          </a:prstGeom>
+          <a:noFill/>
+        </p:spPr>
+        <p:txBody>
+          <a:bodyPr wrap="square" anchor="ctr" lIns="0" rIns="0" tIns="0" bIns="0"/>
+          <a:lstStyle/>
+          <a:p>
+            <a:pPr algn="l"/>
+            <a:r>
+              <a:rPr sz="3200" b="1" i="0">
+                <a:solidFill>
+                  <a:srgbClr val="03306E"/>
+                </a:solidFill>
+                <a:latin typeface="Cambria"/>
+              </a:rPr>
+              <a:t>Quick check: Making environments resilient</a:t>
+            </a:r>
+          </a:p>
+        </p:txBody>
+      </p:sp>
+      <p:sp>
+        <p:nvSpPr>
+          <p:cNvPr id="4" name="TextBox 3"/>
+          <p:cNvSpPr txBox="1"/>
+          <p:nvPr/>
+        </p:nvSpPr>
+        <p:spPr>
+          <a:xfrm>
+            <a:off x="548640" y="6446520"/>
+            <a:ext cx="8229600" cy="274320"/>
+          </a:xfrm>
+          <a:prstGeom prst="rect">
+            <a:avLst/>
+          </a:prstGeom>
+          <a:noFill/>
+        </p:spPr>
+        <p:txBody>
+          <a:bodyPr wrap="square" anchor="t" lIns="0" rIns="0" tIns="0" bIns="0"/>
+          <a:lstStyle/>
+          <a:p>
+            <a:pPr algn="l"/>
+            <a:r>
+              <a:rPr sz="1000" b="0" i="0">
+                <a:solidFill>
+                  <a:srgbClr val="54595D"/>
+                </a:solidFill>
+                <a:latin typeface="Calibri"/>
+              </a:rPr>
+              <a:t>Digital Software Development T Level  ·  Virtual, Cloud and Resilient Environments</a:t>
+            </a:r>
+          </a:p>
+        </p:txBody>
+      </p:sp>
+      <p:sp>
+        <p:nvSpPr>
+          <p:cNvPr id="5" name="TextBox 4"/>
+          <p:cNvSpPr txBox="1"/>
+          <p:nvPr/>
+        </p:nvSpPr>
+        <p:spPr>
+          <a:xfrm>
+            <a:off x="10728655" y="6446520"/>
+            <a:ext cx="914400" cy="274320"/>
+          </a:xfrm>
+          <a:prstGeom prst="rect">
+            <a:avLst/>
+          </a:prstGeom>
+          <a:noFill/>
+        </p:spPr>
+        <p:txBody>
+          <a:bodyPr wrap="square" anchor="t" lIns="0" rIns="0" tIns="0" bIns="0"/>
+          <a:lstStyle/>
+          <a:p>
+            <a:pPr algn="r"/>
+            <a:r>
+              <a:rPr sz="1000" b="0" i="0">
+                <a:solidFill>
+                  <a:srgbClr val="54595D"/>
+                </a:solidFill>
+                <a:latin typeface="Calibri"/>
+              </a:rPr>
+              <a:t>11</a:t>
+            </a:r>
+          </a:p>
+        </p:txBody>
+      </p:sp>
+      <p:sp>
+        <p:nvSpPr>
+          <p:cNvPr id="6" name="Oval 5"/>
+          <p:cNvSpPr/>
+          <p:nvPr/>
+        </p:nvSpPr>
+        <p:spPr>
+          <a:xfrm>
+            <a:off x="548640" y="1691640"/>
+            <a:ext cx="502920" cy="502920"/>
+          </a:xfrm>
+          <a:prstGeom prst="ellipse">
+            <a:avLst/>
+          </a:prstGeom>
+          <a:solidFill>
+            <a:srgbClr val="F2B705"/>
+          </a:solidFill>
+          <a:ln>
+            <a:noFill/>
+          </a:ln>
+          <a:effectLst/>
+        </p:spPr>
+        <p:style>
+          <a:lnRef idx="1">
+            <a:schemeClr val="accent1"/>
+          </a:lnRef>
+          <a:fillRef idx="3">
+            <a:schemeClr val="accent1"/>
+          </a:fillRef>
+          <a:effectRef idx="2">
+            <a:schemeClr val="accent1"/>
+          </a:effectRef>
+          <a:fontRef idx="minor">
+            <a:schemeClr val="lt1"/>
+          </a:fontRef>
+        </p:style>
+        <p:txBody>
+          <a:bodyPr rtlCol="0" anchor="ctr" lIns="0" rIns="0" tIns="0" bIns="0"/>
+          <a:lstStyle/>
+          <a:p>
+            <a:pPr algn="ctr"/>
+            <a:r>
+              <a:rPr sz="1600" b="1">
+                <a:solidFill>
+                  <a:srgbClr val="202122"/>
+                </a:solidFill>
+                <a:latin typeface="Calibri"/>
+              </a:rPr>
+              <a:t>1</a:t>
+            </a:r>
+          </a:p>
+        </p:txBody>
+      </p:sp>
+      <p:sp>
+        <p:nvSpPr>
+          <p:cNvPr id="7" name="TextBox 6"/>
+          <p:cNvSpPr txBox="1"/>
+          <p:nvPr/>
+        </p:nvSpPr>
+        <p:spPr>
+          <a:xfrm>
+            <a:off x="1371600" y="1645920"/>
+            <a:ext cx="10271455" cy="1188720"/>
+          </a:xfrm>
+          <a:prstGeom prst="rect">
+            <a:avLst/>
+          </a:prstGeom>
+          <a:noFill/>
+        </p:spPr>
+        <p:txBody>
+          <a:bodyPr wrap="square" anchor="t" lIns="0" rIns="0" tIns="0" bIns="0"/>
+          <a:lstStyle/>
+          <a:p>
+            <a:pPr algn="l"/>
+            <a:r>
+              <a:rPr sz="2400" b="0" i="0">
+                <a:solidFill>
+                  <a:srgbClr val="202122"/>
+                </a:solidFill>
+                <a:latin typeface="Calibri"/>
+              </a:rPr>
+              <a:t>What is redundancy?</a:t>
+            </a:r>
+          </a:p>
+        </p:txBody>
+      </p:sp>
+      <p:sp>
+        <p:nvSpPr>
+          <p:cNvPr id="8" name="Oval 7"/>
+          <p:cNvSpPr/>
+          <p:nvPr/>
+        </p:nvSpPr>
+        <p:spPr>
+          <a:xfrm>
+            <a:off x="548640" y="3108960"/>
+            <a:ext cx="502920" cy="502920"/>
+          </a:xfrm>
+          <a:prstGeom prst="ellipse">
+            <a:avLst/>
+          </a:prstGeom>
+          <a:solidFill>
+            <a:srgbClr val="F2B705"/>
+          </a:solidFill>
+          <a:ln>
+            <a:noFill/>
+          </a:ln>
+          <a:effectLst/>
+        </p:spPr>
+        <p:style>
+          <a:lnRef idx="1">
+            <a:schemeClr val="accent1"/>
+          </a:lnRef>
+          <a:fillRef idx="3">
+            <a:schemeClr val="accent1"/>
+          </a:fillRef>
+          <a:effectRef idx="2">
+            <a:schemeClr val="accent1"/>
+          </a:effectRef>
+          <a:fontRef idx="minor">
+            <a:schemeClr val="lt1"/>
+          </a:fontRef>
+        </p:style>
+        <p:txBody>
+          <a:bodyPr rtlCol="0" anchor="ctr" lIns="0" rIns="0" tIns="0" bIns="0"/>
+          <a:lstStyle/>
+          <a:p>
+            <a:pPr algn="ctr"/>
+            <a:r>
+              <a:rPr sz="1600" b="1">
+                <a:solidFill>
+                  <a:srgbClr val="202122"/>
+                </a:solidFill>
+                <a:latin typeface="Calibri"/>
+              </a:rPr>
+              <a:t>2</a:t>
+            </a:r>
+          </a:p>
+        </p:txBody>
+      </p:sp>
+      <p:sp>
+        <p:nvSpPr>
+          <p:cNvPr id="9" name="TextBox 8"/>
+          <p:cNvSpPr txBox="1"/>
+          <p:nvPr/>
+        </p:nvSpPr>
+        <p:spPr>
+          <a:xfrm>
+            <a:off x="1371600" y="3063240"/>
+            <a:ext cx="10271455" cy="1188720"/>
+          </a:xfrm>
+          <a:prstGeom prst="rect">
+            <a:avLst/>
+          </a:prstGeom>
+          <a:noFill/>
+        </p:spPr>
+        <p:txBody>
+          <a:bodyPr wrap="square" anchor="t" lIns="0" rIns="0" tIns="0" bIns="0"/>
+          <a:lstStyle/>
+          <a:p>
+            <a:pPr algn="l"/>
+            <a:r>
+              <a:rPr sz="2400" b="0" i="0">
+                <a:solidFill>
+                  <a:srgbClr val="202122"/>
+                </a:solidFill>
+                <a:latin typeface="Calibri"/>
+              </a:rPr>
+              <a:t>Why test backups?</a:t>
+            </a:r>
+          </a:p>
+        </p:txBody>
+      </p:sp>
+      <p:sp>
+        <p:nvSpPr>
+          <p:cNvPr id="10" name="Oval 9"/>
+          <p:cNvSpPr/>
+          <p:nvPr/>
+        </p:nvSpPr>
+        <p:spPr>
+          <a:xfrm>
+            <a:off x="548640" y="4526280"/>
+            <a:ext cx="502920" cy="502920"/>
+          </a:xfrm>
+          <a:prstGeom prst="ellipse">
+            <a:avLst/>
+          </a:prstGeom>
+          <a:solidFill>
+            <a:srgbClr val="F2B705"/>
+          </a:solidFill>
+          <a:ln>
+            <a:noFill/>
+          </a:ln>
+          <a:effectLst/>
+        </p:spPr>
+        <p:style>
+          <a:lnRef idx="1">
+            <a:schemeClr val="accent1"/>
+          </a:lnRef>
+          <a:fillRef idx="3">
+            <a:schemeClr val="accent1"/>
+          </a:fillRef>
+          <a:effectRef idx="2">
+            <a:schemeClr val="accent1"/>
+          </a:effectRef>
+          <a:fontRef idx="minor">
+            <a:schemeClr val="lt1"/>
+          </a:fontRef>
+        </p:style>
+        <p:txBody>
+          <a:bodyPr rtlCol="0" anchor="ctr" lIns="0" rIns="0" tIns="0" bIns="0"/>
+          <a:lstStyle/>
+          <a:p>
+            <a:pPr algn="ctr"/>
+            <a:r>
+              <a:rPr sz="1600" b="1">
+                <a:solidFill>
+                  <a:srgbClr val="202122"/>
+                </a:solidFill>
+                <a:latin typeface="Calibri"/>
+              </a:rPr>
+              <a:t>3</a:t>
+            </a:r>
+          </a:p>
+        </p:txBody>
+      </p:sp>
+      <p:sp>
+        <p:nvSpPr>
+          <p:cNvPr id="11" name="TextBox 10"/>
+          <p:cNvSpPr txBox="1"/>
+          <p:nvPr/>
+        </p:nvSpPr>
+        <p:spPr>
+          <a:xfrm>
+            <a:off x="1371600" y="4480560"/>
+            <a:ext cx="10271455" cy="1188720"/>
+          </a:xfrm>
+          <a:prstGeom prst="rect">
+            <a:avLst/>
+          </a:prstGeom>
+          <a:noFill/>
+        </p:spPr>
+        <p:txBody>
+          <a:bodyPr wrap="square" anchor="t" lIns="0" rIns="0" tIns="0" bIns="0"/>
+          <a:lstStyle/>
+          <a:p>
+            <a:pPr algn="l"/>
+            <a:r>
+              <a:rPr sz="2400" b="0" i="0">
+                <a:solidFill>
+                  <a:srgbClr val="202122"/>
+                </a:solidFill>
+                <a:latin typeface="Calibri"/>
+              </a:rPr>
+              <a:t>What is a hot site?</a:t>
+            </a:r>
+          </a:p>
+        </p:txBody>
+      </p:sp>
+      <p:sp>
+        <p:nvSpPr>
+          <p:cNvPr id="12" name="TextBox 11"/>
+          <p:cNvSpPr txBox="1"/>
+          <p:nvPr/>
+        </p:nvSpPr>
+        <p:spPr>
+          <a:xfrm>
+            <a:off x="548640" y="5852160"/>
+            <a:ext cx="11094415" cy="365760"/>
+          </a:xfrm>
+          <a:prstGeom prst="rect">
+            <a:avLst/>
+          </a:prstGeom>
+          <a:noFill/>
+        </p:spPr>
+        <p:txBody>
+          <a:bodyPr wrap="square" anchor="t" lIns="0" rIns="0" tIns="0" bIns="0"/>
+          <a:lstStyle/>
+          <a:p>
+            <a:pPr algn="l"/>
+            <a:r>
+              <a:rPr sz="1300" b="0" i="1">
+                <a:solidFill>
+                  <a:srgbClr val="54595D"/>
+                </a:solidFill>
+                <a:latin typeface="Calibri"/>
+              </a:rPr>
+              <a:t>Answer on mini whiteboards or in your book. Answers are in the speaker notes.</a:t>
+            </a:r>
+          </a:p>
+        </p:txBody>
+      </p:sp>
+    </p:spTree>
+  </p:cSld>
+  <p:clrMapOvr>
+    <a:masterClrMapping/>
+  </p:clrMapOvr>
+</p:sld>
+</file>
+
+<file path=ppt/slides/slide12.xml><?xml version="1.0" encoding="utf-8"?>
+<p:sld xmlns:a="http://schemas.openxmlformats.org/drawingml/2006/main" xmlns:p="http://schemas.openxmlformats.org/presentationml/2006/main" xmlns:r="http://schemas.openxmlformats.org/officeDocument/2006/relationships">
+  <p:cSld>
+    <p:bg>
+      <p:bgPr>
+        <a:solidFill>
+          <a:srgbClr val="FFFFFF"/>
+        </a:solidFill>
+        <a:effectLst/>
+      </p:bgPr>
+    </p:bg>
+    <p:spTree>
+      <p:nvGrpSpPr>
+        <p:cNvPr id="1" name=""/>
+        <p:cNvGrpSpPr/>
+        <p:nvPr/>
+      </p:nvGrpSpPr>
+      <p:grpSpPr/>
+      <p:sp>
+        <p:nvSpPr>
+          <p:cNvPr id="2" name="TextBox 1"/>
+          <p:cNvSpPr txBox="1"/>
+          <p:nvPr/>
+        </p:nvSpPr>
+        <p:spPr>
+          <a:xfrm>
+            <a:off x="548640" y="320040"/>
+            <a:ext cx="11094415" cy="274320"/>
+          </a:xfrm>
+          <a:prstGeom prst="rect">
+            <a:avLst/>
+          </a:prstGeom>
+          <a:noFill/>
+        </p:spPr>
+        <p:txBody>
+          <a:bodyPr wrap="square" anchor="t" lIns="0" rIns="0" tIns="0" bIns="0"/>
+          <a:lstStyle/>
+          <a:p>
+            <a:pPr algn="l"/>
+            <a:r>
+              <a:rPr sz="1100" b="1" i="0">
+                <a:solidFill>
+                  <a:srgbClr val="54595D"/>
+                </a:solidFill>
+                <a:latin typeface="Calibri"/>
+              </a:rPr>
+              <a:t>CORE COMPONENT  ·  Core Paper 2</a:t>
+            </a:r>
+          </a:p>
+        </p:txBody>
+      </p:sp>
+      <p:sp>
+        <p:nvSpPr>
+          <p:cNvPr id="3" name="TextBox 2"/>
+          <p:cNvSpPr txBox="1"/>
+          <p:nvPr/>
+        </p:nvSpPr>
+        <p:spPr>
+          <a:xfrm>
+            <a:off x="548640" y="566928"/>
+            <a:ext cx="11094415" cy="822960"/>
+          </a:xfrm>
+          <a:prstGeom prst="rect">
+            <a:avLst/>
+          </a:prstGeom>
+          <a:noFill/>
+        </p:spPr>
+        <p:txBody>
+          <a:bodyPr wrap="square" anchor="ctr" lIns="0" rIns="0" tIns="0" bIns="0"/>
+          <a:lstStyle/>
+          <a:p>
+            <a:pPr algn="l"/>
+            <a:r>
+              <a:rPr sz="3200" b="1" i="0">
+                <a:solidFill>
+                  <a:srgbClr val="03306E"/>
+                </a:solidFill>
+                <a:latin typeface="Cambria"/>
+              </a:rPr>
+              <a:t>Check your understanding</a:t>
+            </a:r>
+          </a:p>
+        </p:txBody>
+      </p:sp>
+      <p:sp>
+        <p:nvSpPr>
+          <p:cNvPr id="4" name="TextBox 3"/>
+          <p:cNvSpPr txBox="1"/>
+          <p:nvPr/>
+        </p:nvSpPr>
+        <p:spPr>
+          <a:xfrm>
+            <a:off x="548640" y="6446520"/>
+            <a:ext cx="8229600" cy="274320"/>
+          </a:xfrm>
+          <a:prstGeom prst="rect">
+            <a:avLst/>
+          </a:prstGeom>
+          <a:noFill/>
+        </p:spPr>
+        <p:txBody>
+          <a:bodyPr wrap="square" anchor="t" lIns="0" rIns="0" tIns="0" bIns="0"/>
+          <a:lstStyle/>
+          <a:p>
+            <a:pPr algn="l"/>
+            <a:r>
+              <a:rPr sz="1000" b="0" i="0">
+                <a:solidFill>
+                  <a:srgbClr val="54595D"/>
+                </a:solidFill>
+                <a:latin typeface="Calibri"/>
+              </a:rPr>
+              <a:t>Digital Software Development T Level  ·  Virtual, Cloud and Resilient Environments</a:t>
+            </a:r>
+          </a:p>
+        </p:txBody>
+      </p:sp>
+      <p:sp>
+        <p:nvSpPr>
+          <p:cNvPr id="5" name="TextBox 4"/>
+          <p:cNvSpPr txBox="1"/>
+          <p:nvPr/>
+        </p:nvSpPr>
+        <p:spPr>
+          <a:xfrm>
+            <a:off x="10728655" y="6446520"/>
+            <a:ext cx="914400" cy="274320"/>
+          </a:xfrm>
+          <a:prstGeom prst="rect">
+            <a:avLst/>
+          </a:prstGeom>
+          <a:noFill/>
+        </p:spPr>
+        <p:txBody>
+          <a:bodyPr wrap="square" anchor="t" lIns="0" rIns="0" tIns="0" bIns="0"/>
+          <a:lstStyle/>
+          <a:p>
+            <a:pPr algn="r"/>
+            <a:r>
+              <a:rPr sz="1000" b="0" i="0">
+                <a:solidFill>
+                  <a:srgbClr val="54595D"/>
+                </a:solidFill>
+                <a:latin typeface="Calibri"/>
+              </a:rPr>
+              <a:t>12</a:t>
+            </a:r>
+          </a:p>
+        </p:txBody>
+      </p:sp>
+      <p:sp>
+        <p:nvSpPr>
+          <p:cNvPr id="6" name="Oval 5"/>
+          <p:cNvSpPr/>
+          <p:nvPr/>
+        </p:nvSpPr>
+        <p:spPr>
+          <a:xfrm>
+            <a:off x="548640" y="1618488"/>
+            <a:ext cx="411480" cy="411480"/>
+          </a:xfrm>
+          <a:prstGeom prst="ellipse">
+            <a:avLst/>
+          </a:prstGeom>
+          <a:solidFill>
+            <a:srgbClr val="F2B705"/>
+          </a:solidFill>
+          <a:ln>
+            <a:noFill/>
+          </a:ln>
+          <a:effectLst/>
+        </p:spPr>
+        <p:style>
+          <a:lnRef idx="1">
+            <a:schemeClr val="accent1"/>
+          </a:lnRef>
+          <a:fillRef idx="3">
+            <a:schemeClr val="accent1"/>
+          </a:fillRef>
+          <a:effectRef idx="2">
+            <a:schemeClr val="accent1"/>
+          </a:effectRef>
+          <a:fontRef idx="minor">
+            <a:schemeClr val="lt1"/>
+          </a:fontRef>
+        </p:style>
+        <p:txBody>
+          <a:bodyPr rtlCol="0" anchor="ctr" lIns="0" rIns="0" tIns="0" bIns="0"/>
+          <a:lstStyle/>
+          <a:p>
+            <a:pPr algn="ctr"/>
+            <a:r>
+              <a:rPr sz="1400" b="1">
+                <a:solidFill>
+                  <a:srgbClr val="202122"/>
+                </a:solidFill>
+                <a:latin typeface="Calibri"/>
+              </a:rPr>
+              <a:t>1</a:t>
+            </a:r>
+          </a:p>
+        </p:txBody>
+      </p:sp>
+      <p:sp>
+        <p:nvSpPr>
+          <p:cNvPr id="7" name="TextBox 6"/>
+          <p:cNvSpPr txBox="1"/>
+          <p:nvPr/>
+        </p:nvSpPr>
+        <p:spPr>
+          <a:xfrm>
+            <a:off x="1234440" y="1600200"/>
+            <a:ext cx="10408615" cy="1030986"/>
+          </a:xfrm>
+          <a:prstGeom prst="rect">
+            <a:avLst/>
+          </a:prstGeom>
+          <a:noFill/>
+        </p:spPr>
+        <p:txBody>
+          <a:bodyPr wrap="square" anchor="t" lIns="0" rIns="0" tIns="0" bIns="0"/>
+          <a:lstStyle/>
+          <a:p>
+            <a:pPr algn="l"/>
+            <a:r>
+              <a:rPr sz="2200" b="0" i="0">
+                <a:solidFill>
+                  <a:srgbClr val="202122"/>
+                </a:solidFill>
+                <a:latin typeface="Calibri"/>
+              </a:rPr>
+              <a:t>Which hypervisor type runs directly on hardware?</a:t>
+            </a:r>
+          </a:p>
+        </p:txBody>
+      </p:sp>
+      <p:sp>
+        <p:nvSpPr>
+          <p:cNvPr id="8" name="Oval 7"/>
+          <p:cNvSpPr/>
+          <p:nvPr/>
+        </p:nvSpPr>
+        <p:spPr>
+          <a:xfrm>
+            <a:off x="548640" y="2814066"/>
+            <a:ext cx="411480" cy="411480"/>
+          </a:xfrm>
+          <a:prstGeom prst="ellipse">
+            <a:avLst/>
+          </a:prstGeom>
+          <a:solidFill>
+            <a:srgbClr val="F2B705"/>
+          </a:solidFill>
+          <a:ln>
+            <a:noFill/>
+          </a:ln>
+          <a:effectLst/>
+        </p:spPr>
+        <p:style>
+          <a:lnRef idx="1">
+            <a:schemeClr val="accent1"/>
+          </a:lnRef>
+          <a:fillRef idx="3">
+            <a:schemeClr val="accent1"/>
+          </a:fillRef>
+          <a:effectRef idx="2">
+            <a:schemeClr val="accent1"/>
+          </a:effectRef>
+          <a:fontRef idx="minor">
+            <a:schemeClr val="lt1"/>
+          </a:fontRef>
+        </p:style>
+        <p:txBody>
+          <a:bodyPr rtlCol="0" anchor="ctr" lIns="0" rIns="0" tIns="0" bIns="0"/>
+          <a:lstStyle/>
+          <a:p>
+            <a:pPr algn="ctr"/>
+            <a:r>
+              <a:rPr sz="1400" b="1">
+                <a:solidFill>
+                  <a:srgbClr val="202122"/>
+                </a:solidFill>
+                <a:latin typeface="Calibri"/>
+              </a:rPr>
+              <a:t>2</a:t>
+            </a:r>
+          </a:p>
+        </p:txBody>
+      </p:sp>
+      <p:sp>
+        <p:nvSpPr>
+          <p:cNvPr id="9" name="TextBox 8"/>
+          <p:cNvSpPr txBox="1"/>
+          <p:nvPr/>
+        </p:nvSpPr>
+        <p:spPr>
+          <a:xfrm>
+            <a:off x="1234440" y="2795778"/>
+            <a:ext cx="10408615" cy="1030986"/>
+          </a:xfrm>
+          <a:prstGeom prst="rect">
+            <a:avLst/>
+          </a:prstGeom>
+          <a:noFill/>
+        </p:spPr>
+        <p:txBody>
+          <a:bodyPr wrap="square" anchor="t" lIns="0" rIns="0" tIns="0" bIns="0"/>
+          <a:lstStyle/>
+          <a:p>
+            <a:pPr algn="l"/>
+            <a:r>
+              <a:rPr sz="2200" b="0" i="0">
+                <a:solidFill>
+                  <a:srgbClr val="202122"/>
+                </a:solidFill>
+                <a:latin typeface="Calibri"/>
+              </a:rPr>
+              <a:t>In PaaS, who manages the operating system?</a:t>
+            </a:r>
+          </a:p>
+        </p:txBody>
+      </p:sp>
+      <p:sp>
+        <p:nvSpPr>
+          <p:cNvPr id="10" name="Oval 9"/>
+          <p:cNvSpPr/>
+          <p:nvPr/>
+        </p:nvSpPr>
+        <p:spPr>
+          <a:xfrm>
+            <a:off x="548640" y="4009644"/>
+            <a:ext cx="411480" cy="411480"/>
+          </a:xfrm>
+          <a:prstGeom prst="ellipse">
+            <a:avLst/>
+          </a:prstGeom>
+          <a:solidFill>
+            <a:srgbClr val="F2B705"/>
+          </a:solidFill>
+          <a:ln>
+            <a:noFill/>
+          </a:ln>
+          <a:effectLst/>
+        </p:spPr>
+        <p:style>
+          <a:lnRef idx="1">
+            <a:schemeClr val="accent1"/>
+          </a:lnRef>
+          <a:fillRef idx="3">
+            <a:schemeClr val="accent1"/>
+          </a:fillRef>
+          <a:effectRef idx="2">
+            <a:schemeClr val="accent1"/>
+          </a:effectRef>
+          <a:fontRef idx="minor">
+            <a:schemeClr val="lt1"/>
+          </a:fontRef>
+        </p:style>
+        <p:txBody>
+          <a:bodyPr rtlCol="0" anchor="ctr" lIns="0" rIns="0" tIns="0" bIns="0"/>
+          <a:lstStyle/>
+          <a:p>
+            <a:pPr algn="ctr"/>
+            <a:r>
+              <a:rPr sz="1400" b="1">
+                <a:solidFill>
+                  <a:srgbClr val="202122"/>
+                </a:solidFill>
+                <a:latin typeface="Calibri"/>
+              </a:rPr>
+              <a:t>3</a:t>
+            </a:r>
+          </a:p>
+        </p:txBody>
+      </p:sp>
+      <p:sp>
+        <p:nvSpPr>
+          <p:cNvPr id="11" name="TextBox 10"/>
+          <p:cNvSpPr txBox="1"/>
+          <p:nvPr/>
+        </p:nvSpPr>
+        <p:spPr>
+          <a:xfrm>
+            <a:off x="1234440" y="3991356"/>
+            <a:ext cx="10408615" cy="1030986"/>
+          </a:xfrm>
+          <a:prstGeom prst="rect">
+            <a:avLst/>
+          </a:prstGeom>
+          <a:noFill/>
+        </p:spPr>
+        <p:txBody>
+          <a:bodyPr wrap="square" anchor="t" lIns="0" rIns="0" tIns="0" bIns="0"/>
+          <a:lstStyle/>
+          <a:p>
+            <a:pPr algn="l"/>
+            <a:r>
+              <a:rPr sz="2200" b="0" i="0">
+                <a:solidFill>
+                  <a:srgbClr val="202122"/>
+                </a:solidFill>
+                <a:latin typeface="Calibri"/>
+              </a:rPr>
+              <a:t>Give one drawback of virtualisation.</a:t>
+            </a:r>
+          </a:p>
+        </p:txBody>
+      </p:sp>
+      <p:sp>
+        <p:nvSpPr>
+          <p:cNvPr id="12" name="Oval 11"/>
+          <p:cNvSpPr/>
+          <p:nvPr/>
+        </p:nvSpPr>
+        <p:spPr>
+          <a:xfrm>
+            <a:off x="548640" y="5205221"/>
+            <a:ext cx="411480" cy="411480"/>
+          </a:xfrm>
+          <a:prstGeom prst="ellipse">
+            <a:avLst/>
+          </a:prstGeom>
+          <a:solidFill>
+            <a:srgbClr val="F2B705"/>
+          </a:solidFill>
+          <a:ln>
+            <a:noFill/>
+          </a:ln>
+          <a:effectLst/>
+        </p:spPr>
+        <p:style>
+          <a:lnRef idx="1">
+            <a:schemeClr val="accent1"/>
+          </a:lnRef>
+          <a:fillRef idx="3">
+            <a:schemeClr val="accent1"/>
+          </a:fillRef>
+          <a:effectRef idx="2">
+            <a:schemeClr val="accent1"/>
+          </a:effectRef>
+          <a:fontRef idx="minor">
+            <a:schemeClr val="lt1"/>
+          </a:fontRef>
+        </p:style>
+        <p:txBody>
+          <a:bodyPr rtlCol="0" anchor="ctr" lIns="0" rIns="0" tIns="0" bIns="0"/>
+          <a:lstStyle/>
+          <a:p>
+            <a:pPr algn="ctr"/>
+            <a:r>
+              <a:rPr sz="1400" b="1">
+                <a:solidFill>
+                  <a:srgbClr val="202122"/>
+                </a:solidFill>
+                <a:latin typeface="Calibri"/>
+              </a:rPr>
+              <a:t>4</a:t>
+            </a:r>
+          </a:p>
+        </p:txBody>
+      </p:sp>
+      <p:sp>
+        <p:nvSpPr>
+          <p:cNvPr id="13" name="TextBox 12"/>
+          <p:cNvSpPr txBox="1"/>
+          <p:nvPr/>
+        </p:nvSpPr>
+        <p:spPr>
+          <a:xfrm>
+            <a:off x="1234440" y="5186933"/>
+            <a:ext cx="10408615" cy="1030986"/>
+          </a:xfrm>
+          <a:prstGeom prst="rect">
+            <a:avLst/>
+          </a:prstGeom>
+          <a:noFill/>
+        </p:spPr>
+        <p:txBody>
+          <a:bodyPr wrap="square" anchor="t" lIns="0" rIns="0" tIns="0" bIns="0"/>
+          <a:lstStyle/>
+          <a:p>
+            <a:pPr algn="l"/>
+            <a:r>
+              <a:rPr sz="2200" b="0" i="0">
+                <a:solidFill>
+                  <a:srgbClr val="202122"/>
+                </a:solidFill>
+                <a:latin typeface="Calibri"/>
+              </a:rPr>
+              <a:t>What is a hot site?</a:t>
+            </a:r>
+          </a:p>
+        </p:txBody>
+      </p:sp>
+    </p:spTree>
+  </p:cSld>
+  <p:clrMapOvr>
+    <a:masterClrMapping/>
+  </p:clrMapOvr>
+</p:sld>
+</file>
+
+<file path=ppt/slides/slide13.xml><?xml version="1.0" encoding="utf-8"?>
+<p:sld xmlns:a="http://schemas.openxmlformats.org/drawingml/2006/main" xmlns:p="http://schemas.openxmlformats.org/presentationml/2006/main" xmlns:r="http://schemas.openxmlformats.org/officeDocument/2006/relationships">
+  <p:cSld>
+    <p:bg>
+      <p:bgPr>
+        <a:solidFill>
+          <a:srgbClr val="FFFFFF"/>
+        </a:solidFill>
+        <a:effectLst/>
+      </p:bgPr>
+    </p:bg>
+    <p:spTree>
+      <p:nvGrpSpPr>
+        <p:cNvPr id="1" name=""/>
+        <p:cNvGrpSpPr/>
+        <p:nvPr/>
+      </p:nvGrpSpPr>
+      <p:grpSpPr/>
+      <p:sp>
+        <p:nvSpPr>
+          <p:cNvPr id="2" name="TextBox 1"/>
+          <p:cNvSpPr txBox="1"/>
+          <p:nvPr/>
+        </p:nvSpPr>
+        <p:spPr>
+          <a:xfrm>
+            <a:off x="548640" y="320040"/>
+            <a:ext cx="11094415" cy="274320"/>
+          </a:xfrm>
+          <a:prstGeom prst="rect">
+            <a:avLst/>
+          </a:prstGeom>
+          <a:noFill/>
+        </p:spPr>
+        <p:txBody>
+          <a:bodyPr wrap="square" anchor="t" lIns="0" rIns="0" tIns="0" bIns="0"/>
+          <a:lstStyle/>
+          <a:p>
+            <a:pPr algn="l"/>
+            <a:r>
+              <a:rPr sz="1100" b="1" i="0">
+                <a:solidFill>
+                  <a:srgbClr val="54595D"/>
+                </a:solidFill>
+                <a:latin typeface="Calibri"/>
+              </a:rPr>
+              <a:t>CORE COMPONENT  ·  Core Paper 2</a:t>
+            </a:r>
+          </a:p>
+        </p:txBody>
+      </p:sp>
+      <p:sp>
+        <p:nvSpPr>
+          <p:cNvPr id="3" name="TextBox 2"/>
+          <p:cNvSpPr txBox="1"/>
+          <p:nvPr/>
+        </p:nvSpPr>
+        <p:spPr>
+          <a:xfrm>
+            <a:off x="548640" y="566928"/>
+            <a:ext cx="11094415" cy="822960"/>
+          </a:xfrm>
+          <a:prstGeom prst="rect">
+            <a:avLst/>
+          </a:prstGeom>
+          <a:noFill/>
+        </p:spPr>
+        <p:txBody>
+          <a:bodyPr wrap="square" anchor="ctr" lIns="0" rIns="0" tIns="0" bIns="0"/>
+          <a:lstStyle/>
+          <a:p>
+            <a:pPr algn="l"/>
+            <a:r>
+              <a:rPr sz="3200" b="1" i="0">
+                <a:solidFill>
+                  <a:srgbClr val="03306E"/>
+                </a:solidFill>
+                <a:latin typeface="Cambria"/>
+              </a:rPr>
+              <a:t>Answers</a:t>
+            </a:r>
+          </a:p>
+        </p:txBody>
+      </p:sp>
+      <p:sp>
+        <p:nvSpPr>
+          <p:cNvPr id="4" name="TextBox 3"/>
+          <p:cNvSpPr txBox="1"/>
+          <p:nvPr/>
+        </p:nvSpPr>
+        <p:spPr>
+          <a:xfrm>
+            <a:off x="548640" y="6446520"/>
+            <a:ext cx="8229600" cy="274320"/>
+          </a:xfrm>
+          <a:prstGeom prst="rect">
+            <a:avLst/>
+          </a:prstGeom>
+          <a:noFill/>
+        </p:spPr>
+        <p:txBody>
+          <a:bodyPr wrap="square" anchor="t" lIns="0" rIns="0" tIns="0" bIns="0"/>
+          <a:lstStyle/>
+          <a:p>
+            <a:pPr algn="l"/>
+            <a:r>
+              <a:rPr sz="1000" b="0" i="0">
+                <a:solidFill>
+                  <a:srgbClr val="54595D"/>
+                </a:solidFill>
+                <a:latin typeface="Calibri"/>
+              </a:rPr>
+              <a:t>Digital Software Development T Level  ·  Virtual, Cloud and Resilient Environments</a:t>
+            </a:r>
+          </a:p>
+        </p:txBody>
+      </p:sp>
+      <p:sp>
+        <p:nvSpPr>
+          <p:cNvPr id="5" name="TextBox 4"/>
+          <p:cNvSpPr txBox="1"/>
+          <p:nvPr/>
+        </p:nvSpPr>
+        <p:spPr>
+          <a:xfrm>
+            <a:off x="10728655" y="6446520"/>
+            <a:ext cx="914400" cy="274320"/>
+          </a:xfrm>
+          <a:prstGeom prst="rect">
+            <a:avLst/>
+          </a:prstGeom>
+          <a:noFill/>
+        </p:spPr>
+        <p:txBody>
+          <a:bodyPr wrap="square" anchor="t" lIns="0" rIns="0" tIns="0" bIns="0"/>
+          <a:lstStyle/>
+          <a:p>
+            <a:pPr algn="r"/>
+            <a:r>
+              <a:rPr sz="1000" b="0" i="0">
+                <a:solidFill>
+                  <a:srgbClr val="54595D"/>
+                </a:solidFill>
+                <a:latin typeface="Calibri"/>
+              </a:rPr>
+              <a:t>13</a:t>
+            </a:r>
+          </a:p>
+        </p:txBody>
+      </p:sp>
+      <p:sp>
+        <p:nvSpPr>
+          <p:cNvPr id="6" name="Oval 5"/>
+          <p:cNvSpPr/>
+          <p:nvPr/>
+        </p:nvSpPr>
+        <p:spPr>
+          <a:xfrm>
+            <a:off x="548640" y="1618488"/>
+            <a:ext cx="411480" cy="411480"/>
+          </a:xfrm>
+          <a:prstGeom prst="ellipse">
+            <a:avLst/>
+          </a:prstGeom>
+          <a:solidFill>
+            <a:srgbClr val="F2B705"/>
+          </a:solidFill>
+          <a:ln>
+            <a:noFill/>
+          </a:ln>
+          <a:effectLst/>
+        </p:spPr>
+        <p:style>
+          <a:lnRef idx="1">
+            <a:schemeClr val="accent1"/>
+          </a:lnRef>
+          <a:fillRef idx="3">
+            <a:schemeClr val="accent1"/>
+          </a:fillRef>
+          <a:effectRef idx="2">
+            <a:schemeClr val="accent1"/>
+          </a:effectRef>
+          <a:fontRef idx="minor">
+            <a:schemeClr val="lt1"/>
+          </a:fontRef>
+        </p:style>
+        <p:txBody>
+          <a:bodyPr rtlCol="0" anchor="ctr" lIns="0" rIns="0" tIns="0" bIns="0"/>
+          <a:lstStyle/>
+          <a:p>
+            <a:pPr algn="ctr"/>
+            <a:r>
+              <a:rPr sz="1400" b="1">
+                <a:solidFill>
+                  <a:srgbClr val="202122"/>
+                </a:solidFill>
+                <a:latin typeface="Calibri"/>
+              </a:rPr>
+              <a:t>1</a:t>
+            </a:r>
+          </a:p>
+        </p:txBody>
+      </p:sp>
+      <p:sp>
+        <p:nvSpPr>
+          <p:cNvPr id="7" name="TextBox 6"/>
+          <p:cNvSpPr txBox="1"/>
+          <p:nvPr/>
+        </p:nvSpPr>
+        <p:spPr>
+          <a:xfrm>
+            <a:off x="1234440" y="1600200"/>
+            <a:ext cx="10408615" cy="1030986"/>
+          </a:xfrm>
+          <a:prstGeom prst="rect">
+            <a:avLst/>
+          </a:prstGeom>
+          <a:noFill/>
+        </p:spPr>
+        <p:txBody>
+          <a:bodyPr wrap="square" anchor="t" lIns="0" rIns="0" tIns="0" bIns="0"/>
+          <a:lstStyle/>
+          <a:p>
+            <a:pPr algn="l"/>
+            <a:r>
+              <a:rPr sz="1800" b="0" i="0">
+                <a:solidFill>
+                  <a:srgbClr val="54595D"/>
+                </a:solidFill>
+                <a:latin typeface="Calibri"/>
+              </a:rPr>
+              <a:t>Which hypervisor type runs directly on hardware?</a:t>
+            </a:r>
+          </a:p>
+          <a:p>
+            <a:r>
+              <a:rPr sz="1800" b="1">
+                <a:solidFill>
+                  <a:srgbClr val="03306E"/>
+                </a:solidFill>
+                <a:latin typeface="Calibri"/>
+              </a:rPr>
+              <a:t>Type 1.</a:t>
+            </a:r>
+          </a:p>
+        </p:txBody>
+      </p:sp>
+      <p:sp>
+        <p:nvSpPr>
+          <p:cNvPr id="8" name="Oval 7"/>
+          <p:cNvSpPr/>
+          <p:nvPr/>
+        </p:nvSpPr>
+        <p:spPr>
+          <a:xfrm>
+            <a:off x="548640" y="2814066"/>
+            <a:ext cx="411480" cy="411480"/>
+          </a:xfrm>
+          <a:prstGeom prst="ellipse">
+            <a:avLst/>
+          </a:prstGeom>
+          <a:solidFill>
+            <a:srgbClr val="F2B705"/>
+          </a:solidFill>
+          <a:ln>
+            <a:noFill/>
+          </a:ln>
+          <a:effectLst/>
+        </p:spPr>
+        <p:style>
+          <a:lnRef idx="1">
+            <a:schemeClr val="accent1"/>
+          </a:lnRef>
+          <a:fillRef idx="3">
+            <a:schemeClr val="accent1"/>
+          </a:fillRef>
+          <a:effectRef idx="2">
+            <a:schemeClr val="accent1"/>
+          </a:effectRef>
+          <a:fontRef idx="minor">
+            <a:schemeClr val="lt1"/>
+          </a:fontRef>
+        </p:style>
+        <p:txBody>
+          <a:bodyPr rtlCol="0" anchor="ctr" lIns="0" rIns="0" tIns="0" bIns="0"/>
+          <a:lstStyle/>
+          <a:p>
+            <a:pPr algn="ctr"/>
+            <a:r>
+              <a:rPr sz="1400" b="1">
+                <a:solidFill>
+                  <a:srgbClr val="202122"/>
+                </a:solidFill>
+                <a:latin typeface="Calibri"/>
+              </a:rPr>
+              <a:t>2</a:t>
+            </a:r>
+          </a:p>
+        </p:txBody>
+      </p:sp>
+      <p:sp>
+        <p:nvSpPr>
+          <p:cNvPr id="9" name="TextBox 8"/>
+          <p:cNvSpPr txBox="1"/>
+          <p:nvPr/>
+        </p:nvSpPr>
+        <p:spPr>
+          <a:xfrm>
+            <a:off x="1234440" y="2795778"/>
+            <a:ext cx="10408615" cy="1030986"/>
+          </a:xfrm>
+          <a:prstGeom prst="rect">
+            <a:avLst/>
+          </a:prstGeom>
+          <a:noFill/>
+        </p:spPr>
+        <p:txBody>
+          <a:bodyPr wrap="square" anchor="t" lIns="0" rIns="0" tIns="0" bIns="0"/>
+          <a:lstStyle/>
+          <a:p>
+            <a:pPr algn="l"/>
+            <a:r>
+              <a:rPr sz="1800" b="0" i="0">
+                <a:solidFill>
+                  <a:srgbClr val="54595D"/>
+                </a:solidFill>
+                <a:latin typeface="Calibri"/>
+              </a:rPr>
+              <a:t>In PaaS, who manages the operating system?</a:t>
+            </a:r>
+          </a:p>
+          <a:p>
+            <a:r>
+              <a:rPr sz="1800" b="1">
+                <a:solidFill>
+                  <a:srgbClr val="03306E"/>
+                </a:solidFill>
+                <a:latin typeface="Calibri"/>
+              </a:rPr>
+              <a:t>The provider.</a:t>
+            </a:r>
+          </a:p>
+        </p:txBody>
+      </p:sp>
+      <p:sp>
+        <p:nvSpPr>
+          <p:cNvPr id="10" name="Oval 9"/>
+          <p:cNvSpPr/>
+          <p:nvPr/>
+        </p:nvSpPr>
+        <p:spPr>
+          <a:xfrm>
+            <a:off x="548640" y="4009644"/>
+            <a:ext cx="411480" cy="411480"/>
+          </a:xfrm>
+          <a:prstGeom prst="ellipse">
+            <a:avLst/>
+          </a:prstGeom>
+          <a:solidFill>
+            <a:srgbClr val="F2B705"/>
+          </a:solidFill>
+          <a:ln>
+            <a:noFill/>
+          </a:ln>
+          <a:effectLst/>
+        </p:spPr>
+        <p:style>
+          <a:lnRef idx="1">
+            <a:schemeClr val="accent1"/>
+          </a:lnRef>
+          <a:fillRef idx="3">
+            <a:schemeClr val="accent1"/>
+          </a:fillRef>
+          <a:effectRef idx="2">
+            <a:schemeClr val="accent1"/>
+          </a:effectRef>
+          <a:fontRef idx="minor">
+            <a:schemeClr val="lt1"/>
+          </a:fontRef>
+        </p:style>
+        <p:txBody>
+          <a:bodyPr rtlCol="0" anchor="ctr" lIns="0" rIns="0" tIns="0" bIns="0"/>
+          <a:lstStyle/>
+          <a:p>
+            <a:pPr algn="ctr"/>
+            <a:r>
+              <a:rPr sz="1400" b="1">
+                <a:solidFill>
+                  <a:srgbClr val="202122"/>
+                </a:solidFill>
+                <a:latin typeface="Calibri"/>
+              </a:rPr>
+              <a:t>3</a:t>
+            </a:r>
+          </a:p>
+        </p:txBody>
+      </p:sp>
+      <p:sp>
+        <p:nvSpPr>
+          <p:cNvPr id="11" name="TextBox 10"/>
+          <p:cNvSpPr txBox="1"/>
+          <p:nvPr/>
+        </p:nvSpPr>
+        <p:spPr>
+          <a:xfrm>
+            <a:off x="1234440" y="3991356"/>
+            <a:ext cx="10408615" cy="1030986"/>
+          </a:xfrm>
+          <a:prstGeom prst="rect">
+            <a:avLst/>
+          </a:prstGeom>
+          <a:noFill/>
+        </p:spPr>
+        <p:txBody>
+          <a:bodyPr wrap="square" anchor="t" lIns="0" rIns="0" tIns="0" bIns="0"/>
+          <a:lstStyle/>
+          <a:p>
+            <a:pPr algn="l"/>
+            <a:r>
+              <a:rPr sz="1800" b="0" i="0">
+                <a:solidFill>
+                  <a:srgbClr val="54595D"/>
+                </a:solidFill>
+                <a:latin typeface="Calibri"/>
+              </a:rPr>
+              <a:t>Give one drawback of virtualisation.</a:t>
+            </a:r>
+          </a:p>
+          <a:p>
+            <a:r>
+              <a:rPr sz="1800" b="1">
+                <a:solidFill>
+                  <a:srgbClr val="03306E"/>
+                </a:solidFill>
+                <a:latin typeface="Calibri"/>
+              </a:rPr>
+              <a:t>Extra hardware load or slower execution.</a:t>
+            </a:r>
+          </a:p>
+        </p:txBody>
+      </p:sp>
+      <p:sp>
+        <p:nvSpPr>
+          <p:cNvPr id="12" name="Oval 11"/>
+          <p:cNvSpPr/>
+          <p:nvPr/>
+        </p:nvSpPr>
+        <p:spPr>
+          <a:xfrm>
+            <a:off x="548640" y="5205221"/>
+            <a:ext cx="411480" cy="411480"/>
+          </a:xfrm>
+          <a:prstGeom prst="ellipse">
+            <a:avLst/>
+          </a:prstGeom>
+          <a:solidFill>
+            <a:srgbClr val="F2B705"/>
+          </a:solidFill>
+          <a:ln>
+            <a:noFill/>
+          </a:ln>
+          <a:effectLst/>
+        </p:spPr>
+        <p:style>
+          <a:lnRef idx="1">
+            <a:schemeClr val="accent1"/>
+          </a:lnRef>
+          <a:fillRef idx="3">
+            <a:schemeClr val="accent1"/>
+          </a:fillRef>
+          <a:effectRef idx="2">
+            <a:schemeClr val="accent1"/>
+          </a:effectRef>
+          <a:fontRef idx="minor">
+            <a:schemeClr val="lt1"/>
+          </a:fontRef>
+        </p:style>
+        <p:txBody>
+          <a:bodyPr rtlCol="0" anchor="ctr" lIns="0" rIns="0" tIns="0" bIns="0"/>
+          <a:lstStyle/>
+          <a:p>
+            <a:pPr algn="ctr"/>
+            <a:r>
+              <a:rPr sz="1400" b="1">
+                <a:solidFill>
+                  <a:srgbClr val="202122"/>
+                </a:solidFill>
+                <a:latin typeface="Calibri"/>
+              </a:rPr>
+              <a:t>4</a:t>
+            </a:r>
+          </a:p>
+        </p:txBody>
+      </p:sp>
+      <p:sp>
+        <p:nvSpPr>
+          <p:cNvPr id="13" name="TextBox 12"/>
+          <p:cNvSpPr txBox="1"/>
+          <p:nvPr/>
+        </p:nvSpPr>
+        <p:spPr>
+          <a:xfrm>
+            <a:off x="1234440" y="5186933"/>
+            <a:ext cx="10408615" cy="1030986"/>
+          </a:xfrm>
+          <a:prstGeom prst="rect">
+            <a:avLst/>
+          </a:prstGeom>
+          <a:noFill/>
+        </p:spPr>
+        <p:txBody>
+          <a:bodyPr wrap="square" anchor="t" lIns="0" rIns="0" tIns="0" bIns="0"/>
+          <a:lstStyle/>
+          <a:p>
+            <a:pPr algn="l"/>
+            <a:r>
+              <a:rPr sz="1800" b="0" i="0">
+                <a:solidFill>
+                  <a:srgbClr val="54595D"/>
+                </a:solidFill>
+                <a:latin typeface="Calibri"/>
+              </a:rPr>
+              <a:t>What is a hot site?</a:t>
+            </a:r>
+          </a:p>
+          <a:p>
+            <a:r>
+              <a:rPr sz="1800" b="1">
+                <a:solidFill>
+                  <a:srgbClr val="03306E"/>
+                </a:solidFill>
+                <a:latin typeface="Calibri"/>
+              </a:rPr>
+              <a:t>A fully equipped backup site ready to take over almost immediately.</a:t>
+            </a:r>
+          </a:p>
+        </p:txBody>
+      </p:sp>
+    </p:spTree>
+  </p:cSld>
+  <p:clrMapOvr>
+    <a:masterClrMapping/>
+  </p:clrMapOvr>
+</p:sld>
+</file>
+
+<file path=ppt/slides/slide14.xml><?xml version="1.0" encoding="utf-8"?>
+<p:sld xmlns:a="http://schemas.openxmlformats.org/drawingml/2006/main" xmlns:p="http://schemas.openxmlformats.org/presentationml/2006/main" xmlns:r="http://schemas.openxmlformats.org/officeDocument/2006/relationships">
+  <p:cSld>
+    <p:bg>
+      <p:bgPr>
+        <a:solidFill>
+          <a:srgbClr val="FFFFFF"/>
+        </a:solidFill>
+        <a:effectLst/>
+      </p:bgPr>
+    </p:bg>
+    <p:spTree>
+      <p:nvGrpSpPr>
+        <p:cNvPr id="1" name=""/>
+        <p:cNvGrpSpPr/>
+        <p:nvPr/>
+      </p:nvGrpSpPr>
+      <p:grpSpPr/>
+      <p:sp>
+        <p:nvSpPr>
+          <p:cNvPr id="2" name="TextBox 1"/>
+          <p:cNvSpPr txBox="1"/>
+          <p:nvPr/>
+        </p:nvSpPr>
+        <p:spPr>
+          <a:xfrm>
+            <a:off x="548640" y="320040"/>
+            <a:ext cx="11094415" cy="274320"/>
+          </a:xfrm>
+          <a:prstGeom prst="rect">
+            <a:avLst/>
+          </a:prstGeom>
+          <a:noFill/>
+        </p:spPr>
+        <p:txBody>
+          <a:bodyPr wrap="square" anchor="t" lIns="0" rIns="0" tIns="0" bIns="0"/>
+          <a:lstStyle/>
+          <a:p>
+            <a:pPr algn="l"/>
+            <a:r>
+              <a:rPr sz="1100" b="1" i="0">
+                <a:solidFill>
+                  <a:srgbClr val="54595D"/>
+                </a:solidFill>
+                <a:latin typeface="Calibri"/>
+              </a:rPr>
+              <a:t>CORE COMPONENT  ·  Core Paper 2</a:t>
+            </a:r>
+          </a:p>
+        </p:txBody>
+      </p:sp>
+      <p:sp>
+        <p:nvSpPr>
+          <p:cNvPr id="3" name="TextBox 2"/>
+          <p:cNvSpPr txBox="1"/>
+          <p:nvPr/>
+        </p:nvSpPr>
+        <p:spPr>
+          <a:xfrm>
+            <a:off x="548640" y="566928"/>
+            <a:ext cx="11094415" cy="822960"/>
+          </a:xfrm>
+          <a:prstGeom prst="rect">
+            <a:avLst/>
+          </a:prstGeom>
+          <a:noFill/>
+        </p:spPr>
+        <p:txBody>
+          <a:bodyPr wrap="square" anchor="ctr" lIns="0" rIns="0" tIns="0" bIns="0"/>
+          <a:lstStyle/>
+          <a:p>
+            <a:pPr algn="l"/>
+            <a:r>
+              <a:rPr sz="3200" b="1" i="0">
+                <a:solidFill>
+                  <a:srgbClr val="03306E"/>
+                </a:solidFill>
+                <a:latin typeface="Cambria"/>
+              </a:rPr>
+              <a:t>Activity: Deploy decision</a:t>
+            </a:r>
+          </a:p>
+        </p:txBody>
+      </p:sp>
+      <p:sp>
+        <p:nvSpPr>
+          <p:cNvPr id="4" name="TextBox 3"/>
+          <p:cNvSpPr txBox="1"/>
+          <p:nvPr/>
+        </p:nvSpPr>
+        <p:spPr>
+          <a:xfrm>
+            <a:off x="548640" y="6446520"/>
+            <a:ext cx="8229600" cy="274320"/>
+          </a:xfrm>
+          <a:prstGeom prst="rect">
+            <a:avLst/>
+          </a:prstGeom>
+          <a:noFill/>
+        </p:spPr>
+        <p:txBody>
+          <a:bodyPr wrap="square" anchor="t" lIns="0" rIns="0" tIns="0" bIns="0"/>
+          <a:lstStyle/>
+          <a:p>
+            <a:pPr algn="l"/>
+            <a:r>
+              <a:rPr sz="1000" b="0" i="0">
+                <a:solidFill>
+                  <a:srgbClr val="54595D"/>
+                </a:solidFill>
+                <a:latin typeface="Calibri"/>
+              </a:rPr>
+              <a:t>Digital Software Development T Level  ·  Virtual, Cloud and Resilient Environments</a:t>
+            </a:r>
+          </a:p>
+        </p:txBody>
+      </p:sp>
+      <p:sp>
+        <p:nvSpPr>
+          <p:cNvPr id="5" name="TextBox 4"/>
+          <p:cNvSpPr txBox="1"/>
+          <p:nvPr/>
+        </p:nvSpPr>
+        <p:spPr>
+          <a:xfrm>
+            <a:off x="10728655" y="6446520"/>
+            <a:ext cx="914400" cy="274320"/>
+          </a:xfrm>
+          <a:prstGeom prst="rect">
+            <a:avLst/>
+          </a:prstGeom>
+          <a:noFill/>
+        </p:spPr>
+        <p:txBody>
+          <a:bodyPr wrap="square" anchor="t" lIns="0" rIns="0" tIns="0" bIns="0"/>
+          <a:lstStyle/>
+          <a:p>
+            <a:pPr algn="r"/>
+            <a:r>
+              <a:rPr sz="1000" b="0" i="0">
+                <a:solidFill>
+                  <a:srgbClr val="54595D"/>
+                </a:solidFill>
+                <a:latin typeface="Calibri"/>
+              </a:rPr>
+              <a:t>14</a:t>
+            </a:r>
+          </a:p>
+        </p:txBody>
+      </p:sp>
+      <p:sp>
+        <p:nvSpPr>
+          <p:cNvPr id="6" name="Rounded Rectangle 5"/>
+          <p:cNvSpPr/>
+          <p:nvPr/>
+        </p:nvSpPr>
+        <p:spPr>
+          <a:xfrm>
+            <a:off x="548640" y="1508760"/>
+            <a:ext cx="2011680" cy="457200"/>
+          </a:xfrm>
+          <a:prstGeom prst="roundRect">
+            <a:avLst>
+              <a:gd name="adj" fmla="val 50000"/>
+            </a:avLst>
+          </a:prstGeom>
+          <a:solidFill>
+            <a:srgbClr val="F2B705"/>
+          </a:solidFill>
+          <a:ln>
+            <a:noFill/>
+          </a:ln>
+          <a:effectLst/>
+        </p:spPr>
+        <p:style>
+          <a:lnRef idx="1">
+            <a:schemeClr val="accent1"/>
+          </a:lnRef>
+          <a:fillRef idx="3">
+            <a:schemeClr val="accent1"/>
+          </a:fillRef>
+          <a:effectRef idx="2">
+            <a:schemeClr val="accent1"/>
+          </a:effectRef>
+          <a:fontRef idx="minor">
+            <a:schemeClr val="lt1"/>
+          </a:fontRef>
+        </p:style>
+        <p:txBody>
+          <a:bodyPr rtlCol="0" anchor="ctr"/>
+          <a:lstStyle/>
+          <a:p/>
+        </p:txBody>
+      </p:sp>
+      <p:sp>
+        <p:nvSpPr>
+          <p:cNvPr id="7" name="TextBox 6"/>
+          <p:cNvSpPr txBox="1"/>
+          <p:nvPr/>
+        </p:nvSpPr>
+        <p:spPr>
+          <a:xfrm>
+            <a:off x="548640" y="1508760"/>
+            <a:ext cx="2011680" cy="457200"/>
+          </a:xfrm>
+          <a:prstGeom prst="rect">
+            <a:avLst/>
+          </a:prstGeom>
+          <a:noFill/>
+        </p:spPr>
+        <p:txBody>
+          <a:bodyPr wrap="square" anchor="ctr" lIns="0" rIns="0" tIns="0" bIns="0"/>
+          <a:lstStyle/>
+          <a:p>
+            <a:pPr algn="ctr"/>
+            <a:r>
+              <a:rPr sz="1400" b="1" i="0">
+                <a:solidFill>
+                  <a:srgbClr val="202122"/>
+                </a:solidFill>
+                <a:latin typeface="Calibri"/>
+              </a:rPr>
+              <a:t>20 minutes</a:t>
+            </a:r>
+          </a:p>
+        </p:txBody>
+      </p:sp>
+      <p:sp>
+        <p:nvSpPr>
+          <p:cNvPr id="8" name="TextBox 7"/>
+          <p:cNvSpPr txBox="1"/>
+          <p:nvPr/>
+        </p:nvSpPr>
+        <p:spPr>
+          <a:xfrm>
+            <a:off x="2743200" y="1508760"/>
+            <a:ext cx="4754880" cy="457200"/>
+          </a:xfrm>
+          <a:prstGeom prst="rect">
+            <a:avLst/>
+          </a:prstGeom>
+          <a:noFill/>
+        </p:spPr>
+        <p:txBody>
+          <a:bodyPr wrap="square" anchor="ctr" lIns="0" rIns="0" tIns="0" bIns="0"/>
+          <a:lstStyle/>
+          <a:p>
+            <a:pPr algn="l"/>
+            <a:r>
+              <a:rPr sz="1400" b="0" i="1">
+                <a:solidFill>
+                  <a:srgbClr val="54595D"/>
+                </a:solidFill>
+                <a:latin typeface="Calibri"/>
+              </a:rPr>
+              <a:t>Pairs</a:t>
+            </a:r>
+          </a:p>
+        </p:txBody>
+      </p:sp>
+      <p:sp>
+        <p:nvSpPr>
+          <p:cNvPr id="9" name="Oval 8"/>
+          <p:cNvSpPr/>
+          <p:nvPr/>
+        </p:nvSpPr>
+        <p:spPr>
+          <a:xfrm>
+            <a:off x="548640" y="2482596"/>
+            <a:ext cx="384048" cy="384048"/>
+          </a:xfrm>
+          <a:prstGeom prst="ellipse">
+            <a:avLst/>
+          </a:prstGeom>
+          <a:solidFill>
+            <a:srgbClr val="0645AD"/>
+          </a:solidFill>
+          <a:ln>
+            <a:noFill/>
+          </a:ln>
+          <a:effectLst/>
+        </p:spPr>
+        <p:style>
+          <a:lnRef idx="1">
+            <a:schemeClr val="accent1"/>
+          </a:lnRef>
+          <a:fillRef idx="3">
+            <a:schemeClr val="accent1"/>
+          </a:fillRef>
+          <a:effectRef idx="2">
+            <a:schemeClr val="accent1"/>
+          </a:effectRef>
+          <a:fontRef idx="minor">
+            <a:schemeClr val="lt1"/>
+          </a:fontRef>
+        </p:style>
+        <p:txBody>
+          <a:bodyPr rtlCol="0" anchor="ctr" lIns="0" rIns="0" tIns="0" bIns="0"/>
+          <a:lstStyle/>
+          <a:p>
+            <a:pPr algn="ctr"/>
+            <a:r>
+              <a:rPr sz="1300" b="1">
+                <a:solidFill>
+                  <a:srgbClr val="FFFFFF"/>
+                </a:solidFill>
+                <a:latin typeface="Calibri"/>
+              </a:rPr>
+              <a:t>1</a:t>
+            </a:r>
+          </a:p>
+        </p:txBody>
+      </p:sp>
+      <p:sp>
+        <p:nvSpPr>
+          <p:cNvPr id="10" name="TextBox 9"/>
+          <p:cNvSpPr txBox="1"/>
+          <p:nvPr/>
+        </p:nvSpPr>
+        <p:spPr>
+          <a:xfrm>
+            <a:off x="1143000" y="2240280"/>
+            <a:ext cx="5943600" cy="868680"/>
+          </a:xfrm>
+          <a:prstGeom prst="rect">
+            <a:avLst/>
+          </a:prstGeom>
+          <a:noFill/>
+        </p:spPr>
+        <p:txBody>
+          <a:bodyPr wrap="square" anchor="ctr" lIns="0" rIns="0" tIns="0" bIns="0"/>
+          <a:lstStyle/>
+          <a:p>
+            <a:pPr algn="l"/>
+            <a:r>
+              <a:rPr sz="1700" b="0" i="0">
+                <a:solidFill>
+                  <a:srgbClr val="202122"/>
+                </a:solidFill>
+                <a:latin typeface="Calibri"/>
+              </a:rPr>
+              <a:t>You are deploying a web app for a small charity.</a:t>
+            </a:r>
+          </a:p>
+        </p:txBody>
+      </p:sp>
+      <p:sp>
+        <p:nvSpPr>
+          <p:cNvPr id="11" name="Oval 10"/>
+          <p:cNvSpPr/>
+          <p:nvPr/>
+        </p:nvSpPr>
+        <p:spPr>
+          <a:xfrm>
+            <a:off x="548640" y="3461004"/>
+            <a:ext cx="384048" cy="384048"/>
+          </a:xfrm>
+          <a:prstGeom prst="ellipse">
+            <a:avLst/>
+          </a:prstGeom>
+          <a:solidFill>
+            <a:srgbClr val="0645AD"/>
+          </a:solidFill>
+          <a:ln>
+            <a:noFill/>
+          </a:ln>
+          <a:effectLst/>
+        </p:spPr>
+        <p:style>
+          <a:lnRef idx="1">
+            <a:schemeClr val="accent1"/>
+          </a:lnRef>
+          <a:fillRef idx="3">
+            <a:schemeClr val="accent1"/>
+          </a:fillRef>
+          <a:effectRef idx="2">
+            <a:schemeClr val="accent1"/>
+          </a:effectRef>
+          <a:fontRef idx="minor">
+            <a:schemeClr val="lt1"/>
+          </a:fontRef>
+        </p:style>
+        <p:txBody>
+          <a:bodyPr rtlCol="0" anchor="ctr" lIns="0" rIns="0" tIns="0" bIns="0"/>
+          <a:lstStyle/>
+          <a:p>
+            <a:pPr algn="ctr"/>
+            <a:r>
+              <a:rPr sz="1300" b="1">
+                <a:solidFill>
+                  <a:srgbClr val="FFFFFF"/>
+                </a:solidFill>
+                <a:latin typeface="Calibri"/>
+              </a:rPr>
+              <a:t>2</a:t>
+            </a:r>
+          </a:p>
+        </p:txBody>
+      </p:sp>
+      <p:sp>
+        <p:nvSpPr>
+          <p:cNvPr id="12" name="TextBox 11"/>
+          <p:cNvSpPr txBox="1"/>
+          <p:nvPr/>
+        </p:nvSpPr>
+        <p:spPr>
+          <a:xfrm>
+            <a:off x="1143000" y="3218688"/>
+            <a:ext cx="5943600" cy="868680"/>
+          </a:xfrm>
+          <a:prstGeom prst="rect">
+            <a:avLst/>
+          </a:prstGeom>
+          <a:noFill/>
+        </p:spPr>
+        <p:txBody>
+          <a:bodyPr wrap="square" anchor="ctr" lIns="0" rIns="0" tIns="0" bIns="0"/>
+          <a:lstStyle/>
+          <a:p>
+            <a:pPr algn="l"/>
+            <a:r>
+              <a:rPr sz="1700" b="0" i="0">
+                <a:solidFill>
+                  <a:srgbClr val="202122"/>
+                </a:solidFill>
+                <a:latin typeface="Calibri"/>
+              </a:rPr>
+              <a:t>Choose IaaS, PaaS or SaaS and justify it.</a:t>
+            </a:r>
+          </a:p>
+        </p:txBody>
+      </p:sp>
+      <p:sp>
+        <p:nvSpPr>
+          <p:cNvPr id="13" name="Oval 12"/>
+          <p:cNvSpPr/>
+          <p:nvPr/>
+        </p:nvSpPr>
+        <p:spPr>
+          <a:xfrm>
+            <a:off x="548640" y="4439412"/>
+            <a:ext cx="384048" cy="384048"/>
+          </a:xfrm>
+          <a:prstGeom prst="ellipse">
+            <a:avLst/>
+          </a:prstGeom>
+          <a:solidFill>
+            <a:srgbClr val="0645AD"/>
+          </a:solidFill>
+          <a:ln>
+            <a:noFill/>
+          </a:ln>
+          <a:effectLst/>
+        </p:spPr>
+        <p:style>
+          <a:lnRef idx="1">
+            <a:schemeClr val="accent1"/>
+          </a:lnRef>
+          <a:fillRef idx="3">
+            <a:schemeClr val="accent1"/>
+          </a:fillRef>
+          <a:effectRef idx="2">
+            <a:schemeClr val="accent1"/>
+          </a:effectRef>
+          <a:fontRef idx="minor">
+            <a:schemeClr val="lt1"/>
+          </a:fontRef>
+        </p:style>
+        <p:txBody>
+          <a:bodyPr rtlCol="0" anchor="ctr" lIns="0" rIns="0" tIns="0" bIns="0"/>
+          <a:lstStyle/>
+          <a:p>
+            <a:pPr algn="ctr"/>
+            <a:r>
+              <a:rPr sz="1300" b="1">
+                <a:solidFill>
+                  <a:srgbClr val="FFFFFF"/>
+                </a:solidFill>
+                <a:latin typeface="Calibri"/>
+              </a:rPr>
+              <a:t>3</a:t>
+            </a:r>
+          </a:p>
+        </p:txBody>
+      </p:sp>
+      <p:sp>
+        <p:nvSpPr>
+          <p:cNvPr id="14" name="TextBox 13"/>
+          <p:cNvSpPr txBox="1"/>
+          <p:nvPr/>
+        </p:nvSpPr>
+        <p:spPr>
+          <a:xfrm>
+            <a:off x="1143000" y="4197096"/>
+            <a:ext cx="5943600" cy="868680"/>
+          </a:xfrm>
+          <a:prstGeom prst="rect">
+            <a:avLst/>
+          </a:prstGeom>
+          <a:noFill/>
+        </p:spPr>
+        <p:txBody>
+          <a:bodyPr wrap="square" anchor="ctr" lIns="0" rIns="0" tIns="0" bIns="0"/>
+          <a:lstStyle/>
+          <a:p>
+            <a:pPr algn="l"/>
+            <a:r>
+              <a:rPr sz="1700" b="0" i="0">
+                <a:solidFill>
+                  <a:srgbClr val="202122"/>
+                </a:solidFill>
+                <a:latin typeface="Calibri"/>
+              </a:rPr>
+              <a:t>List what the charity still has to manage.</a:t>
+            </a:r>
+          </a:p>
+        </p:txBody>
+      </p:sp>
+      <p:sp>
+        <p:nvSpPr>
+          <p:cNvPr id="15" name="Oval 14"/>
+          <p:cNvSpPr/>
+          <p:nvPr/>
+        </p:nvSpPr>
+        <p:spPr>
+          <a:xfrm>
+            <a:off x="548640" y="5417820"/>
+            <a:ext cx="384048" cy="384048"/>
+          </a:xfrm>
+          <a:prstGeom prst="ellipse">
+            <a:avLst/>
+          </a:prstGeom>
+          <a:solidFill>
+            <a:srgbClr val="0645AD"/>
+          </a:solidFill>
+          <a:ln>
+            <a:noFill/>
+          </a:ln>
+          <a:effectLst/>
+        </p:spPr>
+        <p:style>
+          <a:lnRef idx="1">
+            <a:schemeClr val="accent1"/>
+          </a:lnRef>
+          <a:fillRef idx="3">
+            <a:schemeClr val="accent1"/>
+          </a:fillRef>
+          <a:effectRef idx="2">
+            <a:schemeClr val="accent1"/>
+          </a:effectRef>
+          <a:fontRef idx="minor">
+            <a:schemeClr val="lt1"/>
+          </a:fontRef>
+        </p:style>
+        <p:txBody>
+          <a:bodyPr rtlCol="0" anchor="ctr" lIns="0" rIns="0" tIns="0" bIns="0"/>
+          <a:lstStyle/>
+          <a:p>
+            <a:pPr algn="ctr"/>
+            <a:r>
+              <a:rPr sz="1300" b="1">
+                <a:solidFill>
+                  <a:srgbClr val="FFFFFF"/>
+                </a:solidFill>
+                <a:latin typeface="Calibri"/>
+              </a:rPr>
+              <a:t>4</a:t>
+            </a:r>
+          </a:p>
+        </p:txBody>
+      </p:sp>
+      <p:sp>
+        <p:nvSpPr>
+          <p:cNvPr id="16" name="TextBox 15"/>
+          <p:cNvSpPr txBox="1"/>
+          <p:nvPr/>
+        </p:nvSpPr>
+        <p:spPr>
+          <a:xfrm>
+            <a:off x="1143000" y="5175504"/>
+            <a:ext cx="5943600" cy="868680"/>
+          </a:xfrm>
+          <a:prstGeom prst="rect">
+            <a:avLst/>
+          </a:prstGeom>
+          <a:noFill/>
+        </p:spPr>
+        <p:txBody>
+          <a:bodyPr wrap="square" anchor="ctr" lIns="0" rIns="0" tIns="0" bIns="0"/>
+          <a:lstStyle/>
+          <a:p>
+            <a:pPr algn="l"/>
+            <a:r>
+              <a:rPr sz="1700" b="0" i="0">
+                <a:solidFill>
+                  <a:srgbClr val="202122"/>
+                </a:solidFill>
+                <a:latin typeface="Calibri"/>
+              </a:rPr>
+              <a:t>Add three resilience measures.</a:t>
+            </a:r>
+          </a:p>
+        </p:txBody>
+      </p:sp>
+      <p:sp>
+        <p:nvSpPr>
+          <p:cNvPr id="17" name="Rounded Rectangle 16"/>
+          <p:cNvSpPr/>
+          <p:nvPr/>
+        </p:nvSpPr>
+        <p:spPr>
+          <a:xfrm>
+            <a:off x="7772400" y="1508760"/>
+            <a:ext cx="3867912" cy="4572000"/>
+          </a:xfrm>
+          <a:prstGeom prst="roundRect">
+            <a:avLst>
+              <a:gd name="adj" fmla="val 8000"/>
+            </a:avLst>
+          </a:prstGeom>
+          <a:solidFill>
+            <a:srgbClr val="EAF3FF"/>
+          </a:solidFill>
+          <a:ln>
+            <a:noFill/>
+          </a:ln>
+          <a:effectLst/>
+        </p:spPr>
+        <p:style>
+          <a:lnRef idx="1">
+            <a:schemeClr val="accent1"/>
+          </a:lnRef>
+          <a:fillRef idx="3">
+            <a:schemeClr val="accent1"/>
+          </a:fillRef>
+          <a:effectRef idx="2">
+            <a:schemeClr val="accent1"/>
+          </a:effectRef>
+          <a:fontRef idx="minor">
+            <a:schemeClr val="lt1"/>
+          </a:fontRef>
+        </p:style>
+        <p:txBody>
+          <a:bodyPr rtlCol="0" anchor="ctr"/>
+          <a:lstStyle/>
+          <a:p/>
+        </p:txBody>
+      </p:sp>
+      <p:sp>
+        <p:nvSpPr>
+          <p:cNvPr id="18" name="TextBox 17"/>
+          <p:cNvSpPr txBox="1"/>
+          <p:nvPr/>
+        </p:nvSpPr>
+        <p:spPr>
+          <a:xfrm>
+            <a:off x="8046720" y="1737360"/>
+            <a:ext cx="3291840" cy="365760"/>
+          </a:xfrm>
+          <a:prstGeom prst="rect">
+            <a:avLst/>
+          </a:prstGeom>
+          <a:noFill/>
+        </p:spPr>
+        <p:txBody>
+          <a:bodyPr wrap="square" anchor="t" lIns="0" rIns="0" tIns="0" bIns="0"/>
+          <a:lstStyle/>
+          <a:p>
+            <a:pPr algn="l"/>
+            <a:r>
+              <a:rPr sz="1300" b="1" i="0">
+                <a:solidFill>
+                  <a:srgbClr val="0645AD"/>
+                </a:solidFill>
+                <a:latin typeface="Calibri"/>
+              </a:rPr>
+              <a:t>SUCCESS CRITERIA</a:t>
+            </a:r>
+          </a:p>
+        </p:txBody>
+      </p:sp>
+      <p:sp>
+        <p:nvSpPr>
+          <p:cNvPr id="19" name="TextBox 18"/>
+          <p:cNvSpPr txBox="1"/>
+          <p:nvPr/>
+        </p:nvSpPr>
+        <p:spPr>
+          <a:xfrm>
+            <a:off x="8046720" y="2240280"/>
+            <a:ext cx="3337560" cy="3657600"/>
+          </a:xfrm>
+          <a:prstGeom prst="rect">
+            <a:avLst/>
+          </a:prstGeom>
+          <a:noFill/>
+        </p:spPr>
+        <p:txBody>
+          <a:bodyPr wrap="square" lIns="0" rIns="0" tIns="0" bIns="0">
+            <a:spAutoFit/>
+          </a:bodyPr>
+          <a:lstStyle/>
+          <a:p>
+            <a:pPr marL="274320" indent="-274320">
+              <a:spcAft>
+                <a:spcPts val="810"/>
+              </a:spcAft>
+              <a:buClr>
+                <a:srgbClr val="0645AD"/>
+              </a:buClr>
+              <a:buFont typeface="Arial"/>
+              <a:buChar char="•"/>
+            </a:pPr>
+            <a:r>
+              <a:rPr sz="1800" b="0">
+                <a:solidFill>
+                  <a:srgbClr val="202122"/>
+                </a:solidFill>
+                <a:latin typeface="Calibri"/>
+              </a:rPr>
+              <a:t>Model matches the charity's skills</a:t>
+            </a:r>
+          </a:p>
+          <a:p>
+            <a:pPr marL="274320" indent="-274320">
+              <a:spcAft>
+                <a:spcPts val="810"/>
+              </a:spcAft>
+              <a:buClr>
+                <a:srgbClr val="0645AD"/>
+              </a:buClr>
+              <a:buFont typeface="Arial"/>
+              <a:buChar char="•"/>
+            </a:pPr>
+            <a:r>
+              <a:rPr sz="1800" b="0">
+                <a:solidFill>
+                  <a:srgbClr val="202122"/>
+                </a:solidFill>
+                <a:latin typeface="Calibri"/>
+              </a:rPr>
+              <a:t>Responsibilities correct</a:t>
+            </a:r>
+          </a:p>
+          <a:p>
+            <a:pPr marL="274320" indent="-274320">
+              <a:spcAft>
+                <a:spcPts val="810"/>
+              </a:spcAft>
+              <a:buClr>
+                <a:srgbClr val="0645AD"/>
+              </a:buClr>
+              <a:buFont typeface="Arial"/>
+              <a:buChar char="•"/>
+            </a:pPr>
+            <a:r>
+              <a:rPr sz="1800" b="0">
+                <a:solidFill>
+                  <a:srgbClr val="202122"/>
+                </a:solidFill>
+                <a:latin typeface="Calibri"/>
+              </a:rPr>
+              <a:t>Resilience measures realistic</a:t>
+            </a:r>
+          </a:p>
+        </p:txBody>
+      </p:sp>
+    </p:spTree>
+  </p:cSld>
+  <p:clrMapOvr>
+    <a:masterClrMapping/>
+  </p:clrMapOvr>
+</p:sld>
+</file>
+
+<file path=ppt/slides/slide15.xml><?xml version="1.0" encoding="utf-8"?>
+<p:sld xmlns:a="http://schemas.openxmlformats.org/drawingml/2006/main" xmlns:p="http://schemas.openxmlformats.org/presentationml/2006/main" xmlns:r="http://schemas.openxmlformats.org/officeDocument/2006/relationships">
+  <p:cSld>
+    <p:bg>
+      <p:bgPr>
+        <a:solidFill>
+          <a:srgbClr val="03306E"/>
+        </a:solidFill>
+        <a:effectLst/>
+      </p:bgPr>
+    </p:bg>
+    <p:spTree>
+      <p:nvGrpSpPr>
+        <p:cNvPr id="1" name=""/>
+        <p:cNvGrpSpPr/>
+        <p:nvPr/>
+      </p:nvGrpSpPr>
+      <p:grpSpPr/>
+      <p:sp>
+        <p:nvSpPr>
+          <p:cNvPr id="2" name="TextBox 1"/>
+          <p:cNvSpPr txBox="1"/>
+          <p:nvPr/>
+        </p:nvSpPr>
+        <p:spPr>
+          <a:xfrm>
+            <a:off x="548640" y="320040"/>
+            <a:ext cx="11094415" cy="274320"/>
+          </a:xfrm>
+          <a:prstGeom prst="rect">
+            <a:avLst/>
+          </a:prstGeom>
+          <a:noFill/>
+        </p:spPr>
+        <p:txBody>
+          <a:bodyPr wrap="square" anchor="t" lIns="0" rIns="0" tIns="0" bIns="0"/>
+          <a:lstStyle/>
+          <a:p>
+            <a:pPr algn="l"/>
+            <a:r>
+              <a:rPr sz="1100" b="1" i="0">
+                <a:solidFill>
+                  <a:srgbClr val="A9C8F0"/>
+                </a:solidFill>
+                <a:latin typeface="Calibri"/>
+              </a:rPr>
+              <a:t>CORE COMPONENT  ·  Core Paper 2</a:t>
+            </a:r>
+          </a:p>
+        </p:txBody>
+      </p:sp>
+      <p:sp>
+        <p:nvSpPr>
+          <p:cNvPr id="3" name="TextBox 2"/>
+          <p:cNvSpPr txBox="1"/>
+          <p:nvPr/>
+        </p:nvSpPr>
+        <p:spPr>
+          <a:xfrm>
+            <a:off x="548640" y="566928"/>
+            <a:ext cx="11094415" cy="822960"/>
+          </a:xfrm>
+          <a:prstGeom prst="rect">
+            <a:avLst/>
+          </a:prstGeom>
+          <a:noFill/>
+        </p:spPr>
+        <p:txBody>
+          <a:bodyPr wrap="square" anchor="ctr" lIns="0" rIns="0" tIns="0" bIns="0"/>
+          <a:lstStyle/>
+          <a:p>
+            <a:pPr algn="l"/>
+            <a:r>
+              <a:rPr sz="3200" b="1" i="0">
+                <a:solidFill>
+                  <a:srgbClr val="FFFFFF"/>
+                </a:solidFill>
+                <a:latin typeface="Cambria"/>
+              </a:rPr>
+              <a:t>Exit ticket</a:t>
+            </a:r>
+          </a:p>
+        </p:txBody>
+      </p:sp>
+      <p:sp>
+        <p:nvSpPr>
+          <p:cNvPr id="4" name="Oval 3"/>
+          <p:cNvSpPr/>
+          <p:nvPr/>
+        </p:nvSpPr>
+        <p:spPr>
+          <a:xfrm>
+            <a:off x="548640" y="1737360"/>
+            <a:ext cx="502920" cy="502920"/>
+          </a:xfrm>
+          <a:prstGeom prst="ellipse">
+            <a:avLst/>
+          </a:prstGeom>
+          <a:solidFill>
+            <a:srgbClr val="F2B705"/>
+          </a:solidFill>
+          <a:ln>
+            <a:noFill/>
+          </a:ln>
+          <a:effectLst/>
+        </p:spPr>
+        <p:style>
+          <a:lnRef idx="1">
+            <a:schemeClr val="accent1"/>
+          </a:lnRef>
+          <a:fillRef idx="3">
+            <a:schemeClr val="accent1"/>
+          </a:fillRef>
+          <a:effectRef idx="2">
+            <a:schemeClr val="accent1"/>
+          </a:effectRef>
+          <a:fontRef idx="minor">
+            <a:schemeClr val="lt1"/>
+          </a:fontRef>
+        </p:style>
+        <p:txBody>
+          <a:bodyPr rtlCol="0" anchor="ctr" lIns="0" rIns="0" tIns="0" bIns="0"/>
+          <a:lstStyle/>
+          <a:p>
+            <a:pPr algn="ctr"/>
+            <a:r>
+              <a:rPr sz="1700" b="1">
+                <a:solidFill>
+                  <a:srgbClr val="202122"/>
+                </a:solidFill>
+                <a:latin typeface="Calibri"/>
+              </a:rPr>
+              <a:t>1</a:t>
+            </a:r>
+          </a:p>
+        </p:txBody>
+      </p:sp>
+      <p:sp>
+        <p:nvSpPr>
+          <p:cNvPr id="5" name="TextBox 4"/>
+          <p:cNvSpPr txBox="1"/>
+          <p:nvPr/>
+        </p:nvSpPr>
+        <p:spPr>
+          <a:xfrm>
+            <a:off x="1325880" y="1645920"/>
+            <a:ext cx="6583680" cy="822960"/>
+          </a:xfrm>
+          <a:prstGeom prst="rect">
+            <a:avLst/>
+          </a:prstGeom>
+          <a:noFill/>
+        </p:spPr>
+        <p:txBody>
+          <a:bodyPr wrap="square" anchor="ctr" lIns="0" rIns="0" tIns="0" bIns="0"/>
+          <a:lstStyle/>
+          <a:p>
+            <a:pPr algn="l"/>
+            <a:r>
+              <a:rPr sz="2000" b="0" i="0">
+                <a:solidFill>
+                  <a:srgbClr val="FFFFFF"/>
+                </a:solidFill>
+                <a:latin typeface="Calibri"/>
+              </a:rPr>
+              <a:t>Why do developers like virtual machines for testing?</a:t>
+            </a:r>
+          </a:p>
+        </p:txBody>
+      </p:sp>
+      <p:sp>
+        <p:nvSpPr>
+          <p:cNvPr id="6" name="Oval 5"/>
+          <p:cNvSpPr/>
+          <p:nvPr/>
+        </p:nvSpPr>
+        <p:spPr>
+          <a:xfrm>
+            <a:off x="548640" y="2697480"/>
+            <a:ext cx="502920" cy="502920"/>
+          </a:xfrm>
+          <a:prstGeom prst="ellipse">
+            <a:avLst/>
+          </a:prstGeom>
+          <a:solidFill>
+            <a:srgbClr val="F2B705"/>
+          </a:solidFill>
+          <a:ln>
+            <a:noFill/>
+          </a:ln>
+          <a:effectLst/>
+        </p:spPr>
+        <p:style>
+          <a:lnRef idx="1">
+            <a:schemeClr val="accent1"/>
+          </a:lnRef>
+          <a:fillRef idx="3">
+            <a:schemeClr val="accent1"/>
+          </a:fillRef>
+          <a:effectRef idx="2">
+            <a:schemeClr val="accent1"/>
+          </a:effectRef>
+          <a:fontRef idx="minor">
+            <a:schemeClr val="lt1"/>
+          </a:fontRef>
+        </p:style>
+        <p:txBody>
+          <a:bodyPr rtlCol="0" anchor="ctr" lIns="0" rIns="0" tIns="0" bIns="0"/>
+          <a:lstStyle/>
+          <a:p>
+            <a:pPr algn="ctr"/>
+            <a:r>
+              <a:rPr sz="1700" b="1">
+                <a:solidFill>
+                  <a:srgbClr val="202122"/>
+                </a:solidFill>
+                <a:latin typeface="Calibri"/>
+              </a:rPr>
+              <a:t>2</a:t>
+            </a:r>
+          </a:p>
+        </p:txBody>
+      </p:sp>
+      <p:sp>
+        <p:nvSpPr>
+          <p:cNvPr id="7" name="TextBox 6"/>
+          <p:cNvSpPr txBox="1"/>
+          <p:nvPr/>
+        </p:nvSpPr>
+        <p:spPr>
+          <a:xfrm>
+            <a:off x="1325880" y="2606040"/>
+            <a:ext cx="6583680" cy="822960"/>
+          </a:xfrm>
+          <a:prstGeom prst="rect">
+            <a:avLst/>
+          </a:prstGeom>
+          <a:noFill/>
+        </p:spPr>
+        <p:txBody>
+          <a:bodyPr wrap="square" anchor="ctr" lIns="0" rIns="0" tIns="0" bIns="0"/>
+          <a:lstStyle/>
+          <a:p>
+            <a:pPr algn="l"/>
+            <a:r>
+              <a:rPr sz="2000" b="0" i="0">
+                <a:solidFill>
+                  <a:srgbClr val="FFFFFF"/>
+                </a:solidFill>
+                <a:latin typeface="Calibri"/>
+              </a:rPr>
+              <a:t>Which cloud model gives the most control?</a:t>
+            </a:r>
+          </a:p>
+        </p:txBody>
+      </p:sp>
+      <p:sp>
+        <p:nvSpPr>
+          <p:cNvPr id="8" name="Oval 7"/>
+          <p:cNvSpPr/>
+          <p:nvPr/>
+        </p:nvSpPr>
+        <p:spPr>
+          <a:xfrm>
+            <a:off x="548640" y="3657600"/>
+            <a:ext cx="502920" cy="502920"/>
+          </a:xfrm>
+          <a:prstGeom prst="ellipse">
+            <a:avLst/>
+          </a:prstGeom>
+          <a:solidFill>
+            <a:srgbClr val="F2B705"/>
+          </a:solidFill>
+          <a:ln>
+            <a:noFill/>
+          </a:ln>
+          <a:effectLst/>
+        </p:spPr>
+        <p:style>
+          <a:lnRef idx="1">
+            <a:schemeClr val="accent1"/>
+          </a:lnRef>
+          <a:fillRef idx="3">
+            <a:schemeClr val="accent1"/>
+          </a:fillRef>
+          <a:effectRef idx="2">
+            <a:schemeClr val="accent1"/>
+          </a:effectRef>
+          <a:fontRef idx="minor">
+            <a:schemeClr val="lt1"/>
+          </a:fontRef>
+        </p:style>
+        <p:txBody>
+          <a:bodyPr rtlCol="0" anchor="ctr" lIns="0" rIns="0" tIns="0" bIns="0"/>
+          <a:lstStyle/>
+          <a:p>
+            <a:pPr algn="ctr"/>
+            <a:r>
+              <a:rPr sz="1700" b="1">
+                <a:solidFill>
+                  <a:srgbClr val="202122"/>
+                </a:solidFill>
+                <a:latin typeface="Calibri"/>
+              </a:rPr>
+              <a:t>3</a:t>
+            </a:r>
+          </a:p>
+        </p:txBody>
+      </p:sp>
+      <p:sp>
+        <p:nvSpPr>
+          <p:cNvPr id="9" name="TextBox 8"/>
+          <p:cNvSpPr txBox="1"/>
+          <p:nvPr/>
+        </p:nvSpPr>
+        <p:spPr>
+          <a:xfrm>
+            <a:off x="1325880" y="3566160"/>
+            <a:ext cx="6583680" cy="822960"/>
+          </a:xfrm>
+          <a:prstGeom prst="rect">
+            <a:avLst/>
+          </a:prstGeom>
+          <a:noFill/>
+        </p:spPr>
+        <p:txBody>
+          <a:bodyPr wrap="square" anchor="ctr" lIns="0" rIns="0" tIns="0" bIns="0"/>
+          <a:lstStyle/>
+          <a:p>
+            <a:pPr algn="l"/>
+            <a:r>
+              <a:rPr sz="2000" b="0" i="0">
+                <a:solidFill>
+                  <a:srgbClr val="FFFFFF"/>
+                </a:solidFill>
+                <a:latin typeface="Calibri"/>
+              </a:rPr>
+              <a:t>Why store backups offsite?</a:t>
+            </a:r>
+          </a:p>
+        </p:txBody>
+      </p:sp>
+      <p:sp>
+        <p:nvSpPr>
+          <p:cNvPr id="10" name="Rounded Rectangle 9"/>
+          <p:cNvSpPr/>
+          <p:nvPr/>
+        </p:nvSpPr>
+        <p:spPr>
+          <a:xfrm>
+            <a:off x="8229600" y="1645920"/>
+            <a:ext cx="3410712" cy="2926080"/>
+          </a:xfrm>
+          <a:prstGeom prst="roundRect">
+            <a:avLst>
+              <a:gd name="adj" fmla="val 8000"/>
+            </a:avLst>
+          </a:prstGeom>
+          <a:solidFill>
+            <a:srgbClr val="0645AD"/>
+          </a:solidFill>
+          <a:ln>
+            <a:noFill/>
+          </a:ln>
+          <a:effectLst/>
+        </p:spPr>
+        <p:style>
+          <a:lnRef idx="1">
+            <a:schemeClr val="accent1"/>
+          </a:lnRef>
+          <a:fillRef idx="3">
+            <a:schemeClr val="accent1"/>
+          </a:fillRef>
+          <a:effectRef idx="2">
+            <a:schemeClr val="accent1"/>
+          </a:effectRef>
+          <a:fontRef idx="minor">
+            <a:schemeClr val="lt1"/>
+          </a:fontRef>
+        </p:style>
+        <p:txBody>
+          <a:bodyPr rtlCol="0" anchor="ctr"/>
+          <a:lstStyle/>
+          <a:p/>
+        </p:txBody>
+      </p:sp>
+      <p:sp>
+        <p:nvSpPr>
+          <p:cNvPr id="11" name="TextBox 10"/>
+          <p:cNvSpPr txBox="1"/>
+          <p:nvPr/>
+        </p:nvSpPr>
+        <p:spPr>
+          <a:xfrm>
+            <a:off x="8503920" y="1874519"/>
+            <a:ext cx="2926080" cy="365760"/>
+          </a:xfrm>
+          <a:prstGeom prst="rect">
+            <a:avLst/>
+          </a:prstGeom>
+          <a:noFill/>
+        </p:spPr>
+        <p:txBody>
+          <a:bodyPr wrap="square" anchor="t" lIns="0" rIns="0" tIns="0" bIns="0"/>
+          <a:lstStyle/>
+          <a:p>
+            <a:pPr algn="l"/>
+            <a:r>
+              <a:rPr sz="1300" b="1" i="0">
+                <a:solidFill>
+                  <a:srgbClr val="A9C8F0"/>
+                </a:solidFill>
+                <a:latin typeface="Calibri"/>
+              </a:rPr>
+              <a:t>REVISE THIS TOPIC</a:t>
+            </a:r>
+          </a:p>
+        </p:txBody>
+      </p:sp>
+      <p:sp>
+        <p:nvSpPr>
+          <p:cNvPr id="12" name="TextBox 11"/>
+          <p:cNvSpPr txBox="1"/>
+          <p:nvPr/>
+        </p:nvSpPr>
+        <p:spPr>
+          <a:xfrm>
+            <a:off x="8503920" y="2286000"/>
+            <a:ext cx="2926080" cy="548640"/>
+          </a:xfrm>
+          <a:prstGeom prst="rect">
+            <a:avLst/>
+          </a:prstGeom>
+          <a:noFill/>
+        </p:spPr>
+        <p:txBody>
+          <a:bodyPr wrap="square" anchor="t" lIns="0" rIns="0" tIns="0" bIns="0"/>
+          <a:lstStyle/>
+          <a:p>
+            <a:pPr algn="l"/>
+            <a:r>
+              <a:rPr sz="1400" b="0" i="0">
+                <a:solidFill>
+                  <a:srgbClr val="FFFFFF"/>
+                </a:solidFill>
+                <a:latin typeface="Calibri"/>
+              </a:rPr>
+              <a:t>Revision notes for this lesson are on the study wiki:</a:t>
+            </a:r>
+          </a:p>
+        </p:txBody>
+      </p:sp>
+      <p:sp>
+        <p:nvSpPr>
+          <p:cNvPr id="13" name="TextBox 12"/>
+          <p:cNvSpPr txBox="1"/>
+          <p:nvPr/>
+        </p:nvSpPr>
+        <p:spPr>
+          <a:xfrm>
+            <a:off x="8503920" y="2926080"/>
+            <a:ext cx="2926080" cy="1463040"/>
+          </a:xfrm>
+          <a:prstGeom prst="rect">
+            <a:avLst/>
+          </a:prstGeom>
+          <a:noFill/>
+        </p:spPr>
+        <p:txBody>
+          <a:bodyPr wrap="square" anchor="t" lIns="0" rIns="0" tIns="0" bIns="0"/>
+          <a:lstStyle/>
+          <a:p>
+            <a:pPr algn="l"/>
+            <a:r>
+              <a:rPr sz="2000" b="1" i="0">
+                <a:solidFill>
+                  <a:srgbClr val="FFFFFF"/>
+                </a:solidFill>
+                <a:latin typeface="Cambria"/>
+              </a:rPr>
+              <a:t>Core Paper 2: Business Context, Data, Digital Environments and Security</a:t>
+            </a:r>
+          </a:p>
+        </p:txBody>
+      </p:sp>
+      <p:sp>
+        <p:nvSpPr>
+          <p:cNvPr id="14" name="TextBox 13"/>
+          <p:cNvSpPr txBox="1"/>
+          <p:nvPr/>
+        </p:nvSpPr>
+        <p:spPr>
+          <a:xfrm>
+            <a:off x="548640" y="5669280"/>
+            <a:ext cx="11094415" cy="548640"/>
+          </a:xfrm>
+          <a:prstGeom prst="rect">
+            <a:avLst/>
+          </a:prstGeom>
+          <a:noFill/>
+        </p:spPr>
+        <p:txBody>
+          <a:bodyPr wrap="square" anchor="t" lIns="0" rIns="0" tIns="0" bIns="0"/>
+          <a:lstStyle/>
+          <a:p>
+            <a:pPr algn="l"/>
+            <a:r>
+              <a:rPr sz="1200" b="0" i="0">
+                <a:solidFill>
+                  <a:srgbClr val="A9C8F0"/>
+                </a:solidFill>
+                <a:latin typeface="Calibri"/>
+              </a:rPr>
+              <a:t>https://lana6478.github.io/T-level-Digital-Software-Development/#/01-core-component/02-core-paper-2.md</a:t>
+            </a:r>
+          </a:p>
+        </p:txBody>
+      </p:sp>
+    </p:spTree>
+  </p:cSld>
+  <p:clrMapOvr>
+    <a:masterClrMapping/>
+  </p:clrMapOvr>
+</p:sld>
+</file>
+
 <file path=ppt/slides/slide2.xml><?xml version="1.0" encoding="utf-8"?>
 <p:sld xmlns:a="http://schemas.openxmlformats.org/drawingml/2006/main" xmlns:p="http://schemas.openxmlformats.org/presentationml/2006/main" xmlns:r="http://schemas.openxmlformats.org/officeDocument/2006/relationships">
   <p:cSld>
@@ -4686,18 +8881,98 @@
       </p:sp>
       <p:sp>
         <p:nvSpPr>
-          <p:cNvPr id="6" name="Rounded Rectangle 5"/>
+          <p:cNvPr id="6" name="TextBox 5"/>
+          <p:cNvSpPr txBox="1"/>
+          <p:nvPr/>
+        </p:nvSpPr>
+        <p:spPr>
+          <a:xfrm>
+            <a:off x="548640" y="1554480"/>
+            <a:ext cx="6720840" cy="4617720"/>
+          </a:xfrm>
+          <a:prstGeom prst="rect">
+            <a:avLst/>
+          </a:prstGeom>
+          <a:noFill/>
+        </p:spPr>
+        <p:txBody>
+          <a:bodyPr wrap="square" lIns="0" rIns="0" tIns="0" bIns="0">
+            <a:spAutoFit/>
+          </a:bodyPr>
+          <a:lstStyle/>
+          <a:p>
+            <a:pPr>
+              <a:spcAft>
+                <a:spcPts val="1260"/>
+              </a:spcAft>
+            </a:pPr>
+            <a:r>
+              <a:rPr sz="2100" b="0">
+                <a:solidFill>
+                  <a:srgbClr val="202122"/>
+                </a:solidFill>
+                <a:latin typeface="Calibri"/>
+              </a:rPr>
+              <a:t>Virtualisation runs virtual machines (VMs) on one physical computer, managed by a hypervisor. Type 1 hypervisors run directly on hardware in data centres; Type 2 run on a normal OS, like VirtualBox on a laptop.</a:t>
+            </a:r>
+          </a:p>
+          <a:p>
+            <a:pPr>
+              <a:spcAft>
+                <a:spcPts val="1260"/>
+              </a:spcAft>
+            </a:pPr>
+            <a:r>
+              <a:rPr sz="2100" b="0">
+                <a:solidFill>
+                  <a:srgbClr val="202122"/>
+                </a:solidFill>
+                <a:latin typeface="Calibri"/>
+              </a:rPr>
+              <a:t>VMs are isolated and portable, so they're cheap at scale, easy to manage, good for disaster recovery and ideal for testing: developers can test software on different operating systems without extra hardware.</a:t>
+            </a:r>
+          </a:p>
+          <a:p>
+            <a:pPr>
+              <a:spcAft>
+                <a:spcPts val="1260"/>
+              </a:spcAft>
+            </a:pPr>
+            <a:r>
+              <a:rPr sz="2100" b="1">
+                <a:solidFill>
+                  <a:srgbClr val="202122"/>
+                </a:solidFill>
+                <a:latin typeface="Calibri"/>
+              </a:rPr>
+              <a:t>Drawbacks:</a:t>
+            </a:r>
+            <a:r>
+              <a:rPr sz="2100" b="0">
+                <a:solidFill>
+                  <a:srgbClr val="202122"/>
+                </a:solidFill>
+                <a:latin typeface="Calibri"/>
+              </a:rPr>
+              <a:t> extra load on the hardware, slightly slower running, and performance figures that may not match real machines.</a:t>
+            </a:r>
+          </a:p>
+        </p:txBody>
+      </p:sp>
+      <p:sp>
+        <p:nvSpPr>
+          <p:cNvPr id="7" name="Rounded Rectangle 6"/>
           <p:cNvSpPr/>
           <p:nvPr/>
         </p:nvSpPr>
         <p:spPr>
           <a:xfrm>
-            <a:off x="548640" y="1600200"/>
-            <a:ext cx="5364327" cy="640080"/>
+            <a:off x="7772400" y="1554480"/>
+            <a:ext cx="3867912" cy="4526280"/>
           </a:xfrm>
           <a:prstGeom prst="roundRect">
             <a:avLst>
-              <a:gd name="adj" fmla="val 15000"/>
+              <a:gd name="adj" fmla="val 8000"/>
             </a:avLst>
           </a:prstGeom>
           <a:solidFill>
@@ -4730,55 +9005,20 @@
       </p:sp>
       <p:sp>
         <p:nvSpPr>
-          <p:cNvPr id="7" name="TextBox 6"/>
-          <p:cNvSpPr txBox="1"/>
-          <p:nvPr/>
-        </p:nvSpPr>
-        <p:spPr>
-          <a:xfrm>
-            <a:off x="777240" y="1600200"/>
-            <a:ext cx="4907127" cy="640080"/>
-          </a:xfrm>
-          <a:prstGeom prst="rect">
-            <a:avLst/>
-          </a:prstGeom>
-          <a:noFill/>
-        </p:spPr>
-        <p:txBody>
-          <a:bodyPr wrap="square" anchor="ctr" lIns="0" rIns="0" tIns="0" bIns="0"/>
-          <a:lstStyle/>
-          <a:p>
-            <a:pPr algn="l"/>
-            <a:r>
-              <a:rPr sz="2000" b="1" i="0">
-                <a:solidFill>
-                  <a:srgbClr val="FFFFFF"/>
-                </a:solidFill>
-                <a:latin typeface="Calibri"/>
-              </a:rPr>
-              <a:t>Components and features</a:t>
-            </a:r>
-          </a:p>
-        </p:txBody>
-      </p:sp>
-      <p:sp>
-        <p:nvSpPr>
-          <p:cNvPr id="8" name="Rounded Rectangle 7"/>
+          <p:cNvPr id="8" name="Oval 7"/>
           <p:cNvSpPr/>
           <p:nvPr/>
         </p:nvSpPr>
         <p:spPr>
           <a:xfrm>
-            <a:off x="548640" y="2377440"/>
-            <a:ext cx="5364327" cy="3794760"/>
-          </a:xfrm>
-          <a:prstGeom prst="roundRect">
-            <a:avLst>
-              <a:gd name="adj" fmla="val 4000"/>
-            </a:avLst>
+            <a:off x="8046720" y="1828800"/>
+            <a:ext cx="548640" cy="548640"/>
+          </a:xfrm>
+          <a:prstGeom prst="ellipse">
+            <a:avLst/>
           </a:prstGeom>
           <a:solidFill>
-            <a:srgbClr val="EAF3FF"/>
+            <a:srgbClr val="F2B705"/>
           </a:solidFill>
           <a:ln>
             <a:noFill/>
@@ -4800,9 +9040,20 @@
           </a:fontRef>
         </p:style>
         <p:txBody>
-          <a:bodyPr rtlCol="0" anchor="ctr"/>
-          <a:lstStyle/>
-          <a:p/>
+          <a:bodyPr rtlCol="0" anchor="ctr" lIns="0" rIns="0" tIns="0" bIns="0"/>
+          <a:lstStyle/>
+          <a:p>
+            <a:pPr algn="ctr"/>
+            <a:r>
+              <a:rPr sz="1300" b="1">
+                <a:solidFill>
+                  <a:srgbClr val="202122"/>
+                </a:solidFill>
+                <a:latin typeface="Calibri"/>
+              </a:rPr>
+              <a:t>e.g.</a:t>
+            </a:r>
+          </a:p>
         </p:txBody>
       </p:sp>
       <p:sp>
@@ -4813,335 +9064,60 @@
         </p:nvSpPr>
         <p:spPr>
           <a:xfrm>
-            <a:off x="822959" y="2606040"/>
-            <a:ext cx="4815687" cy="3337560"/>
-          </a:xfrm>
-          <a:prstGeom prst="rect">
-            <a:avLst/>
-          </a:prstGeom>
-          <a:noFill/>
-        </p:spPr>
-        <p:txBody>
-          <a:bodyPr wrap="square" lIns="0" rIns="0" tIns="0" bIns="0">
-            <a:spAutoFit/>
-          </a:bodyPr>
-          <a:lstStyle/>
-          <a:p>
-            <a:pPr marL="274320" indent="-274320">
-              <a:spcAft>
-                <a:spcPts val="990"/>
-              </a:spcAft>
-              <a:buClr>
-                <a:srgbClr val="0645AD"/>
-              </a:buClr>
-              <a:buFont typeface="Arial"/>
-              <a:buChar char="•"/>
-            </a:pPr>
-            <a:r>
-              <a:rPr sz="2200" b="1">
-                <a:solidFill>
-                  <a:srgbClr val="202122"/>
-                </a:solidFill>
-                <a:latin typeface="Calibri"/>
-              </a:rPr>
-              <a:t>Virtual machines:</a:t>
-            </a:r>
-            <a:r>
-              <a:rPr sz="2200" b="0">
-                <a:solidFill>
-                  <a:srgbClr val="202122"/>
-                </a:solidFill>
-                <a:latin typeface="Calibri"/>
-              </a:rPr>
-              <a:t> PCs, switches, routers, servers</a:t>
-            </a:r>
-          </a:p>
-          <a:p>
-            <a:pPr marL="274320" indent="-274320">
-              <a:spcAft>
-                <a:spcPts val="990"/>
-              </a:spcAft>
-              <a:buClr>
-                <a:srgbClr val="0645AD"/>
-              </a:buClr>
-              <a:buFont typeface="Arial"/>
-              <a:buChar char="•"/>
-            </a:pPr>
-            <a:r>
-              <a:rPr sz="2200" b="0">
-                <a:solidFill>
-                  <a:srgbClr val="202122"/>
-                </a:solidFill>
-                <a:latin typeface="Calibri"/>
-              </a:rPr>
-              <a:t>Type 1 hypervisor on the hardware; Type 2 on an OS</a:t>
-            </a:r>
-          </a:p>
-          <a:p>
-            <a:pPr marL="274320" indent="-274320">
-              <a:spcAft>
-                <a:spcPts val="990"/>
-              </a:spcAft>
-              <a:buClr>
-                <a:srgbClr val="0645AD"/>
-              </a:buClr>
-              <a:buFont typeface="Arial"/>
-              <a:buChar char="•"/>
-            </a:pPr>
-            <a:r>
-              <a:rPr sz="2200" b="0">
-                <a:solidFill>
-                  <a:srgbClr val="202122"/>
-                </a:solidFill>
-                <a:latin typeface="Calibri"/>
-              </a:rPr>
-              <a:t>Isolation, emulation, portability, sharing</a:t>
-            </a:r>
-          </a:p>
-        </p:txBody>
-      </p:sp>
-      <p:sp>
-        <p:nvSpPr>
-          <p:cNvPr id="10" name="Rounded Rectangle 9"/>
-          <p:cNvSpPr/>
-          <p:nvPr/>
-        </p:nvSpPr>
-        <p:spPr>
-          <a:xfrm>
-            <a:off x="6278727" y="1600200"/>
-            <a:ext cx="5364327" cy="640080"/>
-          </a:xfrm>
-          <a:prstGeom prst="roundRect">
-            <a:avLst>
-              <a:gd name="adj" fmla="val 15000"/>
-            </a:avLst>
-          </a:prstGeom>
-          <a:solidFill>
-            <a:srgbClr val="0645AD"/>
-          </a:solidFill>
-          <a:ln>
-            <a:noFill/>
-          </a:ln>
-          <a:effectLst/>
-        </p:spPr>
-        <p:style>
-          <a:lnRef idx="1">
-            <a:schemeClr val="accent1"/>
-          </a:lnRef>
-          <a:fillRef idx="3">
-            <a:schemeClr val="accent1"/>
-          </a:fillRef>
-          <a:effectRef idx="2">
-            <a:schemeClr val="accent1"/>
-          </a:effectRef>
-          <a:fontRef idx="minor">
-            <a:schemeClr val="lt1"/>
-          </a:fontRef>
-        </p:style>
-        <p:txBody>
-          <a:bodyPr rtlCol="0" anchor="ctr"/>
-          <a:lstStyle/>
-          <a:p/>
-        </p:txBody>
-      </p:sp>
-      <p:sp>
-        <p:nvSpPr>
-          <p:cNvPr id="11" name="TextBox 10"/>
+            <a:off x="8046720" y="2560320"/>
+            <a:ext cx="3291840" cy="365760"/>
+          </a:xfrm>
+          <a:prstGeom prst="rect">
+            <a:avLst/>
+          </a:prstGeom>
+          <a:noFill/>
+        </p:spPr>
+        <p:txBody>
+          <a:bodyPr wrap="square" anchor="t" lIns="0" rIns="0" tIns="0" bIns="0"/>
+          <a:lstStyle/>
+          <a:p>
+            <a:pPr algn="l"/>
+            <a:r>
+              <a:rPr sz="1300" b="1" i="0">
+                <a:solidFill>
+                  <a:srgbClr val="A9C8F0"/>
+                </a:solidFill>
+                <a:latin typeface="Calibri"/>
+              </a:rPr>
+              <a:t>EXAMPLE</a:t>
+            </a:r>
+          </a:p>
+        </p:txBody>
+      </p:sp>
+      <p:sp>
+        <p:nvSpPr>
+          <p:cNvPr id="10" name="TextBox 9"/>
           <p:cNvSpPr txBox="1"/>
           <p:nvPr/>
         </p:nvSpPr>
         <p:spPr>
           <a:xfrm>
-            <a:off x="6507327" y="1600200"/>
-            <a:ext cx="4907127" cy="640080"/>
-          </a:xfrm>
-          <a:prstGeom prst="rect">
-            <a:avLst/>
-          </a:prstGeom>
-          <a:noFill/>
-        </p:spPr>
-        <p:txBody>
-          <a:bodyPr wrap="square" anchor="ctr" lIns="0" rIns="0" tIns="0" bIns="0"/>
+            <a:off x="8046720" y="2971800"/>
+            <a:ext cx="3291840" cy="2971800"/>
+          </a:xfrm>
+          <a:prstGeom prst="rect">
+            <a:avLst/>
+          </a:prstGeom>
+          <a:noFill/>
+        </p:spPr>
+        <p:txBody>
+          <a:bodyPr wrap="square" anchor="t" lIns="0" rIns="0" tIns="0" bIns="0"/>
           <a:lstStyle/>
           <a:p>
             <a:pPr algn="l"/>
             <a:r>
-              <a:rPr sz="2000" b="1" i="0">
+              <a:rPr sz="1900" b="0" i="0">
                 <a:solidFill>
                   <a:srgbClr val="FFFFFF"/>
                 </a:solidFill>
-                <a:latin typeface="Calibri"/>
-              </a:rPr>
-              <a:t>Benefits and drawbacks</a:t>
-            </a:r>
-          </a:p>
-        </p:txBody>
-      </p:sp>
-      <p:sp>
-        <p:nvSpPr>
-          <p:cNvPr id="12" name="Rounded Rectangle 11"/>
-          <p:cNvSpPr/>
-          <p:nvPr/>
-        </p:nvSpPr>
-        <p:spPr>
-          <a:xfrm>
-            <a:off x="6278727" y="2377440"/>
-            <a:ext cx="5364327" cy="3794760"/>
-          </a:xfrm>
-          <a:prstGeom prst="roundRect">
-            <a:avLst>
-              <a:gd name="adj" fmla="val 4000"/>
-            </a:avLst>
-          </a:prstGeom>
-          <a:solidFill>
-            <a:srgbClr val="EAF3FF"/>
-          </a:solidFill>
-          <a:ln>
-            <a:noFill/>
-          </a:ln>
-          <a:effectLst/>
-        </p:spPr>
-        <p:style>
-          <a:lnRef idx="1">
-            <a:schemeClr val="accent1"/>
-          </a:lnRef>
-          <a:fillRef idx="3">
-            <a:schemeClr val="accent1"/>
-          </a:fillRef>
-          <a:effectRef idx="2">
-            <a:schemeClr val="accent1"/>
-          </a:effectRef>
-          <a:fontRef idx="minor">
-            <a:schemeClr val="lt1"/>
-          </a:fontRef>
-        </p:style>
-        <p:txBody>
-          <a:bodyPr rtlCol="0" anchor="ctr"/>
-          <a:lstStyle/>
-          <a:p/>
-        </p:txBody>
-      </p:sp>
-      <p:sp>
-        <p:nvSpPr>
-          <p:cNvPr id="13" name="TextBox 12"/>
-          <p:cNvSpPr txBox="1"/>
-          <p:nvPr/>
-        </p:nvSpPr>
-        <p:spPr>
-          <a:xfrm>
-            <a:off x="6553047" y="2606040"/>
-            <a:ext cx="4815687" cy="3337560"/>
-          </a:xfrm>
-          <a:prstGeom prst="rect">
-            <a:avLst/>
-          </a:prstGeom>
-          <a:noFill/>
-        </p:spPr>
-        <p:txBody>
-          <a:bodyPr wrap="square" lIns="0" rIns="0" tIns="0" bIns="0">
-            <a:spAutoFit/>
-          </a:bodyPr>
-          <a:lstStyle/>
-          <a:p>
-            <a:pPr marL="274320" indent="-274320">
-              <a:spcAft>
-                <a:spcPts val="990"/>
-              </a:spcAft>
-              <a:buClr>
-                <a:srgbClr val="0645AD"/>
-              </a:buClr>
-              <a:buFont typeface="Arial"/>
-              <a:buChar char="•"/>
-            </a:pPr>
-            <a:r>
-              <a:rPr sz="2200" b="0">
-                <a:solidFill>
-                  <a:srgbClr val="202122"/>
-                </a:solidFill>
-                <a:latin typeface="Calibri"/>
-              </a:rPr>
-              <a:t>Cost-effective at scale, easy to manage</a:t>
-            </a:r>
-          </a:p>
-          <a:p>
-            <a:pPr marL="274320" indent="-274320">
-              <a:spcAft>
-                <a:spcPts val="990"/>
-              </a:spcAft>
-              <a:buClr>
-                <a:srgbClr val="0645AD"/>
-              </a:buClr>
-              <a:buFont typeface="Arial"/>
-              <a:buChar char="•"/>
-            </a:pPr>
-            <a:r>
-              <a:rPr sz="2200" b="0">
-                <a:solidFill>
-                  <a:srgbClr val="202122"/>
-                </a:solidFill>
-                <a:latin typeface="Calibri"/>
-              </a:rPr>
-              <a:t>Better disaster recovery and testing</a:t>
-            </a:r>
-          </a:p>
-          <a:p>
-            <a:pPr marL="274320" indent="-274320">
-              <a:spcAft>
-                <a:spcPts val="990"/>
-              </a:spcAft>
-              <a:buClr>
-                <a:srgbClr val="0645AD"/>
-              </a:buClr>
-              <a:buFont typeface="Arial"/>
-              <a:buChar char="•"/>
-            </a:pPr>
-            <a:r>
-              <a:rPr sz="2200" b="1">
-                <a:solidFill>
-                  <a:srgbClr val="202122"/>
-                </a:solidFill>
-                <a:latin typeface="Calibri"/>
-              </a:rPr>
-              <a:t>But:</a:t>
-            </a:r>
-            <a:r>
-              <a:rPr sz="2200" b="0">
-                <a:solidFill>
-                  <a:srgbClr val="202122"/>
-                </a:solidFill>
-                <a:latin typeface="Calibri"/>
-              </a:rPr>
-              <a:t> extra hardware load and slower execution</a:t>
-            </a:r>
-          </a:p>
-          <a:p>
-            <a:pPr marL="274320" indent="-274320">
-              <a:spcAft>
-                <a:spcPts val="990"/>
-              </a:spcAft>
-              <a:buClr>
-                <a:srgbClr val="0645AD"/>
-              </a:buClr>
-              <a:buFont typeface="Arial"/>
-              <a:buChar char="•"/>
-            </a:pPr>
-            <a:r>
-              <a:rPr sz="2200" b="1">
-                <a:solidFill>
-                  <a:srgbClr val="202122"/>
-                </a:solidFill>
-                <a:latin typeface="Calibri"/>
-              </a:rPr>
-              <a:t>But:</a:t>
-            </a:r>
-            <a:r>
-              <a:rPr sz="2200" b="0">
-                <a:solidFill>
-                  <a:srgbClr val="202122"/>
-                </a:solidFill>
-                <a:latin typeface="Calibri"/>
-              </a:rPr>
-              <a:t> performance can be misrepresented</a:t>
+                <a:latin typeface="Cambria"/>
+              </a:rPr>
+              <a:t>A developer tests their app on Windows 10, Windows 11 and Ubuntu VMs, all on one laptop.</a:t>
             </a:r>
           </a:p>
         </p:txBody>
@@ -5233,7 +9209,7 @@
                 </a:solidFill>
                 <a:latin typeface="Cambria"/>
               </a:rPr>
-              <a:t>Cloud delivery models</a:t>
+              <a:t>Virtual environments</a:t>
             </a:r>
           </a:p>
         </p:txBody>
@@ -5300,6 +9276,1510 @@
                 <a:latin typeface="Calibri"/>
               </a:rPr>
               <a:t>4</a:t>
+            </a:r>
+          </a:p>
+        </p:txBody>
+      </p:sp>
+      <p:sp>
+        <p:nvSpPr>
+          <p:cNvPr id="6" name="Rounded Rectangle 5"/>
+          <p:cNvSpPr/>
+          <p:nvPr/>
+        </p:nvSpPr>
+        <p:spPr>
+          <a:xfrm>
+            <a:off x="548640" y="1600200"/>
+            <a:ext cx="5364327" cy="640080"/>
+          </a:xfrm>
+          <a:prstGeom prst="roundRect">
+            <a:avLst>
+              <a:gd name="adj" fmla="val 15000"/>
+            </a:avLst>
+          </a:prstGeom>
+          <a:solidFill>
+            <a:srgbClr val="03306E"/>
+          </a:solidFill>
+          <a:ln>
+            <a:noFill/>
+          </a:ln>
+          <a:effectLst/>
+        </p:spPr>
+        <p:style>
+          <a:lnRef idx="1">
+            <a:schemeClr val="accent1"/>
+          </a:lnRef>
+          <a:fillRef idx="3">
+            <a:schemeClr val="accent1"/>
+          </a:fillRef>
+          <a:effectRef idx="2">
+            <a:schemeClr val="accent1"/>
+          </a:effectRef>
+          <a:fontRef idx="minor">
+            <a:schemeClr val="lt1"/>
+          </a:fontRef>
+        </p:style>
+        <p:txBody>
+          <a:bodyPr rtlCol="0" anchor="ctr"/>
+          <a:lstStyle/>
+          <a:p/>
+        </p:txBody>
+      </p:sp>
+      <p:sp>
+        <p:nvSpPr>
+          <p:cNvPr id="7" name="TextBox 6"/>
+          <p:cNvSpPr txBox="1"/>
+          <p:nvPr/>
+        </p:nvSpPr>
+        <p:spPr>
+          <a:xfrm>
+            <a:off x="777240" y="1600200"/>
+            <a:ext cx="4907127" cy="640080"/>
+          </a:xfrm>
+          <a:prstGeom prst="rect">
+            <a:avLst/>
+          </a:prstGeom>
+          <a:noFill/>
+        </p:spPr>
+        <p:txBody>
+          <a:bodyPr wrap="square" anchor="ctr" lIns="0" rIns="0" tIns="0" bIns="0"/>
+          <a:lstStyle/>
+          <a:p>
+            <a:pPr algn="l"/>
+            <a:r>
+              <a:rPr sz="2000" b="1" i="0">
+                <a:solidFill>
+                  <a:srgbClr val="FFFFFF"/>
+                </a:solidFill>
+                <a:latin typeface="Calibri"/>
+              </a:rPr>
+              <a:t>Components and features</a:t>
+            </a:r>
+          </a:p>
+        </p:txBody>
+      </p:sp>
+      <p:sp>
+        <p:nvSpPr>
+          <p:cNvPr id="8" name="Rounded Rectangle 7"/>
+          <p:cNvSpPr/>
+          <p:nvPr/>
+        </p:nvSpPr>
+        <p:spPr>
+          <a:xfrm>
+            <a:off x="548640" y="2377440"/>
+            <a:ext cx="5364327" cy="3794760"/>
+          </a:xfrm>
+          <a:prstGeom prst="roundRect">
+            <a:avLst>
+              <a:gd name="adj" fmla="val 4000"/>
+            </a:avLst>
+          </a:prstGeom>
+          <a:solidFill>
+            <a:srgbClr val="EAF3FF"/>
+          </a:solidFill>
+          <a:ln>
+            <a:noFill/>
+          </a:ln>
+          <a:effectLst/>
+        </p:spPr>
+        <p:style>
+          <a:lnRef idx="1">
+            <a:schemeClr val="accent1"/>
+          </a:lnRef>
+          <a:fillRef idx="3">
+            <a:schemeClr val="accent1"/>
+          </a:fillRef>
+          <a:effectRef idx="2">
+            <a:schemeClr val="accent1"/>
+          </a:effectRef>
+          <a:fontRef idx="minor">
+            <a:schemeClr val="lt1"/>
+          </a:fontRef>
+        </p:style>
+        <p:txBody>
+          <a:bodyPr rtlCol="0" anchor="ctr"/>
+          <a:lstStyle/>
+          <a:p/>
+        </p:txBody>
+      </p:sp>
+      <p:sp>
+        <p:nvSpPr>
+          <p:cNvPr id="9" name="TextBox 8"/>
+          <p:cNvSpPr txBox="1"/>
+          <p:nvPr/>
+        </p:nvSpPr>
+        <p:spPr>
+          <a:xfrm>
+            <a:off x="822959" y="2606040"/>
+            <a:ext cx="4815687" cy="3337560"/>
+          </a:xfrm>
+          <a:prstGeom prst="rect">
+            <a:avLst/>
+          </a:prstGeom>
+          <a:noFill/>
+        </p:spPr>
+        <p:txBody>
+          <a:bodyPr wrap="square" lIns="0" rIns="0" tIns="0" bIns="0">
+            <a:spAutoFit/>
+          </a:bodyPr>
+          <a:lstStyle/>
+          <a:p>
+            <a:pPr marL="274320" indent="-274320">
+              <a:spcAft>
+                <a:spcPts val="990"/>
+              </a:spcAft>
+              <a:buClr>
+                <a:srgbClr val="0645AD"/>
+              </a:buClr>
+              <a:buFont typeface="Arial"/>
+              <a:buChar char="•"/>
+            </a:pPr>
+            <a:r>
+              <a:rPr sz="2200" b="1">
+                <a:solidFill>
+                  <a:srgbClr val="202122"/>
+                </a:solidFill>
+                <a:latin typeface="Calibri"/>
+              </a:rPr>
+              <a:t>Virtual machines:</a:t>
+            </a:r>
+            <a:r>
+              <a:rPr sz="2200" b="0">
+                <a:solidFill>
+                  <a:srgbClr val="202122"/>
+                </a:solidFill>
+                <a:latin typeface="Calibri"/>
+              </a:rPr>
+              <a:t> PCs, switches, routers, servers</a:t>
+            </a:r>
+          </a:p>
+          <a:p>
+            <a:pPr marL="274320" indent="-274320">
+              <a:spcAft>
+                <a:spcPts val="990"/>
+              </a:spcAft>
+              <a:buClr>
+                <a:srgbClr val="0645AD"/>
+              </a:buClr>
+              <a:buFont typeface="Arial"/>
+              <a:buChar char="•"/>
+            </a:pPr>
+            <a:r>
+              <a:rPr sz="2200" b="0">
+                <a:solidFill>
+                  <a:srgbClr val="202122"/>
+                </a:solidFill>
+                <a:latin typeface="Calibri"/>
+              </a:rPr>
+              <a:t>Type 1 hypervisor on the hardware; Type 2 on an OS</a:t>
+            </a:r>
+          </a:p>
+          <a:p>
+            <a:pPr marL="274320" indent="-274320">
+              <a:spcAft>
+                <a:spcPts val="990"/>
+              </a:spcAft>
+              <a:buClr>
+                <a:srgbClr val="0645AD"/>
+              </a:buClr>
+              <a:buFont typeface="Arial"/>
+              <a:buChar char="•"/>
+            </a:pPr>
+            <a:r>
+              <a:rPr sz="2200" b="0">
+                <a:solidFill>
+                  <a:srgbClr val="202122"/>
+                </a:solidFill>
+                <a:latin typeface="Calibri"/>
+              </a:rPr>
+              <a:t>Isolation, emulation, portability, sharing</a:t>
+            </a:r>
+          </a:p>
+        </p:txBody>
+      </p:sp>
+      <p:sp>
+        <p:nvSpPr>
+          <p:cNvPr id="10" name="Rounded Rectangle 9"/>
+          <p:cNvSpPr/>
+          <p:nvPr/>
+        </p:nvSpPr>
+        <p:spPr>
+          <a:xfrm>
+            <a:off x="6278727" y="1600200"/>
+            <a:ext cx="5364327" cy="640080"/>
+          </a:xfrm>
+          <a:prstGeom prst="roundRect">
+            <a:avLst>
+              <a:gd name="adj" fmla="val 15000"/>
+            </a:avLst>
+          </a:prstGeom>
+          <a:solidFill>
+            <a:srgbClr val="0645AD"/>
+          </a:solidFill>
+          <a:ln>
+            <a:noFill/>
+          </a:ln>
+          <a:effectLst/>
+        </p:spPr>
+        <p:style>
+          <a:lnRef idx="1">
+            <a:schemeClr val="accent1"/>
+          </a:lnRef>
+          <a:fillRef idx="3">
+            <a:schemeClr val="accent1"/>
+          </a:fillRef>
+          <a:effectRef idx="2">
+            <a:schemeClr val="accent1"/>
+          </a:effectRef>
+          <a:fontRef idx="minor">
+            <a:schemeClr val="lt1"/>
+          </a:fontRef>
+        </p:style>
+        <p:txBody>
+          <a:bodyPr rtlCol="0" anchor="ctr"/>
+          <a:lstStyle/>
+          <a:p/>
+        </p:txBody>
+      </p:sp>
+      <p:sp>
+        <p:nvSpPr>
+          <p:cNvPr id="11" name="TextBox 10"/>
+          <p:cNvSpPr txBox="1"/>
+          <p:nvPr/>
+        </p:nvSpPr>
+        <p:spPr>
+          <a:xfrm>
+            <a:off x="6507327" y="1600200"/>
+            <a:ext cx="4907127" cy="640080"/>
+          </a:xfrm>
+          <a:prstGeom prst="rect">
+            <a:avLst/>
+          </a:prstGeom>
+          <a:noFill/>
+        </p:spPr>
+        <p:txBody>
+          <a:bodyPr wrap="square" anchor="ctr" lIns="0" rIns="0" tIns="0" bIns="0"/>
+          <a:lstStyle/>
+          <a:p>
+            <a:pPr algn="l"/>
+            <a:r>
+              <a:rPr sz="2000" b="1" i="0">
+                <a:solidFill>
+                  <a:srgbClr val="FFFFFF"/>
+                </a:solidFill>
+                <a:latin typeface="Calibri"/>
+              </a:rPr>
+              <a:t>Benefits and drawbacks</a:t>
+            </a:r>
+          </a:p>
+        </p:txBody>
+      </p:sp>
+      <p:sp>
+        <p:nvSpPr>
+          <p:cNvPr id="12" name="Rounded Rectangle 11"/>
+          <p:cNvSpPr/>
+          <p:nvPr/>
+        </p:nvSpPr>
+        <p:spPr>
+          <a:xfrm>
+            <a:off x="6278727" y="2377440"/>
+            <a:ext cx="5364327" cy="3794760"/>
+          </a:xfrm>
+          <a:prstGeom prst="roundRect">
+            <a:avLst>
+              <a:gd name="adj" fmla="val 4000"/>
+            </a:avLst>
+          </a:prstGeom>
+          <a:solidFill>
+            <a:srgbClr val="EAF3FF"/>
+          </a:solidFill>
+          <a:ln>
+            <a:noFill/>
+          </a:ln>
+          <a:effectLst/>
+        </p:spPr>
+        <p:style>
+          <a:lnRef idx="1">
+            <a:schemeClr val="accent1"/>
+          </a:lnRef>
+          <a:fillRef idx="3">
+            <a:schemeClr val="accent1"/>
+          </a:fillRef>
+          <a:effectRef idx="2">
+            <a:schemeClr val="accent1"/>
+          </a:effectRef>
+          <a:fontRef idx="minor">
+            <a:schemeClr val="lt1"/>
+          </a:fontRef>
+        </p:style>
+        <p:txBody>
+          <a:bodyPr rtlCol="0" anchor="ctr"/>
+          <a:lstStyle/>
+          <a:p/>
+        </p:txBody>
+      </p:sp>
+      <p:sp>
+        <p:nvSpPr>
+          <p:cNvPr id="13" name="TextBox 12"/>
+          <p:cNvSpPr txBox="1"/>
+          <p:nvPr/>
+        </p:nvSpPr>
+        <p:spPr>
+          <a:xfrm>
+            <a:off x="6553047" y="2606040"/>
+            <a:ext cx="4815687" cy="3337560"/>
+          </a:xfrm>
+          <a:prstGeom prst="rect">
+            <a:avLst/>
+          </a:prstGeom>
+          <a:noFill/>
+        </p:spPr>
+        <p:txBody>
+          <a:bodyPr wrap="square" lIns="0" rIns="0" tIns="0" bIns="0">
+            <a:spAutoFit/>
+          </a:bodyPr>
+          <a:lstStyle/>
+          <a:p>
+            <a:pPr marL="274320" indent="-274320">
+              <a:spcAft>
+                <a:spcPts val="990"/>
+              </a:spcAft>
+              <a:buClr>
+                <a:srgbClr val="0645AD"/>
+              </a:buClr>
+              <a:buFont typeface="Arial"/>
+              <a:buChar char="•"/>
+            </a:pPr>
+            <a:r>
+              <a:rPr sz="2200" b="0">
+                <a:solidFill>
+                  <a:srgbClr val="202122"/>
+                </a:solidFill>
+                <a:latin typeface="Calibri"/>
+              </a:rPr>
+              <a:t>Cost-effective at scale, easy to manage</a:t>
+            </a:r>
+          </a:p>
+          <a:p>
+            <a:pPr marL="274320" indent="-274320">
+              <a:spcAft>
+                <a:spcPts val="990"/>
+              </a:spcAft>
+              <a:buClr>
+                <a:srgbClr val="0645AD"/>
+              </a:buClr>
+              <a:buFont typeface="Arial"/>
+              <a:buChar char="•"/>
+            </a:pPr>
+            <a:r>
+              <a:rPr sz="2200" b="0">
+                <a:solidFill>
+                  <a:srgbClr val="202122"/>
+                </a:solidFill>
+                <a:latin typeface="Calibri"/>
+              </a:rPr>
+              <a:t>Better disaster recovery and testing</a:t>
+            </a:r>
+          </a:p>
+          <a:p>
+            <a:pPr marL="274320" indent="-274320">
+              <a:spcAft>
+                <a:spcPts val="990"/>
+              </a:spcAft>
+              <a:buClr>
+                <a:srgbClr val="0645AD"/>
+              </a:buClr>
+              <a:buFont typeface="Arial"/>
+              <a:buChar char="•"/>
+            </a:pPr>
+            <a:r>
+              <a:rPr sz="2200" b="1">
+                <a:solidFill>
+                  <a:srgbClr val="202122"/>
+                </a:solidFill>
+                <a:latin typeface="Calibri"/>
+              </a:rPr>
+              <a:t>But:</a:t>
+            </a:r>
+            <a:r>
+              <a:rPr sz="2200" b="0">
+                <a:solidFill>
+                  <a:srgbClr val="202122"/>
+                </a:solidFill>
+                <a:latin typeface="Calibri"/>
+              </a:rPr>
+              <a:t> extra hardware load and slower execution</a:t>
+            </a:r>
+          </a:p>
+          <a:p>
+            <a:pPr marL="274320" indent="-274320">
+              <a:spcAft>
+                <a:spcPts val="990"/>
+              </a:spcAft>
+              <a:buClr>
+                <a:srgbClr val="0645AD"/>
+              </a:buClr>
+              <a:buFont typeface="Arial"/>
+              <a:buChar char="•"/>
+            </a:pPr>
+            <a:r>
+              <a:rPr sz="2200" b="1">
+                <a:solidFill>
+                  <a:srgbClr val="202122"/>
+                </a:solidFill>
+                <a:latin typeface="Calibri"/>
+              </a:rPr>
+              <a:t>But:</a:t>
+            </a:r>
+            <a:r>
+              <a:rPr sz="2200" b="0">
+                <a:solidFill>
+                  <a:srgbClr val="202122"/>
+                </a:solidFill>
+                <a:latin typeface="Calibri"/>
+              </a:rPr>
+              <a:t> performance can be misrepresented</a:t>
+            </a:r>
+          </a:p>
+        </p:txBody>
+      </p:sp>
+    </p:spTree>
+  </p:cSld>
+  <p:clrMapOvr>
+    <a:masterClrMapping/>
+  </p:clrMapOvr>
+</p:sld>
+</file>
+
+<file path=ppt/slides/slide5.xml><?xml version="1.0" encoding="utf-8"?>
+<p:sld xmlns:a="http://schemas.openxmlformats.org/drawingml/2006/main" xmlns:p="http://schemas.openxmlformats.org/presentationml/2006/main" xmlns:r="http://schemas.openxmlformats.org/officeDocument/2006/relationships">
+  <p:cSld>
+    <p:bg>
+      <p:bgPr>
+        <a:solidFill>
+          <a:srgbClr val="FFFFFF"/>
+        </a:solidFill>
+        <a:effectLst/>
+      </p:bgPr>
+    </p:bg>
+    <p:spTree>
+      <p:nvGrpSpPr>
+        <p:cNvPr id="1" name=""/>
+        <p:cNvGrpSpPr/>
+        <p:nvPr/>
+      </p:nvGrpSpPr>
+      <p:grpSpPr/>
+      <p:sp>
+        <p:nvSpPr>
+          <p:cNvPr id="2" name="TextBox 1"/>
+          <p:cNvSpPr txBox="1"/>
+          <p:nvPr/>
+        </p:nvSpPr>
+        <p:spPr>
+          <a:xfrm>
+            <a:off x="548640" y="320040"/>
+            <a:ext cx="11094415" cy="274320"/>
+          </a:xfrm>
+          <a:prstGeom prst="rect">
+            <a:avLst/>
+          </a:prstGeom>
+          <a:noFill/>
+        </p:spPr>
+        <p:txBody>
+          <a:bodyPr wrap="square" anchor="t" lIns="0" rIns="0" tIns="0" bIns="0"/>
+          <a:lstStyle/>
+          <a:p>
+            <a:pPr algn="l"/>
+            <a:r>
+              <a:rPr sz="1100" b="1" i="0">
+                <a:solidFill>
+                  <a:srgbClr val="54595D"/>
+                </a:solidFill>
+                <a:latin typeface="Calibri"/>
+              </a:rPr>
+              <a:t>CORE COMPONENT  ·  Core Paper 2</a:t>
+            </a:r>
+          </a:p>
+        </p:txBody>
+      </p:sp>
+      <p:sp>
+        <p:nvSpPr>
+          <p:cNvPr id="3" name="TextBox 2"/>
+          <p:cNvSpPr txBox="1"/>
+          <p:nvPr/>
+        </p:nvSpPr>
+        <p:spPr>
+          <a:xfrm>
+            <a:off x="548640" y="566928"/>
+            <a:ext cx="11094415" cy="822960"/>
+          </a:xfrm>
+          <a:prstGeom prst="rect">
+            <a:avLst/>
+          </a:prstGeom>
+          <a:noFill/>
+        </p:spPr>
+        <p:txBody>
+          <a:bodyPr wrap="square" anchor="ctr" lIns="0" rIns="0" tIns="0" bIns="0"/>
+          <a:lstStyle/>
+          <a:p>
+            <a:pPr algn="l"/>
+            <a:r>
+              <a:rPr sz="3200" b="1" i="0">
+                <a:solidFill>
+                  <a:srgbClr val="03306E"/>
+                </a:solidFill>
+                <a:latin typeface="Cambria"/>
+              </a:rPr>
+              <a:t>Quick check: Virtual environments</a:t>
+            </a:r>
+          </a:p>
+        </p:txBody>
+      </p:sp>
+      <p:sp>
+        <p:nvSpPr>
+          <p:cNvPr id="4" name="TextBox 3"/>
+          <p:cNvSpPr txBox="1"/>
+          <p:nvPr/>
+        </p:nvSpPr>
+        <p:spPr>
+          <a:xfrm>
+            <a:off x="548640" y="6446520"/>
+            <a:ext cx="8229600" cy="274320"/>
+          </a:xfrm>
+          <a:prstGeom prst="rect">
+            <a:avLst/>
+          </a:prstGeom>
+          <a:noFill/>
+        </p:spPr>
+        <p:txBody>
+          <a:bodyPr wrap="square" anchor="t" lIns="0" rIns="0" tIns="0" bIns="0"/>
+          <a:lstStyle/>
+          <a:p>
+            <a:pPr algn="l"/>
+            <a:r>
+              <a:rPr sz="1000" b="0" i="0">
+                <a:solidFill>
+                  <a:srgbClr val="54595D"/>
+                </a:solidFill>
+                <a:latin typeface="Calibri"/>
+              </a:rPr>
+              <a:t>Digital Software Development T Level  ·  Virtual, Cloud and Resilient Environments</a:t>
+            </a:r>
+          </a:p>
+        </p:txBody>
+      </p:sp>
+      <p:sp>
+        <p:nvSpPr>
+          <p:cNvPr id="5" name="TextBox 4"/>
+          <p:cNvSpPr txBox="1"/>
+          <p:nvPr/>
+        </p:nvSpPr>
+        <p:spPr>
+          <a:xfrm>
+            <a:off x="10728655" y="6446520"/>
+            <a:ext cx="914400" cy="274320"/>
+          </a:xfrm>
+          <a:prstGeom prst="rect">
+            <a:avLst/>
+          </a:prstGeom>
+          <a:noFill/>
+        </p:spPr>
+        <p:txBody>
+          <a:bodyPr wrap="square" anchor="t" lIns="0" rIns="0" tIns="0" bIns="0"/>
+          <a:lstStyle/>
+          <a:p>
+            <a:pPr algn="r"/>
+            <a:r>
+              <a:rPr sz="1000" b="0" i="0">
+                <a:solidFill>
+                  <a:srgbClr val="54595D"/>
+                </a:solidFill>
+                <a:latin typeface="Calibri"/>
+              </a:rPr>
+              <a:t>5</a:t>
+            </a:r>
+          </a:p>
+        </p:txBody>
+      </p:sp>
+      <p:sp>
+        <p:nvSpPr>
+          <p:cNvPr id="6" name="Oval 5"/>
+          <p:cNvSpPr/>
+          <p:nvPr/>
+        </p:nvSpPr>
+        <p:spPr>
+          <a:xfrm>
+            <a:off x="548640" y="1691640"/>
+            <a:ext cx="502920" cy="502920"/>
+          </a:xfrm>
+          <a:prstGeom prst="ellipse">
+            <a:avLst/>
+          </a:prstGeom>
+          <a:solidFill>
+            <a:srgbClr val="F2B705"/>
+          </a:solidFill>
+          <a:ln>
+            <a:noFill/>
+          </a:ln>
+          <a:effectLst/>
+        </p:spPr>
+        <p:style>
+          <a:lnRef idx="1">
+            <a:schemeClr val="accent1"/>
+          </a:lnRef>
+          <a:fillRef idx="3">
+            <a:schemeClr val="accent1"/>
+          </a:fillRef>
+          <a:effectRef idx="2">
+            <a:schemeClr val="accent1"/>
+          </a:effectRef>
+          <a:fontRef idx="minor">
+            <a:schemeClr val="lt1"/>
+          </a:fontRef>
+        </p:style>
+        <p:txBody>
+          <a:bodyPr rtlCol="0" anchor="ctr" lIns="0" rIns="0" tIns="0" bIns="0"/>
+          <a:lstStyle/>
+          <a:p>
+            <a:pPr algn="ctr"/>
+            <a:r>
+              <a:rPr sz="1600" b="1">
+                <a:solidFill>
+                  <a:srgbClr val="202122"/>
+                </a:solidFill>
+                <a:latin typeface="Calibri"/>
+              </a:rPr>
+              <a:t>1</a:t>
+            </a:r>
+          </a:p>
+        </p:txBody>
+      </p:sp>
+      <p:sp>
+        <p:nvSpPr>
+          <p:cNvPr id="7" name="TextBox 6"/>
+          <p:cNvSpPr txBox="1"/>
+          <p:nvPr/>
+        </p:nvSpPr>
+        <p:spPr>
+          <a:xfrm>
+            <a:off x="1371600" y="1645920"/>
+            <a:ext cx="10271455" cy="1188720"/>
+          </a:xfrm>
+          <a:prstGeom prst="rect">
+            <a:avLst/>
+          </a:prstGeom>
+          <a:noFill/>
+        </p:spPr>
+        <p:txBody>
+          <a:bodyPr wrap="square" anchor="t" lIns="0" rIns="0" tIns="0" bIns="0"/>
+          <a:lstStyle/>
+          <a:p>
+            <a:pPr algn="l"/>
+            <a:r>
+              <a:rPr sz="2400" b="0" i="0">
+                <a:solidFill>
+                  <a:srgbClr val="202122"/>
+                </a:solidFill>
+                <a:latin typeface="Calibri"/>
+              </a:rPr>
+              <a:t>What manages virtual machines?</a:t>
+            </a:r>
+          </a:p>
+        </p:txBody>
+      </p:sp>
+      <p:sp>
+        <p:nvSpPr>
+          <p:cNvPr id="8" name="Oval 7"/>
+          <p:cNvSpPr/>
+          <p:nvPr/>
+        </p:nvSpPr>
+        <p:spPr>
+          <a:xfrm>
+            <a:off x="548640" y="3108960"/>
+            <a:ext cx="502920" cy="502920"/>
+          </a:xfrm>
+          <a:prstGeom prst="ellipse">
+            <a:avLst/>
+          </a:prstGeom>
+          <a:solidFill>
+            <a:srgbClr val="F2B705"/>
+          </a:solidFill>
+          <a:ln>
+            <a:noFill/>
+          </a:ln>
+          <a:effectLst/>
+        </p:spPr>
+        <p:style>
+          <a:lnRef idx="1">
+            <a:schemeClr val="accent1"/>
+          </a:lnRef>
+          <a:fillRef idx="3">
+            <a:schemeClr val="accent1"/>
+          </a:fillRef>
+          <a:effectRef idx="2">
+            <a:schemeClr val="accent1"/>
+          </a:effectRef>
+          <a:fontRef idx="minor">
+            <a:schemeClr val="lt1"/>
+          </a:fontRef>
+        </p:style>
+        <p:txBody>
+          <a:bodyPr rtlCol="0" anchor="ctr" lIns="0" rIns="0" tIns="0" bIns="0"/>
+          <a:lstStyle/>
+          <a:p>
+            <a:pPr algn="ctr"/>
+            <a:r>
+              <a:rPr sz="1600" b="1">
+                <a:solidFill>
+                  <a:srgbClr val="202122"/>
+                </a:solidFill>
+                <a:latin typeface="Calibri"/>
+              </a:rPr>
+              <a:t>2</a:t>
+            </a:r>
+          </a:p>
+        </p:txBody>
+      </p:sp>
+      <p:sp>
+        <p:nvSpPr>
+          <p:cNvPr id="9" name="TextBox 8"/>
+          <p:cNvSpPr txBox="1"/>
+          <p:nvPr/>
+        </p:nvSpPr>
+        <p:spPr>
+          <a:xfrm>
+            <a:off x="1371600" y="3063240"/>
+            <a:ext cx="10271455" cy="1188720"/>
+          </a:xfrm>
+          <a:prstGeom prst="rect">
+            <a:avLst/>
+          </a:prstGeom>
+          <a:noFill/>
+        </p:spPr>
+        <p:txBody>
+          <a:bodyPr wrap="square" anchor="t" lIns="0" rIns="0" tIns="0" bIns="0"/>
+          <a:lstStyle/>
+          <a:p>
+            <a:pPr algn="l"/>
+            <a:r>
+              <a:rPr sz="2400" b="0" i="0">
+                <a:solidFill>
+                  <a:srgbClr val="202122"/>
+                </a:solidFill>
+                <a:latin typeface="Calibri"/>
+              </a:rPr>
+              <a:t>Why are VMs useful for developers?</a:t>
+            </a:r>
+          </a:p>
+        </p:txBody>
+      </p:sp>
+      <p:sp>
+        <p:nvSpPr>
+          <p:cNvPr id="10" name="Oval 9"/>
+          <p:cNvSpPr/>
+          <p:nvPr/>
+        </p:nvSpPr>
+        <p:spPr>
+          <a:xfrm>
+            <a:off x="548640" y="4526280"/>
+            <a:ext cx="502920" cy="502920"/>
+          </a:xfrm>
+          <a:prstGeom prst="ellipse">
+            <a:avLst/>
+          </a:prstGeom>
+          <a:solidFill>
+            <a:srgbClr val="F2B705"/>
+          </a:solidFill>
+          <a:ln>
+            <a:noFill/>
+          </a:ln>
+          <a:effectLst/>
+        </p:spPr>
+        <p:style>
+          <a:lnRef idx="1">
+            <a:schemeClr val="accent1"/>
+          </a:lnRef>
+          <a:fillRef idx="3">
+            <a:schemeClr val="accent1"/>
+          </a:fillRef>
+          <a:effectRef idx="2">
+            <a:schemeClr val="accent1"/>
+          </a:effectRef>
+          <a:fontRef idx="minor">
+            <a:schemeClr val="lt1"/>
+          </a:fontRef>
+        </p:style>
+        <p:txBody>
+          <a:bodyPr rtlCol="0" anchor="ctr" lIns="0" rIns="0" tIns="0" bIns="0"/>
+          <a:lstStyle/>
+          <a:p>
+            <a:pPr algn="ctr"/>
+            <a:r>
+              <a:rPr sz="1600" b="1">
+                <a:solidFill>
+                  <a:srgbClr val="202122"/>
+                </a:solidFill>
+                <a:latin typeface="Calibri"/>
+              </a:rPr>
+              <a:t>3</a:t>
+            </a:r>
+          </a:p>
+        </p:txBody>
+      </p:sp>
+      <p:sp>
+        <p:nvSpPr>
+          <p:cNvPr id="11" name="TextBox 10"/>
+          <p:cNvSpPr txBox="1"/>
+          <p:nvPr/>
+        </p:nvSpPr>
+        <p:spPr>
+          <a:xfrm>
+            <a:off x="1371600" y="4480560"/>
+            <a:ext cx="10271455" cy="1188720"/>
+          </a:xfrm>
+          <a:prstGeom prst="rect">
+            <a:avLst/>
+          </a:prstGeom>
+          <a:noFill/>
+        </p:spPr>
+        <p:txBody>
+          <a:bodyPr wrap="square" anchor="t" lIns="0" rIns="0" tIns="0" bIns="0"/>
+          <a:lstStyle/>
+          <a:p>
+            <a:pPr algn="l"/>
+            <a:r>
+              <a:rPr sz="2400" b="0" i="0">
+                <a:solidFill>
+                  <a:srgbClr val="202122"/>
+                </a:solidFill>
+                <a:latin typeface="Calibri"/>
+              </a:rPr>
+              <a:t>Give one drawback of virtualisation.</a:t>
+            </a:r>
+          </a:p>
+        </p:txBody>
+      </p:sp>
+      <p:sp>
+        <p:nvSpPr>
+          <p:cNvPr id="12" name="TextBox 11"/>
+          <p:cNvSpPr txBox="1"/>
+          <p:nvPr/>
+        </p:nvSpPr>
+        <p:spPr>
+          <a:xfrm>
+            <a:off x="548640" y="5852160"/>
+            <a:ext cx="11094415" cy="365760"/>
+          </a:xfrm>
+          <a:prstGeom prst="rect">
+            <a:avLst/>
+          </a:prstGeom>
+          <a:noFill/>
+        </p:spPr>
+        <p:txBody>
+          <a:bodyPr wrap="square" anchor="t" lIns="0" rIns="0" tIns="0" bIns="0"/>
+          <a:lstStyle/>
+          <a:p>
+            <a:pPr algn="l"/>
+            <a:r>
+              <a:rPr sz="1300" b="0" i="1">
+                <a:solidFill>
+                  <a:srgbClr val="54595D"/>
+                </a:solidFill>
+                <a:latin typeface="Calibri"/>
+              </a:rPr>
+              <a:t>Answer on mini whiteboards or in your book. Answers are in the speaker notes.</a:t>
+            </a:r>
+          </a:p>
+        </p:txBody>
+      </p:sp>
+    </p:spTree>
+  </p:cSld>
+  <p:clrMapOvr>
+    <a:masterClrMapping/>
+  </p:clrMapOvr>
+</p:sld>
+</file>
+
+<file path=ppt/slides/slide6.xml><?xml version="1.0" encoding="utf-8"?>
+<p:sld xmlns:a="http://schemas.openxmlformats.org/drawingml/2006/main" xmlns:p="http://schemas.openxmlformats.org/presentationml/2006/main" xmlns:r="http://schemas.openxmlformats.org/officeDocument/2006/relationships">
+  <p:cSld>
+    <p:bg>
+      <p:bgPr>
+        <a:solidFill>
+          <a:srgbClr val="FFFFFF"/>
+        </a:solidFill>
+        <a:effectLst/>
+      </p:bgPr>
+    </p:bg>
+    <p:spTree>
+      <p:nvGrpSpPr>
+        <p:cNvPr id="1" name=""/>
+        <p:cNvGrpSpPr/>
+        <p:nvPr/>
+      </p:nvGrpSpPr>
+      <p:grpSpPr/>
+      <p:sp>
+        <p:nvSpPr>
+          <p:cNvPr id="2" name="TextBox 1"/>
+          <p:cNvSpPr txBox="1"/>
+          <p:nvPr/>
+        </p:nvSpPr>
+        <p:spPr>
+          <a:xfrm>
+            <a:off x="548640" y="320040"/>
+            <a:ext cx="11094415" cy="274320"/>
+          </a:xfrm>
+          <a:prstGeom prst="rect">
+            <a:avLst/>
+          </a:prstGeom>
+          <a:noFill/>
+        </p:spPr>
+        <p:txBody>
+          <a:bodyPr wrap="square" anchor="t" lIns="0" rIns="0" tIns="0" bIns="0"/>
+          <a:lstStyle/>
+          <a:p>
+            <a:pPr algn="l"/>
+            <a:r>
+              <a:rPr sz="1100" b="1" i="0">
+                <a:solidFill>
+                  <a:srgbClr val="54595D"/>
+                </a:solidFill>
+                <a:latin typeface="Calibri"/>
+              </a:rPr>
+              <a:t>CORE COMPONENT  ·  Core Paper 2</a:t>
+            </a:r>
+          </a:p>
+        </p:txBody>
+      </p:sp>
+      <p:sp>
+        <p:nvSpPr>
+          <p:cNvPr id="3" name="TextBox 2"/>
+          <p:cNvSpPr txBox="1"/>
+          <p:nvPr/>
+        </p:nvSpPr>
+        <p:spPr>
+          <a:xfrm>
+            <a:off x="548640" y="566928"/>
+            <a:ext cx="11094415" cy="822960"/>
+          </a:xfrm>
+          <a:prstGeom prst="rect">
+            <a:avLst/>
+          </a:prstGeom>
+          <a:noFill/>
+        </p:spPr>
+        <p:txBody>
+          <a:bodyPr wrap="square" anchor="ctr" lIns="0" rIns="0" tIns="0" bIns="0"/>
+          <a:lstStyle/>
+          <a:p>
+            <a:pPr algn="l"/>
+            <a:r>
+              <a:rPr sz="3200" b="1" i="0">
+                <a:solidFill>
+                  <a:srgbClr val="03306E"/>
+                </a:solidFill>
+                <a:latin typeface="Cambria"/>
+              </a:rPr>
+              <a:t>Cloud delivery models</a:t>
+            </a:r>
+          </a:p>
+        </p:txBody>
+      </p:sp>
+      <p:sp>
+        <p:nvSpPr>
+          <p:cNvPr id="4" name="TextBox 3"/>
+          <p:cNvSpPr txBox="1"/>
+          <p:nvPr/>
+        </p:nvSpPr>
+        <p:spPr>
+          <a:xfrm>
+            <a:off x="548640" y="6446520"/>
+            <a:ext cx="8229600" cy="274320"/>
+          </a:xfrm>
+          <a:prstGeom prst="rect">
+            <a:avLst/>
+          </a:prstGeom>
+          <a:noFill/>
+        </p:spPr>
+        <p:txBody>
+          <a:bodyPr wrap="square" anchor="t" lIns="0" rIns="0" tIns="0" bIns="0"/>
+          <a:lstStyle/>
+          <a:p>
+            <a:pPr algn="l"/>
+            <a:r>
+              <a:rPr sz="1000" b="0" i="0">
+                <a:solidFill>
+                  <a:srgbClr val="54595D"/>
+                </a:solidFill>
+                <a:latin typeface="Calibri"/>
+              </a:rPr>
+              <a:t>Digital Software Development T Level  ·  Virtual, Cloud and Resilient Environments</a:t>
+            </a:r>
+          </a:p>
+        </p:txBody>
+      </p:sp>
+      <p:sp>
+        <p:nvSpPr>
+          <p:cNvPr id="5" name="TextBox 4"/>
+          <p:cNvSpPr txBox="1"/>
+          <p:nvPr/>
+        </p:nvSpPr>
+        <p:spPr>
+          <a:xfrm>
+            <a:off x="10728655" y="6446520"/>
+            <a:ext cx="914400" cy="274320"/>
+          </a:xfrm>
+          <a:prstGeom prst="rect">
+            <a:avLst/>
+          </a:prstGeom>
+          <a:noFill/>
+        </p:spPr>
+        <p:txBody>
+          <a:bodyPr wrap="square" anchor="t" lIns="0" rIns="0" tIns="0" bIns="0"/>
+          <a:lstStyle/>
+          <a:p>
+            <a:pPr algn="r"/>
+            <a:r>
+              <a:rPr sz="1000" b="0" i="0">
+                <a:solidFill>
+                  <a:srgbClr val="54595D"/>
+                </a:solidFill>
+                <a:latin typeface="Calibri"/>
+              </a:rPr>
+              <a:t>6</a:t>
+            </a:r>
+          </a:p>
+        </p:txBody>
+      </p:sp>
+      <p:sp>
+        <p:nvSpPr>
+          <p:cNvPr id="6" name="TextBox 5"/>
+          <p:cNvSpPr txBox="1"/>
+          <p:nvPr/>
+        </p:nvSpPr>
+        <p:spPr>
+          <a:xfrm>
+            <a:off x="548640" y="1554480"/>
+            <a:ext cx="6720840" cy="4617720"/>
+          </a:xfrm>
+          <a:prstGeom prst="rect">
+            <a:avLst/>
+          </a:prstGeom>
+          <a:noFill/>
+        </p:spPr>
+        <p:txBody>
+          <a:bodyPr wrap="square" lIns="0" rIns="0" tIns="0" bIns="0">
+            <a:spAutoFit/>
+          </a:bodyPr>
+          <a:lstStyle/>
+          <a:p>
+            <a:pPr>
+              <a:spcAft>
+                <a:spcPts val="1320"/>
+              </a:spcAft>
+            </a:pPr>
+            <a:r>
+              <a:rPr sz="2200" b="0">
+                <a:solidFill>
+                  <a:srgbClr val="202122"/>
+                </a:solidFill>
+                <a:latin typeface="Calibri"/>
+              </a:rPr>
+              <a:t>Cloud computing rents computing over the internet, public or private, bringing portability, elasticity, fewer storage limits and lower costs.</a:t>
+            </a:r>
+          </a:p>
+          <a:p>
+            <a:pPr>
+              <a:spcAft>
+                <a:spcPts val="1320"/>
+              </a:spcAft>
+            </a:pPr>
+            <a:r>
+              <a:rPr sz="2200" b="1">
+                <a:solidFill>
+                  <a:srgbClr val="202122"/>
+                </a:solidFill>
+                <a:latin typeface="Calibri"/>
+              </a:rPr>
+              <a:t>IaaS:</a:t>
+            </a:r>
+            <a:r>
+              <a:rPr sz="2200" b="0">
+                <a:solidFill>
+                  <a:srgbClr val="202122"/>
+                </a:solidFill>
+                <a:latin typeface="Calibri"/>
+              </a:rPr>
+              <a:t> the provider supplies virtual hardware; you manage the OS, runtime, apps and data.</a:t>
+            </a:r>
+          </a:p>
+          <a:p>
+            <a:pPr>
+              <a:spcAft>
+                <a:spcPts val="1320"/>
+              </a:spcAft>
+            </a:pPr>
+            <a:r>
+              <a:rPr sz="2200" b="1">
+                <a:solidFill>
+                  <a:srgbClr val="202122"/>
+                </a:solidFill>
+                <a:latin typeface="Calibri"/>
+              </a:rPr>
+              <a:t>PaaS:</a:t>
+            </a:r>
+            <a:r>
+              <a:rPr sz="2200" b="0">
+                <a:solidFill>
+                  <a:srgbClr val="202122"/>
+                </a:solidFill>
+                <a:latin typeface="Calibri"/>
+              </a:rPr>
+              <a:t> the provider also manages the OS and runtime; you just deploy your code and manage data and users. It's popular with developers.</a:t>
+            </a:r>
+          </a:p>
+          <a:p>
+            <a:pPr>
+              <a:spcAft>
+                <a:spcPts val="1320"/>
+              </a:spcAft>
+            </a:pPr>
+            <a:r>
+              <a:rPr sz="2200" b="1">
+                <a:solidFill>
+                  <a:srgbClr val="202122"/>
+                </a:solidFill>
+                <a:latin typeface="Calibri"/>
+              </a:rPr>
+              <a:t>SaaS:</a:t>
+            </a:r>
+            <a:r>
+              <a:rPr sz="2200" b="0">
+                <a:solidFill>
+                  <a:srgbClr val="202122"/>
+                </a:solidFill>
+                <a:latin typeface="Calibri"/>
+              </a:rPr>
+              <a:t> the provider runs the whole application; you only manage users and data.</a:t>
+            </a:r>
+          </a:p>
+        </p:txBody>
+      </p:sp>
+      <p:sp>
+        <p:nvSpPr>
+          <p:cNvPr id="7" name="Rounded Rectangle 6"/>
+          <p:cNvSpPr/>
+          <p:nvPr/>
+        </p:nvSpPr>
+        <p:spPr>
+          <a:xfrm>
+            <a:off x="7772400" y="1554480"/>
+            <a:ext cx="3867912" cy="4526280"/>
+          </a:xfrm>
+          <a:prstGeom prst="roundRect">
+            <a:avLst>
+              <a:gd name="adj" fmla="val 8000"/>
+            </a:avLst>
+          </a:prstGeom>
+          <a:solidFill>
+            <a:srgbClr val="03306E"/>
+          </a:solidFill>
+          <a:ln>
+            <a:noFill/>
+          </a:ln>
+          <a:effectLst/>
+        </p:spPr>
+        <p:style>
+          <a:lnRef idx="1">
+            <a:schemeClr val="accent1"/>
+          </a:lnRef>
+          <a:fillRef idx="3">
+            <a:schemeClr val="accent1"/>
+          </a:fillRef>
+          <a:effectRef idx="2">
+            <a:schemeClr val="accent1"/>
+          </a:effectRef>
+          <a:fontRef idx="minor">
+            <a:schemeClr val="lt1"/>
+          </a:fontRef>
+        </p:style>
+        <p:txBody>
+          <a:bodyPr rtlCol="0" anchor="ctr"/>
+          <a:lstStyle/>
+          <a:p/>
+        </p:txBody>
+      </p:sp>
+      <p:sp>
+        <p:nvSpPr>
+          <p:cNvPr id="8" name="Oval 7"/>
+          <p:cNvSpPr/>
+          <p:nvPr/>
+        </p:nvSpPr>
+        <p:spPr>
+          <a:xfrm>
+            <a:off x="8046720" y="1828800"/>
+            <a:ext cx="548640" cy="548640"/>
+          </a:xfrm>
+          <a:prstGeom prst="ellipse">
+            <a:avLst/>
+          </a:prstGeom>
+          <a:solidFill>
+            <a:srgbClr val="F2B705"/>
+          </a:solidFill>
+          <a:ln>
+            <a:noFill/>
+          </a:ln>
+          <a:effectLst/>
+        </p:spPr>
+        <p:style>
+          <a:lnRef idx="1">
+            <a:schemeClr val="accent1"/>
+          </a:lnRef>
+          <a:fillRef idx="3">
+            <a:schemeClr val="accent1"/>
+          </a:fillRef>
+          <a:effectRef idx="2">
+            <a:schemeClr val="accent1"/>
+          </a:effectRef>
+          <a:fontRef idx="minor">
+            <a:schemeClr val="lt1"/>
+          </a:fontRef>
+        </p:style>
+        <p:txBody>
+          <a:bodyPr rtlCol="0" anchor="ctr" lIns="0" rIns="0" tIns="0" bIns="0"/>
+          <a:lstStyle/>
+          <a:p>
+            <a:pPr algn="ctr"/>
+            <a:r>
+              <a:rPr sz="1300" b="1">
+                <a:solidFill>
+                  <a:srgbClr val="202122"/>
+                </a:solidFill>
+                <a:latin typeface="Calibri"/>
+              </a:rPr>
+              <a:t>e.g.</a:t>
+            </a:r>
+          </a:p>
+        </p:txBody>
+      </p:sp>
+      <p:sp>
+        <p:nvSpPr>
+          <p:cNvPr id="9" name="TextBox 8"/>
+          <p:cNvSpPr txBox="1"/>
+          <p:nvPr/>
+        </p:nvSpPr>
+        <p:spPr>
+          <a:xfrm>
+            <a:off x="8046720" y="2560320"/>
+            <a:ext cx="3291840" cy="365760"/>
+          </a:xfrm>
+          <a:prstGeom prst="rect">
+            <a:avLst/>
+          </a:prstGeom>
+          <a:noFill/>
+        </p:spPr>
+        <p:txBody>
+          <a:bodyPr wrap="square" anchor="t" lIns="0" rIns="0" tIns="0" bIns="0"/>
+          <a:lstStyle/>
+          <a:p>
+            <a:pPr algn="l"/>
+            <a:r>
+              <a:rPr sz="1300" b="1" i="0">
+                <a:solidFill>
+                  <a:srgbClr val="A9C8F0"/>
+                </a:solidFill>
+                <a:latin typeface="Calibri"/>
+              </a:rPr>
+              <a:t>EXAMPLE</a:t>
+            </a:r>
+          </a:p>
+        </p:txBody>
+      </p:sp>
+      <p:sp>
+        <p:nvSpPr>
+          <p:cNvPr id="10" name="TextBox 9"/>
+          <p:cNvSpPr txBox="1"/>
+          <p:nvPr/>
+        </p:nvSpPr>
+        <p:spPr>
+          <a:xfrm>
+            <a:off x="8046720" y="2971800"/>
+            <a:ext cx="3291840" cy="2971800"/>
+          </a:xfrm>
+          <a:prstGeom prst="rect">
+            <a:avLst/>
+          </a:prstGeom>
+          <a:noFill/>
+        </p:spPr>
+        <p:txBody>
+          <a:bodyPr wrap="square" anchor="t" lIns="0" rIns="0" tIns="0" bIns="0"/>
+          <a:lstStyle/>
+          <a:p>
+            <a:pPr algn="l"/>
+            <a:r>
+              <a:rPr sz="1900" b="0" i="0">
+                <a:solidFill>
+                  <a:srgbClr val="FFFFFF"/>
+                </a:solidFill>
+                <a:latin typeface="Cambria"/>
+              </a:rPr>
+              <a:t>Deploying a Python web app to a platform that handles servers and updates is PaaS. Using Google Docs is SaaS.</a:t>
+            </a:r>
+          </a:p>
+        </p:txBody>
+      </p:sp>
+    </p:spTree>
+  </p:cSld>
+  <p:clrMapOvr>
+    <a:masterClrMapping/>
+  </p:clrMapOvr>
+</p:sld>
+</file>
+
+<file path=ppt/slides/slide7.xml><?xml version="1.0" encoding="utf-8"?>
+<p:sld xmlns:a="http://schemas.openxmlformats.org/drawingml/2006/main" xmlns:p="http://schemas.openxmlformats.org/presentationml/2006/main" xmlns:r="http://schemas.openxmlformats.org/officeDocument/2006/relationships">
+  <p:cSld>
+    <p:bg>
+      <p:bgPr>
+        <a:solidFill>
+          <a:srgbClr val="FFFFFF"/>
+        </a:solidFill>
+        <a:effectLst/>
+      </p:bgPr>
+    </p:bg>
+    <p:spTree>
+      <p:nvGrpSpPr>
+        <p:cNvPr id="1" name=""/>
+        <p:cNvGrpSpPr/>
+        <p:nvPr/>
+      </p:nvGrpSpPr>
+      <p:grpSpPr/>
+      <p:sp>
+        <p:nvSpPr>
+          <p:cNvPr id="2" name="TextBox 1"/>
+          <p:cNvSpPr txBox="1"/>
+          <p:nvPr/>
+        </p:nvSpPr>
+        <p:spPr>
+          <a:xfrm>
+            <a:off x="548640" y="320040"/>
+            <a:ext cx="11094415" cy="274320"/>
+          </a:xfrm>
+          <a:prstGeom prst="rect">
+            <a:avLst/>
+          </a:prstGeom>
+          <a:noFill/>
+        </p:spPr>
+        <p:txBody>
+          <a:bodyPr wrap="square" anchor="t" lIns="0" rIns="0" tIns="0" bIns="0"/>
+          <a:lstStyle/>
+          <a:p>
+            <a:pPr algn="l"/>
+            <a:r>
+              <a:rPr sz="1100" b="1" i="0">
+                <a:solidFill>
+                  <a:srgbClr val="54595D"/>
+                </a:solidFill>
+                <a:latin typeface="Calibri"/>
+              </a:rPr>
+              <a:t>CORE COMPONENT  ·  Core Paper 2</a:t>
+            </a:r>
+          </a:p>
+        </p:txBody>
+      </p:sp>
+      <p:sp>
+        <p:nvSpPr>
+          <p:cNvPr id="3" name="TextBox 2"/>
+          <p:cNvSpPr txBox="1"/>
+          <p:nvPr/>
+        </p:nvSpPr>
+        <p:spPr>
+          <a:xfrm>
+            <a:off x="548640" y="566928"/>
+            <a:ext cx="11094415" cy="822960"/>
+          </a:xfrm>
+          <a:prstGeom prst="rect">
+            <a:avLst/>
+          </a:prstGeom>
+          <a:noFill/>
+        </p:spPr>
+        <p:txBody>
+          <a:bodyPr wrap="square" anchor="ctr" lIns="0" rIns="0" tIns="0" bIns="0"/>
+          <a:lstStyle/>
+          <a:p>
+            <a:pPr algn="l"/>
+            <a:r>
+              <a:rPr sz="3200" b="1" i="0">
+                <a:solidFill>
+                  <a:srgbClr val="03306E"/>
+                </a:solidFill>
+                <a:latin typeface="Cambria"/>
+              </a:rPr>
+              <a:t>Cloud delivery models</a:t>
+            </a:r>
+          </a:p>
+        </p:txBody>
+      </p:sp>
+      <p:sp>
+        <p:nvSpPr>
+          <p:cNvPr id="4" name="TextBox 3"/>
+          <p:cNvSpPr txBox="1"/>
+          <p:nvPr/>
+        </p:nvSpPr>
+        <p:spPr>
+          <a:xfrm>
+            <a:off x="548640" y="6446520"/>
+            <a:ext cx="8229600" cy="274320"/>
+          </a:xfrm>
+          <a:prstGeom prst="rect">
+            <a:avLst/>
+          </a:prstGeom>
+          <a:noFill/>
+        </p:spPr>
+        <p:txBody>
+          <a:bodyPr wrap="square" anchor="t" lIns="0" rIns="0" tIns="0" bIns="0"/>
+          <a:lstStyle/>
+          <a:p>
+            <a:pPr algn="l"/>
+            <a:r>
+              <a:rPr sz="1000" b="0" i="0">
+                <a:solidFill>
+                  <a:srgbClr val="54595D"/>
+                </a:solidFill>
+                <a:latin typeface="Calibri"/>
+              </a:rPr>
+              <a:t>Digital Software Development T Level  ·  Virtual, Cloud and Resilient Environments</a:t>
+            </a:r>
+          </a:p>
+        </p:txBody>
+      </p:sp>
+      <p:sp>
+        <p:nvSpPr>
+          <p:cNvPr id="5" name="TextBox 4"/>
+          <p:cNvSpPr txBox="1"/>
+          <p:nvPr/>
+        </p:nvSpPr>
+        <p:spPr>
+          <a:xfrm>
+            <a:off x="10728655" y="6446520"/>
+            <a:ext cx="914400" cy="274320"/>
+          </a:xfrm>
+          <a:prstGeom prst="rect">
+            <a:avLst/>
+          </a:prstGeom>
+          <a:noFill/>
+        </p:spPr>
+        <p:txBody>
+          <a:bodyPr wrap="square" anchor="t" lIns="0" rIns="0" tIns="0" bIns="0"/>
+          <a:lstStyle/>
+          <a:p>
+            <a:pPr algn="r"/>
+            <a:r>
+              <a:rPr sz="1000" b="0" i="0">
+                <a:solidFill>
+                  <a:srgbClr val="54595D"/>
+                </a:solidFill>
+                <a:latin typeface="Calibri"/>
+              </a:rPr>
+              <a:t>7</a:t>
             </a:r>
           </a:p>
         </p:txBody>
@@ -5644,2190 +11124,6 @@
 </p:sld>
 </file>
 
-<file path=ppt/slides/slide5.xml><?xml version="1.0" encoding="utf-8"?>
-<p:sld xmlns:a="http://schemas.openxmlformats.org/drawingml/2006/main" xmlns:p="http://schemas.openxmlformats.org/presentationml/2006/main" xmlns:r="http://schemas.openxmlformats.org/officeDocument/2006/relationships">
-  <p:cSld>
-    <p:bg>
-      <p:bgPr>
-        <a:solidFill>
-          <a:srgbClr val="FFFFFF"/>
-        </a:solidFill>
-        <a:effectLst/>
-      </p:bgPr>
-    </p:bg>
-    <p:spTree>
-      <p:nvGrpSpPr>
-        <p:cNvPr id="1" name=""/>
-        <p:cNvGrpSpPr/>
-        <p:nvPr/>
-      </p:nvGrpSpPr>
-      <p:grpSpPr/>
-      <p:sp>
-        <p:nvSpPr>
-          <p:cNvPr id="2" name="TextBox 1"/>
-          <p:cNvSpPr txBox="1"/>
-          <p:nvPr/>
-        </p:nvSpPr>
-        <p:spPr>
-          <a:xfrm>
-            <a:off x="548640" y="320040"/>
-            <a:ext cx="11094415" cy="274320"/>
-          </a:xfrm>
-          <a:prstGeom prst="rect">
-            <a:avLst/>
-          </a:prstGeom>
-          <a:noFill/>
-        </p:spPr>
-        <p:txBody>
-          <a:bodyPr wrap="square" anchor="t" lIns="0" rIns="0" tIns="0" bIns="0"/>
-          <a:lstStyle/>
-          <a:p>
-            <a:pPr algn="l"/>
-            <a:r>
-              <a:rPr sz="1100" b="1" i="0">
-                <a:solidFill>
-                  <a:srgbClr val="54595D"/>
-                </a:solidFill>
-                <a:latin typeface="Calibri"/>
-              </a:rPr>
-              <a:t>CORE COMPONENT  ·  Core Paper 2</a:t>
-            </a:r>
-          </a:p>
-        </p:txBody>
-      </p:sp>
-      <p:sp>
-        <p:nvSpPr>
-          <p:cNvPr id="3" name="TextBox 2"/>
-          <p:cNvSpPr txBox="1"/>
-          <p:nvPr/>
-        </p:nvSpPr>
-        <p:spPr>
-          <a:xfrm>
-            <a:off x="548640" y="566928"/>
-            <a:ext cx="11094415" cy="822960"/>
-          </a:xfrm>
-          <a:prstGeom prst="rect">
-            <a:avLst/>
-          </a:prstGeom>
-          <a:noFill/>
-        </p:spPr>
-        <p:txBody>
-          <a:bodyPr wrap="square" anchor="ctr" lIns="0" rIns="0" tIns="0" bIns="0"/>
-          <a:lstStyle/>
-          <a:p>
-            <a:pPr algn="l"/>
-            <a:r>
-              <a:rPr sz="3200" b="1" i="0">
-                <a:solidFill>
-                  <a:srgbClr val="03306E"/>
-                </a:solidFill>
-                <a:latin typeface="Cambria"/>
-              </a:rPr>
-              <a:t>Making environments resilient</a:t>
-            </a:r>
-          </a:p>
-        </p:txBody>
-      </p:sp>
-      <p:sp>
-        <p:nvSpPr>
-          <p:cNvPr id="4" name="TextBox 3"/>
-          <p:cNvSpPr txBox="1"/>
-          <p:nvPr/>
-        </p:nvSpPr>
-        <p:spPr>
-          <a:xfrm>
-            <a:off x="548640" y="6446520"/>
-            <a:ext cx="8229600" cy="274320"/>
-          </a:xfrm>
-          <a:prstGeom prst="rect">
-            <a:avLst/>
-          </a:prstGeom>
-          <a:noFill/>
-        </p:spPr>
-        <p:txBody>
-          <a:bodyPr wrap="square" anchor="t" lIns="0" rIns="0" tIns="0" bIns="0"/>
-          <a:lstStyle/>
-          <a:p>
-            <a:pPr algn="l"/>
-            <a:r>
-              <a:rPr sz="1000" b="0" i="0">
-                <a:solidFill>
-                  <a:srgbClr val="54595D"/>
-                </a:solidFill>
-                <a:latin typeface="Calibri"/>
-              </a:rPr>
-              <a:t>Digital Software Development T Level  ·  Virtual, Cloud and Resilient Environments</a:t>
-            </a:r>
-          </a:p>
-        </p:txBody>
-      </p:sp>
-      <p:sp>
-        <p:nvSpPr>
-          <p:cNvPr id="5" name="TextBox 4"/>
-          <p:cNvSpPr txBox="1"/>
-          <p:nvPr/>
-        </p:nvSpPr>
-        <p:spPr>
-          <a:xfrm>
-            <a:off x="10728655" y="6446520"/>
-            <a:ext cx="914400" cy="274320"/>
-          </a:xfrm>
-          <a:prstGeom prst="rect">
-            <a:avLst/>
-          </a:prstGeom>
-          <a:noFill/>
-        </p:spPr>
-        <p:txBody>
-          <a:bodyPr wrap="square" anchor="t" lIns="0" rIns="0" tIns="0" bIns="0"/>
-          <a:lstStyle/>
-          <a:p>
-            <a:pPr algn="r"/>
-            <a:r>
-              <a:rPr sz="1000" b="0" i="0">
-                <a:solidFill>
-                  <a:srgbClr val="54595D"/>
-                </a:solidFill>
-                <a:latin typeface="Calibri"/>
-              </a:rPr>
-              <a:t>5</a:t>
-            </a:r>
-          </a:p>
-        </p:txBody>
-      </p:sp>
-      <p:sp>
-        <p:nvSpPr>
-          <p:cNvPr id="6" name="Rounded Rectangle 5"/>
-          <p:cNvSpPr/>
-          <p:nvPr/>
-        </p:nvSpPr>
-        <p:spPr>
-          <a:xfrm>
-            <a:off x="548640" y="1600200"/>
-            <a:ext cx="3515258" cy="2148840"/>
-          </a:xfrm>
-          <a:prstGeom prst="roundRect">
-            <a:avLst>
-              <a:gd name="adj" fmla="val 6000"/>
-            </a:avLst>
-          </a:prstGeom>
-          <a:solidFill>
-            <a:srgbClr val="EAF3FF"/>
-          </a:solidFill>
-          <a:ln>
-            <a:noFill/>
-          </a:ln>
-          <a:effectLst/>
-        </p:spPr>
-        <p:style>
-          <a:lnRef idx="1">
-            <a:schemeClr val="accent1"/>
-          </a:lnRef>
-          <a:fillRef idx="3">
-            <a:schemeClr val="accent1"/>
-          </a:fillRef>
-          <a:effectRef idx="2">
-            <a:schemeClr val="accent1"/>
-          </a:effectRef>
-          <a:fontRef idx="minor">
-            <a:schemeClr val="lt1"/>
-          </a:fontRef>
-        </p:style>
-        <p:txBody>
-          <a:bodyPr rtlCol="0" anchor="ctr"/>
-          <a:lstStyle/>
-          <a:p/>
-        </p:txBody>
-      </p:sp>
-      <p:sp>
-        <p:nvSpPr>
-          <p:cNvPr id="7" name="Oval 6"/>
-          <p:cNvSpPr/>
-          <p:nvPr/>
-        </p:nvSpPr>
-        <p:spPr>
-          <a:xfrm>
-            <a:off x="777240" y="1828800"/>
-            <a:ext cx="457200" cy="457200"/>
-          </a:xfrm>
-          <a:prstGeom prst="ellipse">
-            <a:avLst/>
-          </a:prstGeom>
-          <a:solidFill>
-            <a:srgbClr val="F2B705"/>
-          </a:solidFill>
-          <a:ln>
-            <a:noFill/>
-          </a:ln>
-          <a:effectLst/>
-        </p:spPr>
-        <p:style>
-          <a:lnRef idx="1">
-            <a:schemeClr val="accent1"/>
-          </a:lnRef>
-          <a:fillRef idx="3">
-            <a:schemeClr val="accent1"/>
-          </a:fillRef>
-          <a:effectRef idx="2">
-            <a:schemeClr val="accent1"/>
-          </a:effectRef>
-          <a:fontRef idx="minor">
-            <a:schemeClr val="lt1"/>
-          </a:fontRef>
-        </p:style>
-        <p:txBody>
-          <a:bodyPr rtlCol="0" anchor="ctr" lIns="0" rIns="0" tIns="0" bIns="0"/>
-          <a:lstStyle/>
-          <a:p>
-            <a:pPr algn="ctr"/>
-            <a:r>
-              <a:rPr sz="1500" b="1">
-                <a:solidFill>
-                  <a:srgbClr val="202122"/>
-                </a:solidFill>
-                <a:latin typeface="Calibri"/>
-              </a:rPr>
-              <a:t>1</a:t>
-            </a:r>
-          </a:p>
-        </p:txBody>
-      </p:sp>
-      <p:sp>
-        <p:nvSpPr>
-          <p:cNvPr id="8" name="TextBox 7"/>
-          <p:cNvSpPr txBox="1"/>
-          <p:nvPr/>
-        </p:nvSpPr>
-        <p:spPr>
-          <a:xfrm>
-            <a:off x="1371600" y="1801368"/>
-            <a:ext cx="2509418" cy="512064"/>
-          </a:xfrm>
-          <a:prstGeom prst="rect">
-            <a:avLst/>
-          </a:prstGeom>
-          <a:noFill/>
-        </p:spPr>
-        <p:txBody>
-          <a:bodyPr wrap="square" anchor="ctr" lIns="0" rIns="0" tIns="0" bIns="0"/>
-          <a:lstStyle/>
-          <a:p>
-            <a:pPr algn="l"/>
-            <a:r>
-              <a:rPr sz="1900" b="1" i="0">
-                <a:solidFill>
-                  <a:srgbClr val="03306E"/>
-                </a:solidFill>
-                <a:latin typeface="Calibri"/>
-              </a:rPr>
-              <a:t>Updates and patches</a:t>
-            </a:r>
-          </a:p>
-        </p:txBody>
-      </p:sp>
-      <p:sp>
-        <p:nvSpPr>
-          <p:cNvPr id="9" name="TextBox 8"/>
-          <p:cNvSpPr txBox="1"/>
-          <p:nvPr/>
-        </p:nvSpPr>
-        <p:spPr>
-          <a:xfrm>
-            <a:off x="777240" y="2468880"/>
-            <a:ext cx="3058058" cy="1143000"/>
-          </a:xfrm>
-          <a:prstGeom prst="rect">
-            <a:avLst/>
-          </a:prstGeom>
-          <a:noFill/>
-        </p:spPr>
-        <p:txBody>
-          <a:bodyPr wrap="square" anchor="t" lIns="0" rIns="0" tIns="0" bIns="0"/>
-          <a:lstStyle/>
-          <a:p>
-            <a:pPr algn="l"/>
-            <a:r>
-              <a:rPr sz="2000" b="0" i="0">
-                <a:solidFill>
-                  <a:srgbClr val="202122"/>
-                </a:solidFill>
-                <a:latin typeface="Calibri"/>
-              </a:rPr>
-              <a:t>Fix vulnerabilities quickly.</a:t>
-            </a:r>
-          </a:p>
-        </p:txBody>
-      </p:sp>
-      <p:sp>
-        <p:nvSpPr>
-          <p:cNvPr id="10" name="Rounded Rectangle 9"/>
-          <p:cNvSpPr/>
-          <p:nvPr/>
-        </p:nvSpPr>
-        <p:spPr>
-          <a:xfrm>
-            <a:off x="4338218" y="1600200"/>
-            <a:ext cx="3515258" cy="2148840"/>
-          </a:xfrm>
-          <a:prstGeom prst="roundRect">
-            <a:avLst>
-              <a:gd name="adj" fmla="val 6000"/>
-            </a:avLst>
-          </a:prstGeom>
-          <a:solidFill>
-            <a:srgbClr val="EAF3FF"/>
-          </a:solidFill>
-          <a:ln>
-            <a:noFill/>
-          </a:ln>
-          <a:effectLst/>
-        </p:spPr>
-        <p:style>
-          <a:lnRef idx="1">
-            <a:schemeClr val="accent1"/>
-          </a:lnRef>
-          <a:fillRef idx="3">
-            <a:schemeClr val="accent1"/>
-          </a:fillRef>
-          <a:effectRef idx="2">
-            <a:schemeClr val="accent1"/>
-          </a:effectRef>
-          <a:fontRef idx="minor">
-            <a:schemeClr val="lt1"/>
-          </a:fontRef>
-        </p:style>
-        <p:txBody>
-          <a:bodyPr rtlCol="0" anchor="ctr"/>
-          <a:lstStyle/>
-          <a:p/>
-        </p:txBody>
-      </p:sp>
-      <p:sp>
-        <p:nvSpPr>
-          <p:cNvPr id="11" name="Oval 10"/>
-          <p:cNvSpPr/>
-          <p:nvPr/>
-        </p:nvSpPr>
-        <p:spPr>
-          <a:xfrm>
-            <a:off x="4566818" y="1828800"/>
-            <a:ext cx="457200" cy="457200"/>
-          </a:xfrm>
-          <a:prstGeom prst="ellipse">
-            <a:avLst/>
-          </a:prstGeom>
-          <a:solidFill>
-            <a:srgbClr val="F2B705"/>
-          </a:solidFill>
-          <a:ln>
-            <a:noFill/>
-          </a:ln>
-          <a:effectLst/>
-        </p:spPr>
-        <p:style>
-          <a:lnRef idx="1">
-            <a:schemeClr val="accent1"/>
-          </a:lnRef>
-          <a:fillRef idx="3">
-            <a:schemeClr val="accent1"/>
-          </a:fillRef>
-          <a:effectRef idx="2">
-            <a:schemeClr val="accent1"/>
-          </a:effectRef>
-          <a:fontRef idx="minor">
-            <a:schemeClr val="lt1"/>
-          </a:fontRef>
-        </p:style>
-        <p:txBody>
-          <a:bodyPr rtlCol="0" anchor="ctr" lIns="0" rIns="0" tIns="0" bIns="0"/>
-          <a:lstStyle/>
-          <a:p>
-            <a:pPr algn="ctr"/>
-            <a:r>
-              <a:rPr sz="1500" b="1">
-                <a:solidFill>
-                  <a:srgbClr val="202122"/>
-                </a:solidFill>
-                <a:latin typeface="Calibri"/>
-              </a:rPr>
-              <a:t>2</a:t>
-            </a:r>
-          </a:p>
-        </p:txBody>
-      </p:sp>
-      <p:sp>
-        <p:nvSpPr>
-          <p:cNvPr id="12" name="TextBox 11"/>
-          <p:cNvSpPr txBox="1"/>
-          <p:nvPr/>
-        </p:nvSpPr>
-        <p:spPr>
-          <a:xfrm>
-            <a:off x="5161178" y="1801368"/>
-            <a:ext cx="2509418" cy="512064"/>
-          </a:xfrm>
-          <a:prstGeom prst="rect">
-            <a:avLst/>
-          </a:prstGeom>
-          <a:noFill/>
-        </p:spPr>
-        <p:txBody>
-          <a:bodyPr wrap="square" anchor="ctr" lIns="0" rIns="0" tIns="0" bIns="0"/>
-          <a:lstStyle/>
-          <a:p>
-            <a:pPr algn="l"/>
-            <a:r>
-              <a:rPr sz="1800" b="1" i="0">
-                <a:solidFill>
-                  <a:srgbClr val="03306E"/>
-                </a:solidFill>
-                <a:latin typeface="Calibri"/>
-              </a:rPr>
-              <a:t>Hardware replacement</a:t>
-            </a:r>
-          </a:p>
-        </p:txBody>
-      </p:sp>
-      <p:sp>
-        <p:nvSpPr>
-          <p:cNvPr id="13" name="TextBox 12"/>
-          <p:cNvSpPr txBox="1"/>
-          <p:nvPr/>
-        </p:nvSpPr>
-        <p:spPr>
-          <a:xfrm>
-            <a:off x="4566818" y="2468880"/>
-            <a:ext cx="3058058" cy="1143000"/>
-          </a:xfrm>
-          <a:prstGeom prst="rect">
-            <a:avLst/>
-          </a:prstGeom>
-          <a:noFill/>
-        </p:spPr>
-        <p:txBody>
-          <a:bodyPr wrap="square" anchor="t" lIns="0" rIns="0" tIns="0" bIns="0"/>
-          <a:lstStyle/>
-          <a:p>
-            <a:pPr algn="l"/>
-            <a:r>
-              <a:rPr sz="2000" b="0" i="0">
-                <a:solidFill>
-                  <a:srgbClr val="202122"/>
-                </a:solidFill>
-                <a:latin typeface="Calibri"/>
-              </a:rPr>
-              <a:t>Rolling plans and secure disposal.</a:t>
-            </a:r>
-          </a:p>
-        </p:txBody>
-      </p:sp>
-      <p:sp>
-        <p:nvSpPr>
-          <p:cNvPr id="14" name="Rounded Rectangle 13"/>
-          <p:cNvSpPr/>
-          <p:nvPr/>
-        </p:nvSpPr>
-        <p:spPr>
-          <a:xfrm>
-            <a:off x="8127796" y="1600200"/>
-            <a:ext cx="3515258" cy="2148840"/>
-          </a:xfrm>
-          <a:prstGeom prst="roundRect">
-            <a:avLst>
-              <a:gd name="adj" fmla="val 6000"/>
-            </a:avLst>
-          </a:prstGeom>
-          <a:solidFill>
-            <a:srgbClr val="EAF3FF"/>
-          </a:solidFill>
-          <a:ln>
-            <a:noFill/>
-          </a:ln>
-          <a:effectLst/>
-        </p:spPr>
-        <p:style>
-          <a:lnRef idx="1">
-            <a:schemeClr val="accent1"/>
-          </a:lnRef>
-          <a:fillRef idx="3">
-            <a:schemeClr val="accent1"/>
-          </a:fillRef>
-          <a:effectRef idx="2">
-            <a:schemeClr val="accent1"/>
-          </a:effectRef>
-          <a:fontRef idx="minor">
-            <a:schemeClr val="lt1"/>
-          </a:fontRef>
-        </p:style>
-        <p:txBody>
-          <a:bodyPr rtlCol="0" anchor="ctr"/>
-          <a:lstStyle/>
-          <a:p/>
-        </p:txBody>
-      </p:sp>
-      <p:sp>
-        <p:nvSpPr>
-          <p:cNvPr id="15" name="Oval 14"/>
-          <p:cNvSpPr/>
-          <p:nvPr/>
-        </p:nvSpPr>
-        <p:spPr>
-          <a:xfrm>
-            <a:off x="8356396" y="1828800"/>
-            <a:ext cx="457200" cy="457200"/>
-          </a:xfrm>
-          <a:prstGeom prst="ellipse">
-            <a:avLst/>
-          </a:prstGeom>
-          <a:solidFill>
-            <a:srgbClr val="F2B705"/>
-          </a:solidFill>
-          <a:ln>
-            <a:noFill/>
-          </a:ln>
-          <a:effectLst/>
-        </p:spPr>
-        <p:style>
-          <a:lnRef idx="1">
-            <a:schemeClr val="accent1"/>
-          </a:lnRef>
-          <a:fillRef idx="3">
-            <a:schemeClr val="accent1"/>
-          </a:fillRef>
-          <a:effectRef idx="2">
-            <a:schemeClr val="accent1"/>
-          </a:effectRef>
-          <a:fontRef idx="minor">
-            <a:schemeClr val="lt1"/>
-          </a:fontRef>
-        </p:style>
-        <p:txBody>
-          <a:bodyPr rtlCol="0" anchor="ctr" lIns="0" rIns="0" tIns="0" bIns="0"/>
-          <a:lstStyle/>
-          <a:p>
-            <a:pPr algn="ctr"/>
-            <a:r>
-              <a:rPr sz="1500" b="1">
-                <a:solidFill>
-                  <a:srgbClr val="202122"/>
-                </a:solidFill>
-                <a:latin typeface="Calibri"/>
-              </a:rPr>
-              <a:t>3</a:t>
-            </a:r>
-          </a:p>
-        </p:txBody>
-      </p:sp>
-      <p:sp>
-        <p:nvSpPr>
-          <p:cNvPr id="16" name="TextBox 15"/>
-          <p:cNvSpPr txBox="1"/>
-          <p:nvPr/>
-        </p:nvSpPr>
-        <p:spPr>
-          <a:xfrm>
-            <a:off x="8950756" y="1801368"/>
-            <a:ext cx="2509418" cy="512064"/>
-          </a:xfrm>
-          <a:prstGeom prst="rect">
-            <a:avLst/>
-          </a:prstGeom>
-          <a:noFill/>
-        </p:spPr>
-        <p:txBody>
-          <a:bodyPr wrap="square" anchor="ctr" lIns="0" rIns="0" tIns="0" bIns="0"/>
-          <a:lstStyle/>
-          <a:p>
-            <a:pPr algn="l"/>
-            <a:r>
-              <a:rPr sz="1900" b="1" i="0">
-                <a:solidFill>
-                  <a:srgbClr val="03306E"/>
-                </a:solidFill>
-                <a:latin typeface="Calibri"/>
-              </a:rPr>
-              <a:t>Redundancy</a:t>
-            </a:r>
-          </a:p>
-        </p:txBody>
-      </p:sp>
-      <p:sp>
-        <p:nvSpPr>
-          <p:cNvPr id="17" name="TextBox 16"/>
-          <p:cNvSpPr txBox="1"/>
-          <p:nvPr/>
-        </p:nvSpPr>
-        <p:spPr>
-          <a:xfrm>
-            <a:off x="8356396" y="2468880"/>
-            <a:ext cx="3058058" cy="1143000"/>
-          </a:xfrm>
-          <a:prstGeom prst="rect">
-            <a:avLst/>
-          </a:prstGeom>
-          <a:noFill/>
-        </p:spPr>
-        <p:txBody>
-          <a:bodyPr wrap="square" anchor="t" lIns="0" rIns="0" tIns="0" bIns="0"/>
-          <a:lstStyle/>
-          <a:p>
-            <a:pPr algn="l"/>
-            <a:r>
-              <a:rPr sz="2000" b="0" i="0">
-                <a:solidFill>
-                  <a:srgbClr val="202122"/>
-                </a:solidFill>
-                <a:latin typeface="Calibri"/>
-              </a:rPr>
-              <a:t>Duplicate data and systems.</a:t>
-            </a:r>
-          </a:p>
-        </p:txBody>
-      </p:sp>
-      <p:sp>
-        <p:nvSpPr>
-          <p:cNvPr id="18" name="Rounded Rectangle 17"/>
-          <p:cNvSpPr/>
-          <p:nvPr/>
-        </p:nvSpPr>
-        <p:spPr>
-          <a:xfrm>
-            <a:off x="548640" y="4023360"/>
-            <a:ext cx="3515258" cy="2148840"/>
-          </a:xfrm>
-          <a:prstGeom prst="roundRect">
-            <a:avLst>
-              <a:gd name="adj" fmla="val 6000"/>
-            </a:avLst>
-          </a:prstGeom>
-          <a:solidFill>
-            <a:srgbClr val="EAF3FF"/>
-          </a:solidFill>
-          <a:ln>
-            <a:noFill/>
-          </a:ln>
-          <a:effectLst/>
-        </p:spPr>
-        <p:style>
-          <a:lnRef idx="1">
-            <a:schemeClr val="accent1"/>
-          </a:lnRef>
-          <a:fillRef idx="3">
-            <a:schemeClr val="accent1"/>
-          </a:fillRef>
-          <a:effectRef idx="2">
-            <a:schemeClr val="accent1"/>
-          </a:effectRef>
-          <a:fontRef idx="minor">
-            <a:schemeClr val="lt1"/>
-          </a:fontRef>
-        </p:style>
-        <p:txBody>
-          <a:bodyPr rtlCol="0" anchor="ctr"/>
-          <a:lstStyle/>
-          <a:p/>
-        </p:txBody>
-      </p:sp>
-      <p:sp>
-        <p:nvSpPr>
-          <p:cNvPr id="19" name="Oval 18"/>
-          <p:cNvSpPr/>
-          <p:nvPr/>
-        </p:nvSpPr>
-        <p:spPr>
-          <a:xfrm>
-            <a:off x="777240" y="4251960"/>
-            <a:ext cx="457200" cy="457200"/>
-          </a:xfrm>
-          <a:prstGeom prst="ellipse">
-            <a:avLst/>
-          </a:prstGeom>
-          <a:solidFill>
-            <a:srgbClr val="F2B705"/>
-          </a:solidFill>
-          <a:ln>
-            <a:noFill/>
-          </a:ln>
-          <a:effectLst/>
-        </p:spPr>
-        <p:style>
-          <a:lnRef idx="1">
-            <a:schemeClr val="accent1"/>
-          </a:lnRef>
-          <a:fillRef idx="3">
-            <a:schemeClr val="accent1"/>
-          </a:fillRef>
-          <a:effectRef idx="2">
-            <a:schemeClr val="accent1"/>
-          </a:effectRef>
-          <a:fontRef idx="minor">
-            <a:schemeClr val="lt1"/>
-          </a:fontRef>
-        </p:style>
-        <p:txBody>
-          <a:bodyPr rtlCol="0" anchor="ctr" lIns="0" rIns="0" tIns="0" bIns="0"/>
-          <a:lstStyle/>
-          <a:p>
-            <a:pPr algn="ctr"/>
-            <a:r>
-              <a:rPr sz="1500" b="1">
-                <a:solidFill>
-                  <a:srgbClr val="202122"/>
-                </a:solidFill>
-                <a:latin typeface="Calibri"/>
-              </a:rPr>
-              <a:t>4</a:t>
-            </a:r>
-          </a:p>
-        </p:txBody>
-      </p:sp>
-      <p:sp>
-        <p:nvSpPr>
-          <p:cNvPr id="20" name="TextBox 19"/>
-          <p:cNvSpPr txBox="1"/>
-          <p:nvPr/>
-        </p:nvSpPr>
-        <p:spPr>
-          <a:xfrm>
-            <a:off x="1371600" y="4224528"/>
-            <a:ext cx="2509418" cy="512064"/>
-          </a:xfrm>
-          <a:prstGeom prst="rect">
-            <a:avLst/>
-          </a:prstGeom>
-          <a:noFill/>
-        </p:spPr>
-        <p:txBody>
-          <a:bodyPr wrap="square" anchor="ctr" lIns="0" rIns="0" tIns="0" bIns="0"/>
-          <a:lstStyle/>
-          <a:p>
-            <a:pPr algn="l"/>
-            <a:r>
-              <a:rPr sz="1900" b="1" i="0">
-                <a:solidFill>
-                  <a:srgbClr val="03306E"/>
-                </a:solidFill>
-                <a:latin typeface="Calibri"/>
-              </a:rPr>
-              <a:t>Device hardening</a:t>
-            </a:r>
-          </a:p>
-        </p:txBody>
-      </p:sp>
-      <p:sp>
-        <p:nvSpPr>
-          <p:cNvPr id="21" name="TextBox 20"/>
-          <p:cNvSpPr txBox="1"/>
-          <p:nvPr/>
-        </p:nvSpPr>
-        <p:spPr>
-          <a:xfrm>
-            <a:off x="777240" y="4892040"/>
-            <a:ext cx="3058058" cy="1143000"/>
-          </a:xfrm>
-          <a:prstGeom prst="rect">
-            <a:avLst/>
-          </a:prstGeom>
-          <a:noFill/>
-        </p:spPr>
-        <p:txBody>
-          <a:bodyPr wrap="square" anchor="t" lIns="0" rIns="0" tIns="0" bIns="0"/>
-          <a:lstStyle/>
-          <a:p>
-            <a:pPr algn="l"/>
-            <a:r>
-              <a:rPr sz="2000" b="0" i="0">
-                <a:solidFill>
-                  <a:srgbClr val="202122"/>
-                </a:solidFill>
-                <a:latin typeface="Calibri"/>
-              </a:rPr>
-              <a:t>Remove unneeded ports, apps and access.</a:t>
-            </a:r>
-          </a:p>
-        </p:txBody>
-      </p:sp>
-      <p:sp>
-        <p:nvSpPr>
-          <p:cNvPr id="22" name="Rounded Rectangle 21"/>
-          <p:cNvSpPr/>
-          <p:nvPr/>
-        </p:nvSpPr>
-        <p:spPr>
-          <a:xfrm>
-            <a:off x="4338218" y="4023360"/>
-            <a:ext cx="3515258" cy="2148840"/>
-          </a:xfrm>
-          <a:prstGeom prst="roundRect">
-            <a:avLst>
-              <a:gd name="adj" fmla="val 6000"/>
-            </a:avLst>
-          </a:prstGeom>
-          <a:solidFill>
-            <a:srgbClr val="EAF3FF"/>
-          </a:solidFill>
-          <a:ln>
-            <a:noFill/>
-          </a:ln>
-          <a:effectLst/>
-        </p:spPr>
-        <p:style>
-          <a:lnRef idx="1">
-            <a:schemeClr val="accent1"/>
-          </a:lnRef>
-          <a:fillRef idx="3">
-            <a:schemeClr val="accent1"/>
-          </a:fillRef>
-          <a:effectRef idx="2">
-            <a:schemeClr val="accent1"/>
-          </a:effectRef>
-          <a:fontRef idx="minor">
-            <a:schemeClr val="lt1"/>
-          </a:fontRef>
-        </p:style>
-        <p:txBody>
-          <a:bodyPr rtlCol="0" anchor="ctr"/>
-          <a:lstStyle/>
-          <a:p/>
-        </p:txBody>
-      </p:sp>
-      <p:sp>
-        <p:nvSpPr>
-          <p:cNvPr id="23" name="Oval 22"/>
-          <p:cNvSpPr/>
-          <p:nvPr/>
-        </p:nvSpPr>
-        <p:spPr>
-          <a:xfrm>
-            <a:off x="4566818" y="4251960"/>
-            <a:ext cx="457200" cy="457200"/>
-          </a:xfrm>
-          <a:prstGeom prst="ellipse">
-            <a:avLst/>
-          </a:prstGeom>
-          <a:solidFill>
-            <a:srgbClr val="F2B705"/>
-          </a:solidFill>
-          <a:ln>
-            <a:noFill/>
-          </a:ln>
-          <a:effectLst/>
-        </p:spPr>
-        <p:style>
-          <a:lnRef idx="1">
-            <a:schemeClr val="accent1"/>
-          </a:lnRef>
-          <a:fillRef idx="3">
-            <a:schemeClr val="accent1"/>
-          </a:fillRef>
-          <a:effectRef idx="2">
-            <a:schemeClr val="accent1"/>
-          </a:effectRef>
-          <a:fontRef idx="minor">
-            <a:schemeClr val="lt1"/>
-          </a:fontRef>
-        </p:style>
-        <p:txBody>
-          <a:bodyPr rtlCol="0" anchor="ctr" lIns="0" rIns="0" tIns="0" bIns="0"/>
-          <a:lstStyle/>
-          <a:p>
-            <a:pPr algn="ctr"/>
-            <a:r>
-              <a:rPr sz="1500" b="1">
-                <a:solidFill>
-                  <a:srgbClr val="202122"/>
-                </a:solidFill>
-                <a:latin typeface="Calibri"/>
-              </a:rPr>
-              <a:t>5</a:t>
-            </a:r>
-          </a:p>
-        </p:txBody>
-      </p:sp>
-      <p:sp>
-        <p:nvSpPr>
-          <p:cNvPr id="24" name="TextBox 23"/>
-          <p:cNvSpPr txBox="1"/>
-          <p:nvPr/>
-        </p:nvSpPr>
-        <p:spPr>
-          <a:xfrm>
-            <a:off x="5161178" y="4224528"/>
-            <a:ext cx="2509418" cy="512064"/>
-          </a:xfrm>
-          <a:prstGeom prst="rect">
-            <a:avLst/>
-          </a:prstGeom>
-          <a:noFill/>
-        </p:spPr>
-        <p:txBody>
-          <a:bodyPr wrap="square" anchor="ctr" lIns="0" rIns="0" tIns="0" bIns="0"/>
-          <a:lstStyle/>
-          <a:p>
-            <a:pPr algn="l"/>
-            <a:r>
-              <a:rPr sz="1900" b="1" i="0">
-                <a:solidFill>
-                  <a:srgbClr val="03306E"/>
-                </a:solidFill>
-                <a:latin typeface="Calibri"/>
-              </a:rPr>
-              <a:t>Backups and sites</a:t>
-            </a:r>
-          </a:p>
-        </p:txBody>
-      </p:sp>
-      <p:sp>
-        <p:nvSpPr>
-          <p:cNvPr id="25" name="TextBox 24"/>
-          <p:cNvSpPr txBox="1"/>
-          <p:nvPr/>
-        </p:nvSpPr>
-        <p:spPr>
-          <a:xfrm>
-            <a:off x="4566818" y="4892040"/>
-            <a:ext cx="3058058" cy="1143000"/>
-          </a:xfrm>
-          <a:prstGeom prst="rect">
-            <a:avLst/>
-          </a:prstGeom>
-          <a:noFill/>
-        </p:spPr>
-        <p:txBody>
-          <a:bodyPr wrap="square" anchor="t" lIns="0" rIns="0" tIns="0" bIns="0"/>
-          <a:lstStyle/>
-          <a:p>
-            <a:pPr algn="l"/>
-            <a:r>
-              <a:rPr sz="2000" b="0" i="0">
-                <a:solidFill>
-                  <a:srgbClr val="202122"/>
-                </a:solidFill>
-                <a:latin typeface="Calibri"/>
-              </a:rPr>
-              <a:t>Onsite, offsite, cloud; hot, warm and cold sites.</a:t>
-            </a:r>
-          </a:p>
-        </p:txBody>
-      </p:sp>
-      <p:sp>
-        <p:nvSpPr>
-          <p:cNvPr id="26" name="Rounded Rectangle 25"/>
-          <p:cNvSpPr/>
-          <p:nvPr/>
-        </p:nvSpPr>
-        <p:spPr>
-          <a:xfrm>
-            <a:off x="8127796" y="4023360"/>
-            <a:ext cx="3515258" cy="2148840"/>
-          </a:xfrm>
-          <a:prstGeom prst="roundRect">
-            <a:avLst>
-              <a:gd name="adj" fmla="val 6000"/>
-            </a:avLst>
-          </a:prstGeom>
-          <a:solidFill>
-            <a:srgbClr val="EAF3FF"/>
-          </a:solidFill>
-          <a:ln>
-            <a:noFill/>
-          </a:ln>
-          <a:effectLst/>
-        </p:spPr>
-        <p:style>
-          <a:lnRef idx="1">
-            <a:schemeClr val="accent1"/>
-          </a:lnRef>
-          <a:fillRef idx="3">
-            <a:schemeClr val="accent1"/>
-          </a:fillRef>
-          <a:effectRef idx="2">
-            <a:schemeClr val="accent1"/>
-          </a:effectRef>
-          <a:fontRef idx="minor">
-            <a:schemeClr val="lt1"/>
-          </a:fontRef>
-        </p:style>
-        <p:txBody>
-          <a:bodyPr rtlCol="0" anchor="ctr"/>
-          <a:lstStyle/>
-          <a:p/>
-        </p:txBody>
-      </p:sp>
-      <p:sp>
-        <p:nvSpPr>
-          <p:cNvPr id="27" name="Oval 26"/>
-          <p:cNvSpPr/>
-          <p:nvPr/>
-        </p:nvSpPr>
-        <p:spPr>
-          <a:xfrm>
-            <a:off x="8356396" y="4251960"/>
-            <a:ext cx="457200" cy="457200"/>
-          </a:xfrm>
-          <a:prstGeom prst="ellipse">
-            <a:avLst/>
-          </a:prstGeom>
-          <a:solidFill>
-            <a:srgbClr val="F2B705"/>
-          </a:solidFill>
-          <a:ln>
-            <a:noFill/>
-          </a:ln>
-          <a:effectLst/>
-        </p:spPr>
-        <p:style>
-          <a:lnRef idx="1">
-            <a:schemeClr val="accent1"/>
-          </a:lnRef>
-          <a:fillRef idx="3">
-            <a:schemeClr val="accent1"/>
-          </a:fillRef>
-          <a:effectRef idx="2">
-            <a:schemeClr val="accent1"/>
-          </a:effectRef>
-          <a:fontRef idx="minor">
-            <a:schemeClr val="lt1"/>
-          </a:fontRef>
-        </p:style>
-        <p:txBody>
-          <a:bodyPr rtlCol="0" anchor="ctr" lIns="0" rIns="0" tIns="0" bIns="0"/>
-          <a:lstStyle/>
-          <a:p>
-            <a:pPr algn="ctr"/>
-            <a:r>
-              <a:rPr sz="1500" b="1">
-                <a:solidFill>
-                  <a:srgbClr val="202122"/>
-                </a:solidFill>
-                <a:latin typeface="Calibri"/>
-              </a:rPr>
-              <a:t>6</a:t>
-            </a:r>
-          </a:p>
-        </p:txBody>
-      </p:sp>
-      <p:sp>
-        <p:nvSpPr>
-          <p:cNvPr id="28" name="TextBox 27"/>
-          <p:cNvSpPr txBox="1"/>
-          <p:nvPr/>
-        </p:nvSpPr>
-        <p:spPr>
-          <a:xfrm>
-            <a:off x="8950756" y="4224528"/>
-            <a:ext cx="2509418" cy="512064"/>
-          </a:xfrm>
-          <a:prstGeom prst="rect">
-            <a:avLst/>
-          </a:prstGeom>
-          <a:noFill/>
-        </p:spPr>
-        <p:txBody>
-          <a:bodyPr wrap="square" anchor="ctr" lIns="0" rIns="0" tIns="0" bIns="0"/>
-          <a:lstStyle/>
-          <a:p>
-            <a:pPr algn="l"/>
-            <a:r>
-              <a:rPr sz="1900" b="1" i="0">
-                <a:solidFill>
-                  <a:srgbClr val="03306E"/>
-                </a:solidFill>
-                <a:latin typeface="Calibri"/>
-              </a:rPr>
-              <a:t>Procedures</a:t>
-            </a:r>
-          </a:p>
-        </p:txBody>
-      </p:sp>
-      <p:sp>
-        <p:nvSpPr>
-          <p:cNvPr id="29" name="TextBox 28"/>
-          <p:cNvSpPr txBox="1"/>
-          <p:nvPr/>
-        </p:nvSpPr>
-        <p:spPr>
-          <a:xfrm>
-            <a:off x="8356396" y="4892040"/>
-            <a:ext cx="3058058" cy="1143000"/>
-          </a:xfrm>
-          <a:prstGeom prst="rect">
-            <a:avLst/>
-          </a:prstGeom>
-          <a:noFill/>
-        </p:spPr>
-        <p:txBody>
-          <a:bodyPr wrap="square" anchor="t" lIns="0" rIns="0" tIns="0" bIns="0"/>
-          <a:lstStyle/>
-          <a:p>
-            <a:pPr algn="l"/>
-            <a:r>
-              <a:rPr sz="2000" b="0" i="0">
-                <a:solidFill>
-                  <a:srgbClr val="202122"/>
-                </a:solidFill>
-                <a:latin typeface="Calibri"/>
-              </a:rPr>
-              <a:t>Training, induction and careful rollout.</a:t>
-            </a:r>
-          </a:p>
-        </p:txBody>
-      </p:sp>
-    </p:spTree>
-  </p:cSld>
-  <p:clrMapOvr>
-    <a:masterClrMapping/>
-  </p:clrMapOvr>
-</p:sld>
-</file>
-
-<file path=ppt/slides/slide6.xml><?xml version="1.0" encoding="utf-8"?>
-<p:sld xmlns:a="http://schemas.openxmlformats.org/drawingml/2006/main" xmlns:p="http://schemas.openxmlformats.org/presentationml/2006/main" xmlns:r="http://schemas.openxmlformats.org/officeDocument/2006/relationships">
-  <p:cSld>
-    <p:bg>
-      <p:bgPr>
-        <a:solidFill>
-          <a:srgbClr val="FFFFFF"/>
-        </a:solidFill>
-        <a:effectLst/>
-      </p:bgPr>
-    </p:bg>
-    <p:spTree>
-      <p:nvGrpSpPr>
-        <p:cNvPr id="1" name=""/>
-        <p:cNvGrpSpPr/>
-        <p:nvPr/>
-      </p:nvGrpSpPr>
-      <p:grpSpPr/>
-      <p:sp>
-        <p:nvSpPr>
-          <p:cNvPr id="2" name="TextBox 1"/>
-          <p:cNvSpPr txBox="1"/>
-          <p:nvPr/>
-        </p:nvSpPr>
-        <p:spPr>
-          <a:xfrm>
-            <a:off x="548640" y="320040"/>
-            <a:ext cx="11094415" cy="274320"/>
-          </a:xfrm>
-          <a:prstGeom prst="rect">
-            <a:avLst/>
-          </a:prstGeom>
-          <a:noFill/>
-        </p:spPr>
-        <p:txBody>
-          <a:bodyPr wrap="square" anchor="t" lIns="0" rIns="0" tIns="0" bIns="0"/>
-          <a:lstStyle/>
-          <a:p>
-            <a:pPr algn="l"/>
-            <a:r>
-              <a:rPr sz="1100" b="1" i="0">
-                <a:solidFill>
-                  <a:srgbClr val="54595D"/>
-                </a:solidFill>
-                <a:latin typeface="Calibri"/>
-              </a:rPr>
-              <a:t>CORE COMPONENT  ·  Core Paper 2</a:t>
-            </a:r>
-          </a:p>
-        </p:txBody>
-      </p:sp>
-      <p:sp>
-        <p:nvSpPr>
-          <p:cNvPr id="3" name="TextBox 2"/>
-          <p:cNvSpPr txBox="1"/>
-          <p:nvPr/>
-        </p:nvSpPr>
-        <p:spPr>
-          <a:xfrm>
-            <a:off x="548640" y="566928"/>
-            <a:ext cx="11094415" cy="822960"/>
-          </a:xfrm>
-          <a:prstGeom prst="rect">
-            <a:avLst/>
-          </a:prstGeom>
-          <a:noFill/>
-        </p:spPr>
-        <p:txBody>
-          <a:bodyPr wrap="square" anchor="ctr" lIns="0" rIns="0" tIns="0" bIns="0"/>
-          <a:lstStyle/>
-          <a:p>
-            <a:pPr algn="l"/>
-            <a:r>
-              <a:rPr sz="3200" b="1" i="0">
-                <a:solidFill>
-                  <a:srgbClr val="03306E"/>
-                </a:solidFill>
-                <a:latin typeface="Cambria"/>
-              </a:rPr>
-              <a:t>Check your understanding</a:t>
-            </a:r>
-          </a:p>
-        </p:txBody>
-      </p:sp>
-      <p:sp>
-        <p:nvSpPr>
-          <p:cNvPr id="4" name="TextBox 3"/>
-          <p:cNvSpPr txBox="1"/>
-          <p:nvPr/>
-        </p:nvSpPr>
-        <p:spPr>
-          <a:xfrm>
-            <a:off x="548640" y="6446520"/>
-            <a:ext cx="8229600" cy="274320"/>
-          </a:xfrm>
-          <a:prstGeom prst="rect">
-            <a:avLst/>
-          </a:prstGeom>
-          <a:noFill/>
-        </p:spPr>
-        <p:txBody>
-          <a:bodyPr wrap="square" anchor="t" lIns="0" rIns="0" tIns="0" bIns="0"/>
-          <a:lstStyle/>
-          <a:p>
-            <a:pPr algn="l"/>
-            <a:r>
-              <a:rPr sz="1000" b="0" i="0">
-                <a:solidFill>
-                  <a:srgbClr val="54595D"/>
-                </a:solidFill>
-                <a:latin typeface="Calibri"/>
-              </a:rPr>
-              <a:t>Digital Software Development T Level  ·  Virtual, Cloud and Resilient Environments</a:t>
-            </a:r>
-          </a:p>
-        </p:txBody>
-      </p:sp>
-      <p:sp>
-        <p:nvSpPr>
-          <p:cNvPr id="5" name="TextBox 4"/>
-          <p:cNvSpPr txBox="1"/>
-          <p:nvPr/>
-        </p:nvSpPr>
-        <p:spPr>
-          <a:xfrm>
-            <a:off x="10728655" y="6446520"/>
-            <a:ext cx="914400" cy="274320"/>
-          </a:xfrm>
-          <a:prstGeom prst="rect">
-            <a:avLst/>
-          </a:prstGeom>
-          <a:noFill/>
-        </p:spPr>
-        <p:txBody>
-          <a:bodyPr wrap="square" anchor="t" lIns="0" rIns="0" tIns="0" bIns="0"/>
-          <a:lstStyle/>
-          <a:p>
-            <a:pPr algn="r"/>
-            <a:r>
-              <a:rPr sz="1000" b="0" i="0">
-                <a:solidFill>
-                  <a:srgbClr val="54595D"/>
-                </a:solidFill>
-                <a:latin typeface="Calibri"/>
-              </a:rPr>
-              <a:t>6</a:t>
-            </a:r>
-          </a:p>
-        </p:txBody>
-      </p:sp>
-      <p:sp>
-        <p:nvSpPr>
-          <p:cNvPr id="6" name="Oval 5"/>
-          <p:cNvSpPr/>
-          <p:nvPr/>
-        </p:nvSpPr>
-        <p:spPr>
-          <a:xfrm>
-            <a:off x="548640" y="1618488"/>
-            <a:ext cx="411480" cy="411480"/>
-          </a:xfrm>
-          <a:prstGeom prst="ellipse">
-            <a:avLst/>
-          </a:prstGeom>
-          <a:solidFill>
-            <a:srgbClr val="F2B705"/>
-          </a:solidFill>
-          <a:ln>
-            <a:noFill/>
-          </a:ln>
-          <a:effectLst/>
-        </p:spPr>
-        <p:style>
-          <a:lnRef idx="1">
-            <a:schemeClr val="accent1"/>
-          </a:lnRef>
-          <a:fillRef idx="3">
-            <a:schemeClr val="accent1"/>
-          </a:fillRef>
-          <a:effectRef idx="2">
-            <a:schemeClr val="accent1"/>
-          </a:effectRef>
-          <a:fontRef idx="minor">
-            <a:schemeClr val="lt1"/>
-          </a:fontRef>
-        </p:style>
-        <p:txBody>
-          <a:bodyPr rtlCol="0" anchor="ctr" lIns="0" rIns="0" tIns="0" bIns="0"/>
-          <a:lstStyle/>
-          <a:p>
-            <a:pPr algn="ctr"/>
-            <a:r>
-              <a:rPr sz="1400" b="1">
-                <a:solidFill>
-                  <a:srgbClr val="202122"/>
-                </a:solidFill>
-                <a:latin typeface="Calibri"/>
-              </a:rPr>
-              <a:t>1</a:t>
-            </a:r>
-          </a:p>
-        </p:txBody>
-      </p:sp>
-      <p:sp>
-        <p:nvSpPr>
-          <p:cNvPr id="7" name="TextBox 6"/>
-          <p:cNvSpPr txBox="1"/>
-          <p:nvPr/>
-        </p:nvSpPr>
-        <p:spPr>
-          <a:xfrm>
-            <a:off x="1234440" y="1600200"/>
-            <a:ext cx="10408615" cy="1030986"/>
-          </a:xfrm>
-          <a:prstGeom prst="rect">
-            <a:avLst/>
-          </a:prstGeom>
-          <a:noFill/>
-        </p:spPr>
-        <p:txBody>
-          <a:bodyPr wrap="square" anchor="t" lIns="0" rIns="0" tIns="0" bIns="0"/>
-          <a:lstStyle/>
-          <a:p>
-            <a:pPr algn="l"/>
-            <a:r>
-              <a:rPr sz="2200" b="0" i="0">
-                <a:solidFill>
-                  <a:srgbClr val="202122"/>
-                </a:solidFill>
-                <a:latin typeface="Calibri"/>
-              </a:rPr>
-              <a:t>Which hypervisor type runs directly on hardware?</a:t>
-            </a:r>
-          </a:p>
-        </p:txBody>
-      </p:sp>
-      <p:sp>
-        <p:nvSpPr>
-          <p:cNvPr id="8" name="Oval 7"/>
-          <p:cNvSpPr/>
-          <p:nvPr/>
-        </p:nvSpPr>
-        <p:spPr>
-          <a:xfrm>
-            <a:off x="548640" y="2814066"/>
-            <a:ext cx="411480" cy="411480"/>
-          </a:xfrm>
-          <a:prstGeom prst="ellipse">
-            <a:avLst/>
-          </a:prstGeom>
-          <a:solidFill>
-            <a:srgbClr val="F2B705"/>
-          </a:solidFill>
-          <a:ln>
-            <a:noFill/>
-          </a:ln>
-          <a:effectLst/>
-        </p:spPr>
-        <p:style>
-          <a:lnRef idx="1">
-            <a:schemeClr val="accent1"/>
-          </a:lnRef>
-          <a:fillRef idx="3">
-            <a:schemeClr val="accent1"/>
-          </a:fillRef>
-          <a:effectRef idx="2">
-            <a:schemeClr val="accent1"/>
-          </a:effectRef>
-          <a:fontRef idx="minor">
-            <a:schemeClr val="lt1"/>
-          </a:fontRef>
-        </p:style>
-        <p:txBody>
-          <a:bodyPr rtlCol="0" anchor="ctr" lIns="0" rIns="0" tIns="0" bIns="0"/>
-          <a:lstStyle/>
-          <a:p>
-            <a:pPr algn="ctr"/>
-            <a:r>
-              <a:rPr sz="1400" b="1">
-                <a:solidFill>
-                  <a:srgbClr val="202122"/>
-                </a:solidFill>
-                <a:latin typeface="Calibri"/>
-              </a:rPr>
-              <a:t>2</a:t>
-            </a:r>
-          </a:p>
-        </p:txBody>
-      </p:sp>
-      <p:sp>
-        <p:nvSpPr>
-          <p:cNvPr id="9" name="TextBox 8"/>
-          <p:cNvSpPr txBox="1"/>
-          <p:nvPr/>
-        </p:nvSpPr>
-        <p:spPr>
-          <a:xfrm>
-            <a:off x="1234440" y="2795778"/>
-            <a:ext cx="10408615" cy="1030986"/>
-          </a:xfrm>
-          <a:prstGeom prst="rect">
-            <a:avLst/>
-          </a:prstGeom>
-          <a:noFill/>
-        </p:spPr>
-        <p:txBody>
-          <a:bodyPr wrap="square" anchor="t" lIns="0" rIns="0" tIns="0" bIns="0"/>
-          <a:lstStyle/>
-          <a:p>
-            <a:pPr algn="l"/>
-            <a:r>
-              <a:rPr sz="2200" b="0" i="0">
-                <a:solidFill>
-                  <a:srgbClr val="202122"/>
-                </a:solidFill>
-                <a:latin typeface="Calibri"/>
-              </a:rPr>
-              <a:t>In PaaS, who manages the operating system?</a:t>
-            </a:r>
-          </a:p>
-        </p:txBody>
-      </p:sp>
-      <p:sp>
-        <p:nvSpPr>
-          <p:cNvPr id="10" name="Oval 9"/>
-          <p:cNvSpPr/>
-          <p:nvPr/>
-        </p:nvSpPr>
-        <p:spPr>
-          <a:xfrm>
-            <a:off x="548640" y="4009644"/>
-            <a:ext cx="411480" cy="411480"/>
-          </a:xfrm>
-          <a:prstGeom prst="ellipse">
-            <a:avLst/>
-          </a:prstGeom>
-          <a:solidFill>
-            <a:srgbClr val="F2B705"/>
-          </a:solidFill>
-          <a:ln>
-            <a:noFill/>
-          </a:ln>
-          <a:effectLst/>
-        </p:spPr>
-        <p:style>
-          <a:lnRef idx="1">
-            <a:schemeClr val="accent1"/>
-          </a:lnRef>
-          <a:fillRef idx="3">
-            <a:schemeClr val="accent1"/>
-          </a:fillRef>
-          <a:effectRef idx="2">
-            <a:schemeClr val="accent1"/>
-          </a:effectRef>
-          <a:fontRef idx="minor">
-            <a:schemeClr val="lt1"/>
-          </a:fontRef>
-        </p:style>
-        <p:txBody>
-          <a:bodyPr rtlCol="0" anchor="ctr" lIns="0" rIns="0" tIns="0" bIns="0"/>
-          <a:lstStyle/>
-          <a:p>
-            <a:pPr algn="ctr"/>
-            <a:r>
-              <a:rPr sz="1400" b="1">
-                <a:solidFill>
-                  <a:srgbClr val="202122"/>
-                </a:solidFill>
-                <a:latin typeface="Calibri"/>
-              </a:rPr>
-              <a:t>3</a:t>
-            </a:r>
-          </a:p>
-        </p:txBody>
-      </p:sp>
-      <p:sp>
-        <p:nvSpPr>
-          <p:cNvPr id="11" name="TextBox 10"/>
-          <p:cNvSpPr txBox="1"/>
-          <p:nvPr/>
-        </p:nvSpPr>
-        <p:spPr>
-          <a:xfrm>
-            <a:off x="1234440" y="3991356"/>
-            <a:ext cx="10408615" cy="1030986"/>
-          </a:xfrm>
-          <a:prstGeom prst="rect">
-            <a:avLst/>
-          </a:prstGeom>
-          <a:noFill/>
-        </p:spPr>
-        <p:txBody>
-          <a:bodyPr wrap="square" anchor="t" lIns="0" rIns="0" tIns="0" bIns="0"/>
-          <a:lstStyle/>
-          <a:p>
-            <a:pPr algn="l"/>
-            <a:r>
-              <a:rPr sz="2200" b="0" i="0">
-                <a:solidFill>
-                  <a:srgbClr val="202122"/>
-                </a:solidFill>
-                <a:latin typeface="Calibri"/>
-              </a:rPr>
-              <a:t>Give one drawback of virtualisation.</a:t>
-            </a:r>
-          </a:p>
-        </p:txBody>
-      </p:sp>
-      <p:sp>
-        <p:nvSpPr>
-          <p:cNvPr id="12" name="Oval 11"/>
-          <p:cNvSpPr/>
-          <p:nvPr/>
-        </p:nvSpPr>
-        <p:spPr>
-          <a:xfrm>
-            <a:off x="548640" y="5205221"/>
-            <a:ext cx="411480" cy="411480"/>
-          </a:xfrm>
-          <a:prstGeom prst="ellipse">
-            <a:avLst/>
-          </a:prstGeom>
-          <a:solidFill>
-            <a:srgbClr val="F2B705"/>
-          </a:solidFill>
-          <a:ln>
-            <a:noFill/>
-          </a:ln>
-          <a:effectLst/>
-        </p:spPr>
-        <p:style>
-          <a:lnRef idx="1">
-            <a:schemeClr val="accent1"/>
-          </a:lnRef>
-          <a:fillRef idx="3">
-            <a:schemeClr val="accent1"/>
-          </a:fillRef>
-          <a:effectRef idx="2">
-            <a:schemeClr val="accent1"/>
-          </a:effectRef>
-          <a:fontRef idx="minor">
-            <a:schemeClr val="lt1"/>
-          </a:fontRef>
-        </p:style>
-        <p:txBody>
-          <a:bodyPr rtlCol="0" anchor="ctr" lIns="0" rIns="0" tIns="0" bIns="0"/>
-          <a:lstStyle/>
-          <a:p>
-            <a:pPr algn="ctr"/>
-            <a:r>
-              <a:rPr sz="1400" b="1">
-                <a:solidFill>
-                  <a:srgbClr val="202122"/>
-                </a:solidFill>
-                <a:latin typeface="Calibri"/>
-              </a:rPr>
-              <a:t>4</a:t>
-            </a:r>
-          </a:p>
-        </p:txBody>
-      </p:sp>
-      <p:sp>
-        <p:nvSpPr>
-          <p:cNvPr id="13" name="TextBox 12"/>
-          <p:cNvSpPr txBox="1"/>
-          <p:nvPr/>
-        </p:nvSpPr>
-        <p:spPr>
-          <a:xfrm>
-            <a:off x="1234440" y="5186933"/>
-            <a:ext cx="10408615" cy="1030986"/>
-          </a:xfrm>
-          <a:prstGeom prst="rect">
-            <a:avLst/>
-          </a:prstGeom>
-          <a:noFill/>
-        </p:spPr>
-        <p:txBody>
-          <a:bodyPr wrap="square" anchor="t" lIns="0" rIns="0" tIns="0" bIns="0"/>
-          <a:lstStyle/>
-          <a:p>
-            <a:pPr algn="l"/>
-            <a:r>
-              <a:rPr sz="2200" b="0" i="0">
-                <a:solidFill>
-                  <a:srgbClr val="202122"/>
-                </a:solidFill>
-                <a:latin typeface="Calibri"/>
-              </a:rPr>
-              <a:t>What is a hot site?</a:t>
-            </a:r>
-          </a:p>
-        </p:txBody>
-      </p:sp>
-    </p:spTree>
-  </p:cSld>
-  <p:clrMapOvr>
-    <a:masterClrMapping/>
-  </p:clrMapOvr>
-</p:sld>
-</file>
-
-<file path=ppt/slides/slide7.xml><?xml version="1.0" encoding="utf-8"?>
-<p:sld xmlns:a="http://schemas.openxmlformats.org/drawingml/2006/main" xmlns:p="http://schemas.openxmlformats.org/presentationml/2006/main" xmlns:r="http://schemas.openxmlformats.org/officeDocument/2006/relationships">
-  <p:cSld>
-    <p:bg>
-      <p:bgPr>
-        <a:solidFill>
-          <a:srgbClr val="FFFFFF"/>
-        </a:solidFill>
-        <a:effectLst/>
-      </p:bgPr>
-    </p:bg>
-    <p:spTree>
-      <p:nvGrpSpPr>
-        <p:cNvPr id="1" name=""/>
-        <p:cNvGrpSpPr/>
-        <p:nvPr/>
-      </p:nvGrpSpPr>
-      <p:grpSpPr/>
-      <p:sp>
-        <p:nvSpPr>
-          <p:cNvPr id="2" name="TextBox 1"/>
-          <p:cNvSpPr txBox="1"/>
-          <p:nvPr/>
-        </p:nvSpPr>
-        <p:spPr>
-          <a:xfrm>
-            <a:off x="548640" y="320040"/>
-            <a:ext cx="11094415" cy="274320"/>
-          </a:xfrm>
-          <a:prstGeom prst="rect">
-            <a:avLst/>
-          </a:prstGeom>
-          <a:noFill/>
-        </p:spPr>
-        <p:txBody>
-          <a:bodyPr wrap="square" anchor="t" lIns="0" rIns="0" tIns="0" bIns="0"/>
-          <a:lstStyle/>
-          <a:p>
-            <a:pPr algn="l"/>
-            <a:r>
-              <a:rPr sz="1100" b="1" i="0">
-                <a:solidFill>
-                  <a:srgbClr val="54595D"/>
-                </a:solidFill>
-                <a:latin typeface="Calibri"/>
-              </a:rPr>
-              <a:t>CORE COMPONENT  ·  Core Paper 2</a:t>
-            </a:r>
-          </a:p>
-        </p:txBody>
-      </p:sp>
-      <p:sp>
-        <p:nvSpPr>
-          <p:cNvPr id="3" name="TextBox 2"/>
-          <p:cNvSpPr txBox="1"/>
-          <p:nvPr/>
-        </p:nvSpPr>
-        <p:spPr>
-          <a:xfrm>
-            <a:off x="548640" y="566928"/>
-            <a:ext cx="11094415" cy="822960"/>
-          </a:xfrm>
-          <a:prstGeom prst="rect">
-            <a:avLst/>
-          </a:prstGeom>
-          <a:noFill/>
-        </p:spPr>
-        <p:txBody>
-          <a:bodyPr wrap="square" anchor="ctr" lIns="0" rIns="0" tIns="0" bIns="0"/>
-          <a:lstStyle/>
-          <a:p>
-            <a:pPr algn="l"/>
-            <a:r>
-              <a:rPr sz="3200" b="1" i="0">
-                <a:solidFill>
-                  <a:srgbClr val="03306E"/>
-                </a:solidFill>
-                <a:latin typeface="Cambria"/>
-              </a:rPr>
-              <a:t>Answers</a:t>
-            </a:r>
-          </a:p>
-        </p:txBody>
-      </p:sp>
-      <p:sp>
-        <p:nvSpPr>
-          <p:cNvPr id="4" name="TextBox 3"/>
-          <p:cNvSpPr txBox="1"/>
-          <p:nvPr/>
-        </p:nvSpPr>
-        <p:spPr>
-          <a:xfrm>
-            <a:off x="548640" y="6446520"/>
-            <a:ext cx="8229600" cy="274320"/>
-          </a:xfrm>
-          <a:prstGeom prst="rect">
-            <a:avLst/>
-          </a:prstGeom>
-          <a:noFill/>
-        </p:spPr>
-        <p:txBody>
-          <a:bodyPr wrap="square" anchor="t" lIns="0" rIns="0" tIns="0" bIns="0"/>
-          <a:lstStyle/>
-          <a:p>
-            <a:pPr algn="l"/>
-            <a:r>
-              <a:rPr sz="1000" b="0" i="0">
-                <a:solidFill>
-                  <a:srgbClr val="54595D"/>
-                </a:solidFill>
-                <a:latin typeface="Calibri"/>
-              </a:rPr>
-              <a:t>Digital Software Development T Level  ·  Virtual, Cloud and Resilient Environments</a:t>
-            </a:r>
-          </a:p>
-        </p:txBody>
-      </p:sp>
-      <p:sp>
-        <p:nvSpPr>
-          <p:cNvPr id="5" name="TextBox 4"/>
-          <p:cNvSpPr txBox="1"/>
-          <p:nvPr/>
-        </p:nvSpPr>
-        <p:spPr>
-          <a:xfrm>
-            <a:off x="10728655" y="6446520"/>
-            <a:ext cx="914400" cy="274320"/>
-          </a:xfrm>
-          <a:prstGeom prst="rect">
-            <a:avLst/>
-          </a:prstGeom>
-          <a:noFill/>
-        </p:spPr>
-        <p:txBody>
-          <a:bodyPr wrap="square" anchor="t" lIns="0" rIns="0" tIns="0" bIns="0"/>
-          <a:lstStyle/>
-          <a:p>
-            <a:pPr algn="r"/>
-            <a:r>
-              <a:rPr sz="1000" b="0" i="0">
-                <a:solidFill>
-                  <a:srgbClr val="54595D"/>
-                </a:solidFill>
-                <a:latin typeface="Calibri"/>
-              </a:rPr>
-              <a:t>7</a:t>
-            </a:r>
-          </a:p>
-        </p:txBody>
-      </p:sp>
-      <p:sp>
-        <p:nvSpPr>
-          <p:cNvPr id="6" name="Oval 5"/>
-          <p:cNvSpPr/>
-          <p:nvPr/>
-        </p:nvSpPr>
-        <p:spPr>
-          <a:xfrm>
-            <a:off x="548640" y="1618488"/>
-            <a:ext cx="411480" cy="411480"/>
-          </a:xfrm>
-          <a:prstGeom prst="ellipse">
-            <a:avLst/>
-          </a:prstGeom>
-          <a:solidFill>
-            <a:srgbClr val="F2B705"/>
-          </a:solidFill>
-          <a:ln>
-            <a:noFill/>
-          </a:ln>
-          <a:effectLst/>
-        </p:spPr>
-        <p:style>
-          <a:lnRef idx="1">
-            <a:schemeClr val="accent1"/>
-          </a:lnRef>
-          <a:fillRef idx="3">
-            <a:schemeClr val="accent1"/>
-          </a:fillRef>
-          <a:effectRef idx="2">
-            <a:schemeClr val="accent1"/>
-          </a:effectRef>
-          <a:fontRef idx="minor">
-            <a:schemeClr val="lt1"/>
-          </a:fontRef>
-        </p:style>
-        <p:txBody>
-          <a:bodyPr rtlCol="0" anchor="ctr" lIns="0" rIns="0" tIns="0" bIns="0"/>
-          <a:lstStyle/>
-          <a:p>
-            <a:pPr algn="ctr"/>
-            <a:r>
-              <a:rPr sz="1400" b="1">
-                <a:solidFill>
-                  <a:srgbClr val="202122"/>
-                </a:solidFill>
-                <a:latin typeface="Calibri"/>
-              </a:rPr>
-              <a:t>1</a:t>
-            </a:r>
-          </a:p>
-        </p:txBody>
-      </p:sp>
-      <p:sp>
-        <p:nvSpPr>
-          <p:cNvPr id="7" name="TextBox 6"/>
-          <p:cNvSpPr txBox="1"/>
-          <p:nvPr/>
-        </p:nvSpPr>
-        <p:spPr>
-          <a:xfrm>
-            <a:off x="1234440" y="1600200"/>
-            <a:ext cx="10408615" cy="1030986"/>
-          </a:xfrm>
-          <a:prstGeom prst="rect">
-            <a:avLst/>
-          </a:prstGeom>
-          <a:noFill/>
-        </p:spPr>
-        <p:txBody>
-          <a:bodyPr wrap="square" anchor="t" lIns="0" rIns="0" tIns="0" bIns="0"/>
-          <a:lstStyle/>
-          <a:p>
-            <a:pPr algn="l"/>
-            <a:r>
-              <a:rPr sz="1800" b="0" i="0">
-                <a:solidFill>
-                  <a:srgbClr val="54595D"/>
-                </a:solidFill>
-                <a:latin typeface="Calibri"/>
-              </a:rPr>
-              <a:t>Which hypervisor type runs directly on hardware?</a:t>
-            </a:r>
-          </a:p>
-          <a:p>
-            <a:r>
-              <a:rPr sz="1800" b="1">
-                <a:solidFill>
-                  <a:srgbClr val="03306E"/>
-                </a:solidFill>
-                <a:latin typeface="Calibri"/>
-              </a:rPr>
-              <a:t>Type 1.</a:t>
-            </a:r>
-          </a:p>
-        </p:txBody>
-      </p:sp>
-      <p:sp>
-        <p:nvSpPr>
-          <p:cNvPr id="8" name="Oval 7"/>
-          <p:cNvSpPr/>
-          <p:nvPr/>
-        </p:nvSpPr>
-        <p:spPr>
-          <a:xfrm>
-            <a:off x="548640" y="2814066"/>
-            <a:ext cx="411480" cy="411480"/>
-          </a:xfrm>
-          <a:prstGeom prst="ellipse">
-            <a:avLst/>
-          </a:prstGeom>
-          <a:solidFill>
-            <a:srgbClr val="F2B705"/>
-          </a:solidFill>
-          <a:ln>
-            <a:noFill/>
-          </a:ln>
-          <a:effectLst/>
-        </p:spPr>
-        <p:style>
-          <a:lnRef idx="1">
-            <a:schemeClr val="accent1"/>
-          </a:lnRef>
-          <a:fillRef idx="3">
-            <a:schemeClr val="accent1"/>
-          </a:fillRef>
-          <a:effectRef idx="2">
-            <a:schemeClr val="accent1"/>
-          </a:effectRef>
-          <a:fontRef idx="minor">
-            <a:schemeClr val="lt1"/>
-          </a:fontRef>
-        </p:style>
-        <p:txBody>
-          <a:bodyPr rtlCol="0" anchor="ctr" lIns="0" rIns="0" tIns="0" bIns="0"/>
-          <a:lstStyle/>
-          <a:p>
-            <a:pPr algn="ctr"/>
-            <a:r>
-              <a:rPr sz="1400" b="1">
-                <a:solidFill>
-                  <a:srgbClr val="202122"/>
-                </a:solidFill>
-                <a:latin typeface="Calibri"/>
-              </a:rPr>
-              <a:t>2</a:t>
-            </a:r>
-          </a:p>
-        </p:txBody>
-      </p:sp>
-      <p:sp>
-        <p:nvSpPr>
-          <p:cNvPr id="9" name="TextBox 8"/>
-          <p:cNvSpPr txBox="1"/>
-          <p:nvPr/>
-        </p:nvSpPr>
-        <p:spPr>
-          <a:xfrm>
-            <a:off x="1234440" y="2795778"/>
-            <a:ext cx="10408615" cy="1030986"/>
-          </a:xfrm>
-          <a:prstGeom prst="rect">
-            <a:avLst/>
-          </a:prstGeom>
-          <a:noFill/>
-        </p:spPr>
-        <p:txBody>
-          <a:bodyPr wrap="square" anchor="t" lIns="0" rIns="0" tIns="0" bIns="0"/>
-          <a:lstStyle/>
-          <a:p>
-            <a:pPr algn="l"/>
-            <a:r>
-              <a:rPr sz="1800" b="0" i="0">
-                <a:solidFill>
-                  <a:srgbClr val="54595D"/>
-                </a:solidFill>
-                <a:latin typeface="Calibri"/>
-              </a:rPr>
-              <a:t>In PaaS, who manages the operating system?</a:t>
-            </a:r>
-          </a:p>
-          <a:p>
-            <a:r>
-              <a:rPr sz="1800" b="1">
-                <a:solidFill>
-                  <a:srgbClr val="03306E"/>
-                </a:solidFill>
-                <a:latin typeface="Calibri"/>
-              </a:rPr>
-              <a:t>The provider.</a:t>
-            </a:r>
-          </a:p>
-        </p:txBody>
-      </p:sp>
-      <p:sp>
-        <p:nvSpPr>
-          <p:cNvPr id="10" name="Oval 9"/>
-          <p:cNvSpPr/>
-          <p:nvPr/>
-        </p:nvSpPr>
-        <p:spPr>
-          <a:xfrm>
-            <a:off x="548640" y="4009644"/>
-            <a:ext cx="411480" cy="411480"/>
-          </a:xfrm>
-          <a:prstGeom prst="ellipse">
-            <a:avLst/>
-          </a:prstGeom>
-          <a:solidFill>
-            <a:srgbClr val="F2B705"/>
-          </a:solidFill>
-          <a:ln>
-            <a:noFill/>
-          </a:ln>
-          <a:effectLst/>
-        </p:spPr>
-        <p:style>
-          <a:lnRef idx="1">
-            <a:schemeClr val="accent1"/>
-          </a:lnRef>
-          <a:fillRef idx="3">
-            <a:schemeClr val="accent1"/>
-          </a:fillRef>
-          <a:effectRef idx="2">
-            <a:schemeClr val="accent1"/>
-          </a:effectRef>
-          <a:fontRef idx="minor">
-            <a:schemeClr val="lt1"/>
-          </a:fontRef>
-        </p:style>
-        <p:txBody>
-          <a:bodyPr rtlCol="0" anchor="ctr" lIns="0" rIns="0" tIns="0" bIns="0"/>
-          <a:lstStyle/>
-          <a:p>
-            <a:pPr algn="ctr"/>
-            <a:r>
-              <a:rPr sz="1400" b="1">
-                <a:solidFill>
-                  <a:srgbClr val="202122"/>
-                </a:solidFill>
-                <a:latin typeface="Calibri"/>
-              </a:rPr>
-              <a:t>3</a:t>
-            </a:r>
-          </a:p>
-        </p:txBody>
-      </p:sp>
-      <p:sp>
-        <p:nvSpPr>
-          <p:cNvPr id="11" name="TextBox 10"/>
-          <p:cNvSpPr txBox="1"/>
-          <p:nvPr/>
-        </p:nvSpPr>
-        <p:spPr>
-          <a:xfrm>
-            <a:off x="1234440" y="3991356"/>
-            <a:ext cx="10408615" cy="1030986"/>
-          </a:xfrm>
-          <a:prstGeom prst="rect">
-            <a:avLst/>
-          </a:prstGeom>
-          <a:noFill/>
-        </p:spPr>
-        <p:txBody>
-          <a:bodyPr wrap="square" anchor="t" lIns="0" rIns="0" tIns="0" bIns="0"/>
-          <a:lstStyle/>
-          <a:p>
-            <a:pPr algn="l"/>
-            <a:r>
-              <a:rPr sz="1800" b="0" i="0">
-                <a:solidFill>
-                  <a:srgbClr val="54595D"/>
-                </a:solidFill>
-                <a:latin typeface="Calibri"/>
-              </a:rPr>
-              <a:t>Give one drawback of virtualisation.</a:t>
-            </a:r>
-          </a:p>
-          <a:p>
-            <a:r>
-              <a:rPr sz="1800" b="1">
-                <a:solidFill>
-                  <a:srgbClr val="03306E"/>
-                </a:solidFill>
-                <a:latin typeface="Calibri"/>
-              </a:rPr>
-              <a:t>Extra hardware load or slower execution.</a:t>
-            </a:r>
-          </a:p>
-        </p:txBody>
-      </p:sp>
-      <p:sp>
-        <p:nvSpPr>
-          <p:cNvPr id="12" name="Oval 11"/>
-          <p:cNvSpPr/>
-          <p:nvPr/>
-        </p:nvSpPr>
-        <p:spPr>
-          <a:xfrm>
-            <a:off x="548640" y="5205221"/>
-            <a:ext cx="411480" cy="411480"/>
-          </a:xfrm>
-          <a:prstGeom prst="ellipse">
-            <a:avLst/>
-          </a:prstGeom>
-          <a:solidFill>
-            <a:srgbClr val="F2B705"/>
-          </a:solidFill>
-          <a:ln>
-            <a:noFill/>
-          </a:ln>
-          <a:effectLst/>
-        </p:spPr>
-        <p:style>
-          <a:lnRef idx="1">
-            <a:schemeClr val="accent1"/>
-          </a:lnRef>
-          <a:fillRef idx="3">
-            <a:schemeClr val="accent1"/>
-          </a:fillRef>
-          <a:effectRef idx="2">
-            <a:schemeClr val="accent1"/>
-          </a:effectRef>
-          <a:fontRef idx="minor">
-            <a:schemeClr val="lt1"/>
-          </a:fontRef>
-        </p:style>
-        <p:txBody>
-          <a:bodyPr rtlCol="0" anchor="ctr" lIns="0" rIns="0" tIns="0" bIns="0"/>
-          <a:lstStyle/>
-          <a:p>
-            <a:pPr algn="ctr"/>
-            <a:r>
-              <a:rPr sz="1400" b="1">
-                <a:solidFill>
-                  <a:srgbClr val="202122"/>
-                </a:solidFill>
-                <a:latin typeface="Calibri"/>
-              </a:rPr>
-              <a:t>4</a:t>
-            </a:r>
-          </a:p>
-        </p:txBody>
-      </p:sp>
-      <p:sp>
-        <p:nvSpPr>
-          <p:cNvPr id="13" name="TextBox 12"/>
-          <p:cNvSpPr txBox="1"/>
-          <p:nvPr/>
-        </p:nvSpPr>
-        <p:spPr>
-          <a:xfrm>
-            <a:off x="1234440" y="5186933"/>
-            <a:ext cx="10408615" cy="1030986"/>
-          </a:xfrm>
-          <a:prstGeom prst="rect">
-            <a:avLst/>
-          </a:prstGeom>
-          <a:noFill/>
-        </p:spPr>
-        <p:txBody>
-          <a:bodyPr wrap="square" anchor="t" lIns="0" rIns="0" tIns="0" bIns="0"/>
-          <a:lstStyle/>
-          <a:p>
-            <a:pPr algn="l"/>
-            <a:r>
-              <a:rPr sz="1800" b="0" i="0">
-                <a:solidFill>
-                  <a:srgbClr val="54595D"/>
-                </a:solidFill>
-                <a:latin typeface="Calibri"/>
-              </a:rPr>
-              <a:t>What is a hot site?</a:t>
-            </a:r>
-          </a:p>
-          <a:p>
-            <a:r>
-              <a:rPr sz="1800" b="1">
-                <a:solidFill>
-                  <a:srgbClr val="03306E"/>
-                </a:solidFill>
-                <a:latin typeface="Calibri"/>
-              </a:rPr>
-              <a:t>A fully equipped backup site ready to take over almost immediately.</a:t>
-            </a:r>
-          </a:p>
-        </p:txBody>
-      </p:sp>
-    </p:spTree>
-  </p:cSld>
-  <p:clrMapOvr>
-    <a:masterClrMapping/>
-  </p:clrMapOvr>
-</p:sld>
-</file>
-
 <file path=ppt/slides/slide8.xml><?xml version="1.0" encoding="utf-8"?>
 <p:sld xmlns:a="http://schemas.openxmlformats.org/drawingml/2006/main" xmlns:p="http://schemas.openxmlformats.org/presentationml/2006/main" xmlns:r="http://schemas.openxmlformats.org/officeDocument/2006/relationships">
   <p:cSld>
@@ -7907,7 +11203,7 @@
                 </a:solidFill>
                 <a:latin typeface="Cambria"/>
               </a:rPr>
-              <a:t>Activity: Deploy decision</a:t>
+              <a:t>Quick check: Cloud delivery models</a:t>
             </a:r>
           </a:p>
         </p:txBody>
@@ -7980,19 +11276,17 @@
       </p:sp>
       <p:sp>
         <p:nvSpPr>
-          <p:cNvPr id="6" name="Rounded Rectangle 5"/>
+          <p:cNvPr id="6" name="Oval 5"/>
           <p:cNvSpPr/>
           <p:nvPr/>
         </p:nvSpPr>
         <p:spPr>
           <a:xfrm>
-            <a:off x="548640" y="1508760"/>
-            <a:ext cx="2011680" cy="457200"/>
-          </a:xfrm>
-          <a:prstGeom prst="roundRect">
-            <a:avLst>
-              <a:gd name="adj" fmla="val 50000"/>
-            </a:avLst>
+            <a:off x="548640" y="1691640"/>
+            <a:ext cx="502920" cy="502920"/>
+          </a:xfrm>
+          <a:prstGeom prst="ellipse">
+            <a:avLst/>
           </a:prstGeom>
           <a:solidFill>
             <a:srgbClr val="F2B705"/>
@@ -8017,9 +11311,20 @@
           </a:fontRef>
         </p:style>
         <p:txBody>
-          <a:bodyPr rtlCol="0" anchor="ctr"/>
-          <a:lstStyle/>
-          <a:p/>
+          <a:bodyPr rtlCol="0" anchor="ctr" lIns="0" rIns="0" tIns="0" bIns="0"/>
+          <a:lstStyle/>
+          <a:p>
+            <a:pPr algn="ctr"/>
+            <a:r>
+              <a:rPr sz="1600" b="1">
+                <a:solidFill>
+                  <a:srgbClr val="202122"/>
+                </a:solidFill>
+                <a:latin typeface="Calibri"/>
+              </a:rPr>
+              <a:t>1</a:t>
+            </a:r>
+          </a:p>
         </p:txBody>
       </p:sp>
       <p:sp>
@@ -8030,80 +11335,47 @@
         </p:nvSpPr>
         <p:spPr>
           <a:xfrm>
-            <a:off x="548640" y="1508760"/>
-            <a:ext cx="2011680" cy="457200"/>
-          </a:xfrm>
-          <a:prstGeom prst="rect">
-            <a:avLst/>
-          </a:prstGeom>
-          <a:noFill/>
-        </p:spPr>
-        <p:txBody>
-          <a:bodyPr wrap="square" anchor="ctr" lIns="0" rIns="0" tIns="0" bIns="0"/>
-          <a:lstStyle/>
-          <a:p>
-            <a:pPr algn="ctr"/>
-            <a:r>
-              <a:rPr sz="1400" b="1" i="0">
+            <a:off x="1371600" y="1645920"/>
+            <a:ext cx="10271455" cy="1188720"/>
+          </a:xfrm>
+          <a:prstGeom prst="rect">
+            <a:avLst/>
+          </a:prstGeom>
+          <a:noFill/>
+        </p:spPr>
+        <p:txBody>
+          <a:bodyPr wrap="square" anchor="t" lIns="0" rIns="0" tIns="0" bIns="0"/>
+          <a:lstStyle/>
+          <a:p>
+            <a:pPr algn="l"/>
+            <a:r>
+              <a:rPr sz="2400" b="0" i="0">
                 <a:solidFill>
                   <a:srgbClr val="202122"/>
                 </a:solidFill>
                 <a:latin typeface="Calibri"/>
               </a:rPr>
-              <a:t>20 minutes</a:t>
-            </a:r>
-          </a:p>
-        </p:txBody>
-      </p:sp>
-      <p:sp>
-        <p:nvSpPr>
-          <p:cNvPr id="8" name="TextBox 7"/>
-          <p:cNvSpPr txBox="1"/>
-          <p:nvPr/>
-        </p:nvSpPr>
-        <p:spPr>
-          <a:xfrm>
-            <a:off x="2743200" y="1508760"/>
-            <a:ext cx="4754880" cy="457200"/>
-          </a:xfrm>
-          <a:prstGeom prst="rect">
-            <a:avLst/>
-          </a:prstGeom>
-          <a:noFill/>
-        </p:spPr>
-        <p:txBody>
-          <a:bodyPr wrap="square" anchor="ctr" lIns="0" rIns="0" tIns="0" bIns="0"/>
-          <a:lstStyle/>
-          <a:p>
-            <a:pPr algn="l"/>
-            <a:r>
-              <a:rPr sz="1400" b="0" i="1">
-                <a:solidFill>
-                  <a:srgbClr val="54595D"/>
-                </a:solidFill>
-                <a:latin typeface="Calibri"/>
-              </a:rPr>
-              <a:t>Pairs</a:t>
-            </a:r>
-          </a:p>
-        </p:txBody>
-      </p:sp>
-      <p:sp>
-        <p:nvSpPr>
-          <p:cNvPr id="9" name="Oval 8"/>
+              <a:t>Which model suits a developer who just wants to deploy code?</a:t>
+            </a:r>
+          </a:p>
+        </p:txBody>
+      </p:sp>
+      <p:sp>
+        <p:nvSpPr>
+          <p:cNvPr id="8" name="Oval 7"/>
           <p:cNvSpPr/>
           <p:nvPr/>
         </p:nvSpPr>
         <p:spPr>
           <a:xfrm>
-            <a:off x="548640" y="2482596"/>
-            <a:ext cx="384048" cy="384048"/>
+            <a:off x="548640" y="3108960"/>
+            <a:ext cx="502920" cy="502920"/>
           </a:xfrm>
           <a:prstGeom prst="ellipse">
             <a:avLst/>
           </a:prstGeom>
           <a:solidFill>
-            <a:srgbClr val="0645AD"/>
+            <a:srgbClr val="F2B705"/>
           </a:solidFill>
           <a:ln>
             <a:noFill/>
@@ -8130,66 +11402,66 @@
           <a:p>
             <a:pPr algn="ctr"/>
             <a:r>
-              <a:rPr sz="1300" b="1">
-                <a:solidFill>
-                  <a:srgbClr val="FFFFFF"/>
-                </a:solidFill>
-                <a:latin typeface="Calibri"/>
-              </a:rPr>
-              <a:t>1</a:t>
-            </a:r>
-          </a:p>
-        </p:txBody>
-      </p:sp>
-      <p:sp>
-        <p:nvSpPr>
-          <p:cNvPr id="10" name="TextBox 9"/>
+              <a:rPr sz="1600" b="1">
+                <a:solidFill>
+                  <a:srgbClr val="202122"/>
+                </a:solidFill>
+                <a:latin typeface="Calibri"/>
+              </a:rPr>
+              <a:t>2</a:t>
+            </a:r>
+          </a:p>
+        </p:txBody>
+      </p:sp>
+      <p:sp>
+        <p:nvSpPr>
+          <p:cNvPr id="9" name="TextBox 8"/>
           <p:cNvSpPr txBox="1"/>
           <p:nvPr/>
         </p:nvSpPr>
         <p:spPr>
           <a:xfrm>
-            <a:off x="1143000" y="2240280"/>
-            <a:ext cx="5943600" cy="868680"/>
-          </a:xfrm>
-          <a:prstGeom prst="rect">
-            <a:avLst/>
-          </a:prstGeom>
-          <a:noFill/>
-        </p:spPr>
-        <p:txBody>
-          <a:bodyPr wrap="square" anchor="ctr" lIns="0" rIns="0" tIns="0" bIns="0"/>
+            <a:off x="1371600" y="3063240"/>
+            <a:ext cx="10271455" cy="1188720"/>
+          </a:xfrm>
+          <a:prstGeom prst="rect">
+            <a:avLst/>
+          </a:prstGeom>
+          <a:noFill/>
+        </p:spPr>
+        <p:txBody>
+          <a:bodyPr wrap="square" anchor="t" lIns="0" rIns="0" tIns="0" bIns="0"/>
           <a:lstStyle/>
           <a:p>
             <a:pPr algn="l"/>
             <a:r>
-              <a:rPr sz="1700" b="0" i="0">
+              <a:rPr sz="2400" b="0" i="0">
                 <a:solidFill>
                   <a:srgbClr val="202122"/>
                 </a:solidFill>
                 <a:latin typeface="Calibri"/>
               </a:rPr>
-              <a:t>You are deploying a web app for a small charity.</a:t>
-            </a:r>
-          </a:p>
-        </p:txBody>
-      </p:sp>
-      <p:sp>
-        <p:nvSpPr>
-          <p:cNvPr id="11" name="Oval 10"/>
+              <a:t>In IaaS, who manages the OS?</a:t>
+            </a:r>
+          </a:p>
+        </p:txBody>
+      </p:sp>
+      <p:sp>
+        <p:nvSpPr>
+          <p:cNvPr id="10" name="Oval 9"/>
           <p:cNvSpPr/>
           <p:nvPr/>
         </p:nvSpPr>
         <p:spPr>
           <a:xfrm>
-            <a:off x="548640" y="3461004"/>
-            <a:ext cx="384048" cy="384048"/>
+            <a:off x="548640" y="4526280"/>
+            <a:ext cx="502920" cy="502920"/>
           </a:xfrm>
           <a:prstGeom prst="ellipse">
             <a:avLst/>
           </a:prstGeom>
           <a:solidFill>
-            <a:srgbClr val="0645AD"/>
+            <a:srgbClr val="F2B705"/>
           </a:solidFill>
           <a:ln>
             <a:noFill/>
@@ -8216,13 +11488,46 @@
           <a:p>
             <a:pPr algn="ctr"/>
             <a:r>
-              <a:rPr sz="1300" b="1">
-                <a:solidFill>
-                  <a:srgbClr val="FFFFFF"/>
-                </a:solidFill>
-                <a:latin typeface="Calibri"/>
-              </a:rPr>
-              <a:t>2</a:t>
+              <a:rPr sz="1600" b="1">
+                <a:solidFill>
+                  <a:srgbClr val="202122"/>
+                </a:solidFill>
+                <a:latin typeface="Calibri"/>
+              </a:rPr>
+              <a:t>3</a:t>
+            </a:r>
+          </a:p>
+        </p:txBody>
+      </p:sp>
+      <p:sp>
+        <p:nvSpPr>
+          <p:cNvPr id="11" name="TextBox 10"/>
+          <p:cNvSpPr txBox="1"/>
+          <p:nvPr/>
+        </p:nvSpPr>
+        <p:spPr>
+          <a:xfrm>
+            <a:off x="1371600" y="4480560"/>
+            <a:ext cx="10271455" cy="1188720"/>
+          </a:xfrm>
+          <a:prstGeom prst="rect">
+            <a:avLst/>
+          </a:prstGeom>
+          <a:noFill/>
+        </p:spPr>
+        <p:txBody>
+          <a:bodyPr wrap="square" anchor="t" lIns="0" rIns="0" tIns="0" bIns="0"/>
+          <a:lstStyle/>
+          <a:p>
+            <a:pPr algn="l"/>
+            <a:r>
+              <a:rPr sz="2400" b="0" i="0">
+                <a:solidFill>
+                  <a:srgbClr val="202122"/>
+                </a:solidFill>
+                <a:latin typeface="Calibri"/>
+              </a:rPr>
+              <a:t>What is elasticity?</a:t>
             </a:r>
           </a:p>
         </p:txBody>
@@ -8235,362 +11540,27 @@
         </p:nvSpPr>
         <p:spPr>
           <a:xfrm>
-            <a:off x="1143000" y="3218688"/>
-            <a:ext cx="5943600" cy="868680"/>
-          </a:xfrm>
-          <a:prstGeom prst="rect">
-            <a:avLst/>
-          </a:prstGeom>
-          <a:noFill/>
-        </p:spPr>
-        <p:txBody>
-          <a:bodyPr wrap="square" anchor="ctr" lIns="0" rIns="0" tIns="0" bIns="0"/>
+            <a:off x="548640" y="5852160"/>
+            <a:ext cx="11094415" cy="365760"/>
+          </a:xfrm>
+          <a:prstGeom prst="rect">
+            <a:avLst/>
+          </a:prstGeom>
+          <a:noFill/>
+        </p:spPr>
+        <p:txBody>
+          <a:bodyPr wrap="square" anchor="t" lIns="0" rIns="0" tIns="0" bIns="0"/>
           <a:lstStyle/>
           <a:p>
             <a:pPr algn="l"/>
             <a:r>
-              <a:rPr sz="1700" b="0" i="0">
-                <a:solidFill>
-                  <a:srgbClr val="202122"/>
-                </a:solidFill>
-                <a:latin typeface="Calibri"/>
-              </a:rPr>
-              <a:t>Choose IaaS, PaaS or SaaS and justify it.</a:t>
-            </a:r>
-          </a:p>
-        </p:txBody>
-      </p:sp>
-      <p:sp>
-        <p:nvSpPr>
-          <p:cNvPr id="13" name="Oval 12"/>
-          <p:cNvSpPr/>
-          <p:nvPr/>
-        </p:nvSpPr>
-        <p:spPr>
-          <a:xfrm>
-            <a:off x="548640" y="4439412"/>
-            <a:ext cx="384048" cy="384048"/>
-          </a:xfrm>
-          <a:prstGeom prst="ellipse">
-            <a:avLst/>
-          </a:prstGeom>
-          <a:solidFill>
-            <a:srgbClr val="0645AD"/>
-          </a:solidFill>
-          <a:ln>
-            <a:noFill/>
-          </a:ln>
-          <a:effectLst/>
-        </p:spPr>
-        <p:style>
-          <a:lnRef idx="1">
-            <a:schemeClr val="accent1"/>
-          </a:lnRef>
-          <a:fillRef idx="3">
-            <a:schemeClr val="accent1"/>
-          </a:fillRef>
-          <a:effectRef idx="2">
-            <a:schemeClr val="accent1"/>
-          </a:effectRef>
-          <a:fontRef idx="minor">
-            <a:schemeClr val="lt1"/>
-          </a:fontRef>
-        </p:style>
-        <p:txBody>
-          <a:bodyPr rtlCol="0" anchor="ctr" lIns="0" rIns="0" tIns="0" bIns="0"/>
-          <a:lstStyle/>
-          <a:p>
-            <a:pPr algn="ctr"/>
-            <a:r>
-              <a:rPr sz="1300" b="1">
-                <a:solidFill>
-                  <a:srgbClr val="FFFFFF"/>
-                </a:solidFill>
-                <a:latin typeface="Calibri"/>
-              </a:rPr>
-              <a:t>3</a:t>
-            </a:r>
-          </a:p>
-        </p:txBody>
-      </p:sp>
-      <p:sp>
-        <p:nvSpPr>
-          <p:cNvPr id="14" name="TextBox 13"/>
-          <p:cNvSpPr txBox="1"/>
-          <p:nvPr/>
-        </p:nvSpPr>
-        <p:spPr>
-          <a:xfrm>
-            <a:off x="1143000" y="4197096"/>
-            <a:ext cx="5943600" cy="868680"/>
-          </a:xfrm>
-          <a:prstGeom prst="rect">
-            <a:avLst/>
-          </a:prstGeom>
-          <a:noFill/>
-        </p:spPr>
-        <p:txBody>
-          <a:bodyPr wrap="square" anchor="ctr" lIns="0" rIns="0" tIns="0" bIns="0"/>
-          <a:lstStyle/>
-          <a:p>
-            <a:pPr algn="l"/>
-            <a:r>
-              <a:rPr sz="1700" b="0" i="0">
-                <a:solidFill>
-                  <a:srgbClr val="202122"/>
-                </a:solidFill>
-                <a:latin typeface="Calibri"/>
-              </a:rPr>
-              <a:t>List what the charity still has to manage.</a:t>
-            </a:r>
-          </a:p>
-        </p:txBody>
-      </p:sp>
-      <p:sp>
-        <p:nvSpPr>
-          <p:cNvPr id="15" name="Oval 14"/>
-          <p:cNvSpPr/>
-          <p:nvPr/>
-        </p:nvSpPr>
-        <p:spPr>
-          <a:xfrm>
-            <a:off x="548640" y="5417820"/>
-            <a:ext cx="384048" cy="384048"/>
-          </a:xfrm>
-          <a:prstGeom prst="ellipse">
-            <a:avLst/>
-          </a:prstGeom>
-          <a:solidFill>
-            <a:srgbClr val="0645AD"/>
-          </a:solidFill>
-          <a:ln>
-            <a:noFill/>
-          </a:ln>
-          <a:effectLst/>
-        </p:spPr>
-        <p:style>
-          <a:lnRef idx="1">
-            <a:schemeClr val="accent1"/>
-          </a:lnRef>
-          <a:fillRef idx="3">
-            <a:schemeClr val="accent1"/>
-          </a:fillRef>
-          <a:effectRef idx="2">
-            <a:schemeClr val="accent1"/>
-          </a:effectRef>
-          <a:fontRef idx="minor">
-            <a:schemeClr val="lt1"/>
-          </a:fontRef>
-        </p:style>
-        <p:txBody>
-          <a:bodyPr rtlCol="0" anchor="ctr" lIns="0" rIns="0" tIns="0" bIns="0"/>
-          <a:lstStyle/>
-          <a:p>
-            <a:pPr algn="ctr"/>
-            <a:r>
-              <a:rPr sz="1300" b="1">
-                <a:solidFill>
-                  <a:srgbClr val="FFFFFF"/>
-                </a:solidFill>
-                <a:latin typeface="Calibri"/>
-              </a:rPr>
-              <a:t>4</a:t>
-            </a:r>
-          </a:p>
-        </p:txBody>
-      </p:sp>
-      <p:sp>
-        <p:nvSpPr>
-          <p:cNvPr id="16" name="TextBox 15"/>
-          <p:cNvSpPr txBox="1"/>
-          <p:nvPr/>
-        </p:nvSpPr>
-        <p:spPr>
-          <a:xfrm>
-            <a:off x="1143000" y="5175504"/>
-            <a:ext cx="5943600" cy="868680"/>
-          </a:xfrm>
-          <a:prstGeom prst="rect">
-            <a:avLst/>
-          </a:prstGeom>
-          <a:noFill/>
-        </p:spPr>
-        <p:txBody>
-          <a:bodyPr wrap="square" anchor="ctr" lIns="0" rIns="0" tIns="0" bIns="0"/>
-          <a:lstStyle/>
-          <a:p>
-            <a:pPr algn="l"/>
-            <a:r>
-              <a:rPr sz="1700" b="0" i="0">
-                <a:solidFill>
-                  <a:srgbClr val="202122"/>
-                </a:solidFill>
-                <a:latin typeface="Calibri"/>
-              </a:rPr>
-              <a:t>Add three resilience measures.</a:t>
-            </a:r>
-          </a:p>
-        </p:txBody>
-      </p:sp>
-      <p:sp>
-        <p:nvSpPr>
-          <p:cNvPr id="17" name="Rounded Rectangle 16"/>
-          <p:cNvSpPr/>
-          <p:nvPr/>
-        </p:nvSpPr>
-        <p:spPr>
-          <a:xfrm>
-            <a:off x="7772400" y="1508760"/>
-            <a:ext cx="3867912" cy="4572000"/>
-          </a:xfrm>
-          <a:prstGeom prst="roundRect">
-            <a:avLst>
-              <a:gd name="adj" fmla="val 8000"/>
-            </a:avLst>
-          </a:prstGeom>
-          <a:solidFill>
-            <a:srgbClr val="EAF3FF"/>
-          </a:solidFill>
-          <a:ln>
-            <a:noFill/>
-          </a:ln>
-          <a:effectLst/>
-        </p:spPr>
-        <p:style>
-          <a:lnRef idx="1">
-            <a:schemeClr val="accent1"/>
-          </a:lnRef>
-          <a:fillRef idx="3">
-            <a:schemeClr val="accent1"/>
-          </a:fillRef>
-          <a:effectRef idx="2">
-            <a:schemeClr val="accent1"/>
-          </a:effectRef>
-          <a:fontRef idx="minor">
-            <a:schemeClr val="lt1"/>
-          </a:fontRef>
-        </p:style>
-        <p:txBody>
-          <a:bodyPr rtlCol="0" anchor="ctr"/>
-          <a:lstStyle/>
-          <a:p/>
-        </p:txBody>
-      </p:sp>
-      <p:sp>
-        <p:nvSpPr>
-          <p:cNvPr id="18" name="TextBox 17"/>
-          <p:cNvSpPr txBox="1"/>
-          <p:nvPr/>
-        </p:nvSpPr>
-        <p:spPr>
-          <a:xfrm>
-            <a:off x="8046720" y="1737360"/>
-            <a:ext cx="3291840" cy="365760"/>
-          </a:xfrm>
-          <a:prstGeom prst="rect">
-            <a:avLst/>
-          </a:prstGeom>
-          <a:noFill/>
-        </p:spPr>
-        <p:txBody>
-          <a:bodyPr wrap="square" anchor="t" lIns="0" rIns="0" tIns="0" bIns="0"/>
-          <a:lstStyle/>
-          <a:p>
-            <a:pPr algn="l"/>
-            <a:r>
-              <a:rPr sz="1300" b="1" i="0">
-                <a:solidFill>
-                  <a:srgbClr val="0645AD"/>
-                </a:solidFill>
-                <a:latin typeface="Calibri"/>
-              </a:rPr>
-              <a:t>SUCCESS CRITERIA</a:t>
-            </a:r>
-          </a:p>
-        </p:txBody>
-      </p:sp>
-      <p:sp>
-        <p:nvSpPr>
-          <p:cNvPr id="19" name="TextBox 18"/>
-          <p:cNvSpPr txBox="1"/>
-          <p:nvPr/>
-        </p:nvSpPr>
-        <p:spPr>
-          <a:xfrm>
-            <a:off x="8046720" y="2240280"/>
-            <a:ext cx="3337560" cy="3657600"/>
-          </a:xfrm>
-          <a:prstGeom prst="rect">
-            <a:avLst/>
-          </a:prstGeom>
-          <a:noFill/>
-        </p:spPr>
-        <p:txBody>
-          <a:bodyPr wrap="square" lIns="0" rIns="0" tIns="0" bIns="0">
-            <a:spAutoFit/>
-          </a:bodyPr>
-          <a:lstStyle/>
-          <a:p>
-            <a:pPr marL="274320" indent="-274320">
-              <a:spcAft>
-                <a:spcPts val="810"/>
-              </a:spcAft>
-              <a:buClr>
-                <a:srgbClr val="0645AD"/>
-              </a:buClr>
-              <a:buFont typeface="Arial"/>
-              <a:buChar char="•"/>
-            </a:pPr>
-            <a:r>
-              <a:rPr sz="1800" b="0">
-                <a:solidFill>
-                  <a:srgbClr val="202122"/>
-                </a:solidFill>
-                <a:latin typeface="Calibri"/>
-              </a:rPr>
-              <a:t>Model matches the charity's skills</a:t>
-            </a:r>
-          </a:p>
-          <a:p>
-            <a:pPr marL="274320" indent="-274320">
-              <a:spcAft>
-                <a:spcPts val="810"/>
-              </a:spcAft>
-              <a:buClr>
-                <a:srgbClr val="0645AD"/>
-              </a:buClr>
-              <a:buFont typeface="Arial"/>
-              <a:buChar char="•"/>
-            </a:pPr>
-            <a:r>
-              <a:rPr sz="1800" b="0">
-                <a:solidFill>
-                  <a:srgbClr val="202122"/>
-                </a:solidFill>
-                <a:latin typeface="Calibri"/>
-              </a:rPr>
-              <a:t>Responsibilities correct</a:t>
-            </a:r>
-          </a:p>
-          <a:p>
-            <a:pPr marL="274320" indent="-274320">
-              <a:spcAft>
-                <a:spcPts val="810"/>
-              </a:spcAft>
-              <a:buClr>
-                <a:srgbClr val="0645AD"/>
-              </a:buClr>
-              <a:buFont typeface="Arial"/>
-              <a:buChar char="•"/>
-            </a:pPr>
-            <a:r>
-              <a:rPr sz="1800" b="0">
-                <a:solidFill>
-                  <a:srgbClr val="202122"/>
-                </a:solidFill>
-                <a:latin typeface="Calibri"/>
-              </a:rPr>
-              <a:t>Resilience measures realistic</a:t>
+              <a:rPr sz="1300" b="0" i="1">
+                <a:solidFill>
+                  <a:srgbClr val="54595D"/>
+                </a:solidFill>
+                <a:latin typeface="Calibri"/>
+              </a:rPr>
+              <a:t>Answer on mini whiteboards or in your book. Answers are in the speaker notes.</a:t>
             </a:r>
           </a:p>
         </p:txBody>
@@ -8609,7 +11579,7 @@
     <p:bg>
       <p:bgPr>
         <a:solidFill>
-          <a:srgbClr val="03306E"/>
+          <a:srgbClr val="FFFFFF"/>
         </a:solidFill>
         <a:effectLst/>
       </p:bgPr>
@@ -8645,7 +11615,7 @@
             <a:r>
               <a:rPr sz="1100" b="1" i="0">
                 <a:solidFill>
-                  <a:srgbClr val="A9C8F0"/>
+                  <a:srgbClr val="54595D"/>
                 </a:solidFill>
                 <a:latin typeface="Calibri"/>
               </a:rPr>
@@ -8678,25 +11648,190 @@
             <a:r>
               <a:rPr sz="3200" b="1" i="0">
                 <a:solidFill>
-                  <a:srgbClr val="FFFFFF"/>
+                  <a:srgbClr val="03306E"/>
                 </a:solidFill>
                 <a:latin typeface="Cambria"/>
               </a:rPr>
-              <a:t>Exit ticket</a:t>
-            </a:r>
-          </a:p>
-        </p:txBody>
-      </p:sp>
-      <p:sp>
-        <p:nvSpPr>
-          <p:cNvPr id="4" name="Oval 3"/>
+              <a:t>Making environments resilient</a:t>
+            </a:r>
+          </a:p>
+        </p:txBody>
+      </p:sp>
+      <p:sp>
+        <p:nvSpPr>
+          <p:cNvPr id="4" name="TextBox 3"/>
+          <p:cNvSpPr txBox="1"/>
+          <p:nvPr/>
+        </p:nvSpPr>
+        <p:spPr>
+          <a:xfrm>
+            <a:off x="548640" y="6446520"/>
+            <a:ext cx="8229600" cy="274320"/>
+          </a:xfrm>
+          <a:prstGeom prst="rect">
+            <a:avLst/>
+          </a:prstGeom>
+          <a:noFill/>
+        </p:spPr>
+        <p:txBody>
+          <a:bodyPr wrap="square" anchor="t" lIns="0" rIns="0" tIns="0" bIns="0"/>
+          <a:lstStyle/>
+          <a:p>
+            <a:pPr algn="l"/>
+            <a:r>
+              <a:rPr sz="1000" b="0" i="0">
+                <a:solidFill>
+                  <a:srgbClr val="54595D"/>
+                </a:solidFill>
+                <a:latin typeface="Calibri"/>
+              </a:rPr>
+              <a:t>Digital Software Development T Level  ·  Virtual, Cloud and Resilient Environments</a:t>
+            </a:r>
+          </a:p>
+        </p:txBody>
+      </p:sp>
+      <p:sp>
+        <p:nvSpPr>
+          <p:cNvPr id="5" name="TextBox 4"/>
+          <p:cNvSpPr txBox="1"/>
+          <p:nvPr/>
+        </p:nvSpPr>
+        <p:spPr>
+          <a:xfrm>
+            <a:off x="10728655" y="6446520"/>
+            <a:ext cx="914400" cy="274320"/>
+          </a:xfrm>
+          <a:prstGeom prst="rect">
+            <a:avLst/>
+          </a:prstGeom>
+          <a:noFill/>
+        </p:spPr>
+        <p:txBody>
+          <a:bodyPr wrap="square" anchor="t" lIns="0" rIns="0" tIns="0" bIns="0"/>
+          <a:lstStyle/>
+          <a:p>
+            <a:pPr algn="r"/>
+            <a:r>
+              <a:rPr sz="1000" b="0" i="0">
+                <a:solidFill>
+                  <a:srgbClr val="54595D"/>
+                </a:solidFill>
+                <a:latin typeface="Calibri"/>
+              </a:rPr>
+              <a:t>9</a:t>
+            </a:r>
+          </a:p>
+        </p:txBody>
+      </p:sp>
+      <p:sp>
+        <p:nvSpPr>
+          <p:cNvPr id="6" name="TextBox 5"/>
+          <p:cNvSpPr txBox="1"/>
+          <p:nvPr/>
+        </p:nvSpPr>
+        <p:spPr>
+          <a:xfrm>
+            <a:off x="548640" y="1554480"/>
+            <a:ext cx="6720840" cy="4617720"/>
+          </a:xfrm>
+          <a:prstGeom prst="rect">
+            <a:avLst/>
+          </a:prstGeom>
+          <a:noFill/>
+        </p:spPr>
+        <p:txBody>
+          <a:bodyPr wrap="square" lIns="0" rIns="0" tIns="0" bIns="0">
+            <a:spAutoFit/>
+          </a:bodyPr>
+          <a:lstStyle/>
+          <a:p>
+            <a:pPr>
+              <a:spcAft>
+                <a:spcPts val="1320"/>
+              </a:spcAft>
+            </a:pPr>
+            <a:r>
+              <a:rPr sz="2200" b="0">
+                <a:solidFill>
+                  <a:srgbClr val="202122"/>
+                </a:solidFill>
+                <a:latin typeface="Calibri"/>
+              </a:rPr>
+              <a:t>Resilient systems keep working, or recover fast, when things go wrong. They're more secure, protect reputation and cut downtime.</a:t>
+            </a:r>
+          </a:p>
+          <a:p>
+            <a:pPr>
+              <a:spcAft>
+                <a:spcPts val="1320"/>
+              </a:spcAft>
+            </a:pPr>
+            <a:r>
+              <a:rPr sz="2200" b="0">
+                <a:solidFill>
+                  <a:srgbClr val="202122"/>
+                </a:solidFill>
+                <a:latin typeface="Calibri"/>
+              </a:rPr>
+              <a:t>Methods include patching software, replacing hardware on a plan, redundant systems and data, hardening devices, backups (onsite, offsite and cloud) with tested recovery, hot, warm or cold standby sites, and standard procedures with trained staff.</a:t>
+            </a:r>
+          </a:p>
+        </p:txBody>
+      </p:sp>
+      <p:sp>
+        <p:nvSpPr>
+          <p:cNvPr id="7" name="Rounded Rectangle 6"/>
           <p:cNvSpPr/>
           <p:nvPr/>
         </p:nvSpPr>
         <p:spPr>
           <a:xfrm>
-            <a:off x="548640" y="1737360"/>
-            <a:ext cx="502920" cy="502920"/>
+            <a:off x="7772400" y="1554480"/>
+            <a:ext cx="3867912" cy="4526280"/>
+          </a:xfrm>
+          <a:prstGeom prst="roundRect">
+            <a:avLst>
+              <a:gd name="adj" fmla="val 8000"/>
+            </a:avLst>
+          </a:prstGeom>
+          <a:solidFill>
+            <a:srgbClr val="03306E"/>
+          </a:solidFill>
+          <a:ln>
+            <a:noFill/>
+          </a:ln>
+          <a:effectLst/>
+        </p:spPr>
+        <p:style>
+          <a:lnRef idx="1">
+            <a:schemeClr val="accent1"/>
+          </a:lnRef>
+          <a:fillRef idx="3">
+            <a:schemeClr val="accent1"/>
+          </a:fillRef>
+          <a:effectRef idx="2">
+            <a:schemeClr val="accent1"/>
+          </a:effectRef>
+          <a:fontRef idx="minor">
+            <a:schemeClr val="lt1"/>
+          </a:fontRef>
+        </p:style>
+        <p:txBody>
+          <a:bodyPr rtlCol="0" anchor="ctr"/>
+          <a:lstStyle/>
+          <a:p/>
+        </p:txBody>
+      </p:sp>
+      <p:sp>
+        <p:nvSpPr>
+          <p:cNvPr id="8" name="Oval 7"/>
+          <p:cNvSpPr/>
+          <p:nvPr/>
+        </p:nvSpPr>
+        <p:spPr>
+          <a:xfrm>
+            <a:off x="8046720" y="1828800"/>
+            <a:ext cx="548640" cy="548640"/>
           </a:xfrm>
           <a:prstGeom prst="ellipse">
             <a:avLst/>
@@ -8729,185 +11864,13 @@
           <a:p>
             <a:pPr algn="ctr"/>
             <a:r>
-              <a:rPr sz="1700" b="1">
+              <a:rPr sz="1300" b="1">
                 <a:solidFill>
                   <a:srgbClr val="202122"/>
                 </a:solidFill>
                 <a:latin typeface="Calibri"/>
               </a:rPr>
-              <a:t>1</a:t>
-            </a:r>
-          </a:p>
-        </p:txBody>
-      </p:sp>
-      <p:sp>
-        <p:nvSpPr>
-          <p:cNvPr id="5" name="TextBox 4"/>
-          <p:cNvSpPr txBox="1"/>
-          <p:nvPr/>
-        </p:nvSpPr>
-        <p:spPr>
-          <a:xfrm>
-            <a:off x="1325880" y="1645920"/>
-            <a:ext cx="6583680" cy="822960"/>
-          </a:xfrm>
-          <a:prstGeom prst="rect">
-            <a:avLst/>
-          </a:prstGeom>
-          <a:noFill/>
-        </p:spPr>
-        <p:txBody>
-          <a:bodyPr wrap="square" anchor="ctr" lIns="0" rIns="0" tIns="0" bIns="0"/>
-          <a:lstStyle/>
-          <a:p>
-            <a:pPr algn="l"/>
-            <a:r>
-              <a:rPr sz="2000" b="0" i="0">
-                <a:solidFill>
-                  <a:srgbClr val="FFFFFF"/>
-                </a:solidFill>
-                <a:latin typeface="Calibri"/>
-              </a:rPr>
-              <a:t>Why do developers like virtual machines for testing?</a:t>
-            </a:r>
-          </a:p>
-        </p:txBody>
-      </p:sp>
-      <p:sp>
-        <p:nvSpPr>
-          <p:cNvPr id="6" name="Oval 5"/>
-          <p:cNvSpPr/>
-          <p:nvPr/>
-        </p:nvSpPr>
-        <p:spPr>
-          <a:xfrm>
-            <a:off x="548640" y="2697480"/>
-            <a:ext cx="502920" cy="502920"/>
-          </a:xfrm>
-          <a:prstGeom prst="ellipse">
-            <a:avLst/>
-          </a:prstGeom>
-          <a:solidFill>
-            <a:srgbClr val="F2B705"/>
-          </a:solidFill>
-          <a:ln>
-            <a:noFill/>
-          </a:ln>
-          <a:effectLst/>
-        </p:spPr>
-        <p:style>
-          <a:lnRef idx="1">
-            <a:schemeClr val="accent1"/>
-          </a:lnRef>
-          <a:fillRef idx="3">
-            <a:schemeClr val="accent1"/>
-          </a:fillRef>
-          <a:effectRef idx="2">
-            <a:schemeClr val="accent1"/>
-          </a:effectRef>
-          <a:fontRef idx="minor">
-            <a:schemeClr val="lt1"/>
-          </a:fontRef>
-        </p:style>
-        <p:txBody>
-          <a:bodyPr rtlCol="0" anchor="ctr" lIns="0" rIns="0" tIns="0" bIns="0"/>
-          <a:lstStyle/>
-          <a:p>
-            <a:pPr algn="ctr"/>
-            <a:r>
-              <a:rPr sz="1700" b="1">
-                <a:solidFill>
-                  <a:srgbClr val="202122"/>
-                </a:solidFill>
-                <a:latin typeface="Calibri"/>
-              </a:rPr>
-              <a:t>2</a:t>
-            </a:r>
-          </a:p>
-        </p:txBody>
-      </p:sp>
-      <p:sp>
-        <p:nvSpPr>
-          <p:cNvPr id="7" name="TextBox 6"/>
-          <p:cNvSpPr txBox="1"/>
-          <p:nvPr/>
-        </p:nvSpPr>
-        <p:spPr>
-          <a:xfrm>
-            <a:off x="1325880" y="2606040"/>
-            <a:ext cx="6583680" cy="822960"/>
-          </a:xfrm>
-          <a:prstGeom prst="rect">
-            <a:avLst/>
-          </a:prstGeom>
-          <a:noFill/>
-        </p:spPr>
-        <p:txBody>
-          <a:bodyPr wrap="square" anchor="ctr" lIns="0" rIns="0" tIns="0" bIns="0"/>
-          <a:lstStyle/>
-          <a:p>
-            <a:pPr algn="l"/>
-            <a:r>
-              <a:rPr sz="2000" b="0" i="0">
-                <a:solidFill>
-                  <a:srgbClr val="FFFFFF"/>
-                </a:solidFill>
-                <a:latin typeface="Calibri"/>
-              </a:rPr>
-              <a:t>Which cloud model gives the most control?</a:t>
-            </a:r>
-          </a:p>
-        </p:txBody>
-      </p:sp>
-      <p:sp>
-        <p:nvSpPr>
-          <p:cNvPr id="8" name="Oval 7"/>
-          <p:cNvSpPr/>
-          <p:nvPr/>
-        </p:nvSpPr>
-        <p:spPr>
-          <a:xfrm>
-            <a:off x="548640" y="3657600"/>
-            <a:ext cx="502920" cy="502920"/>
-          </a:xfrm>
-          <a:prstGeom prst="ellipse">
-            <a:avLst/>
-          </a:prstGeom>
-          <a:solidFill>
-            <a:srgbClr val="F2B705"/>
-          </a:solidFill>
-          <a:ln>
-            <a:noFill/>
-          </a:ln>
-          <a:effectLst/>
-        </p:spPr>
-        <p:style>
-          <a:lnRef idx="1">
-            <a:schemeClr val="accent1"/>
-          </a:lnRef>
-          <a:fillRef idx="3">
-            <a:schemeClr val="accent1"/>
-          </a:fillRef>
-          <a:effectRef idx="2">
-            <a:schemeClr val="accent1"/>
-          </a:effectRef>
-          <a:fontRef idx="minor">
-            <a:schemeClr val="lt1"/>
-          </a:fontRef>
-        </p:style>
-        <p:txBody>
-          <a:bodyPr rtlCol="0" anchor="ctr" lIns="0" rIns="0" tIns="0" bIns="0"/>
-          <a:lstStyle/>
-          <a:p>
-            <a:pPr algn="ctr"/>
-            <a:r>
-              <a:rPr sz="1700" b="1">
-                <a:solidFill>
-                  <a:srgbClr val="202122"/>
-                </a:solidFill>
-                <a:latin typeface="Calibri"/>
-              </a:rPr>
-              <a:t>3</a:t>
+              <a:t>e.g.</a:t>
             </a:r>
           </a:p>
         </p:txBody>
@@ -8920,203 +11883,60 @@
         </p:nvSpPr>
         <p:spPr>
           <a:xfrm>
-            <a:off x="1325880" y="3566160"/>
-            <a:ext cx="6583680" cy="822960"/>
-          </a:xfrm>
-          <a:prstGeom prst="rect">
-            <a:avLst/>
-          </a:prstGeom>
-          <a:noFill/>
-        </p:spPr>
-        <p:txBody>
-          <a:bodyPr wrap="square" anchor="ctr" lIns="0" rIns="0" tIns="0" bIns="0"/>
+            <a:off x="8046720" y="2560320"/>
+            <a:ext cx="3291840" cy="365760"/>
+          </a:xfrm>
+          <a:prstGeom prst="rect">
+            <a:avLst/>
+          </a:prstGeom>
+          <a:noFill/>
+        </p:spPr>
+        <p:txBody>
+          <a:bodyPr wrap="square" anchor="t" lIns="0" rIns="0" tIns="0" bIns="0"/>
           <a:lstStyle/>
           <a:p>
             <a:pPr algn="l"/>
             <a:r>
-              <a:rPr sz="2000" b="0" i="0">
+              <a:rPr sz="1300" b="1" i="0">
+                <a:solidFill>
+                  <a:srgbClr val="A9C8F0"/>
+                </a:solidFill>
+                <a:latin typeface="Calibri"/>
+              </a:rPr>
+              <a:t>EXAMPLE</a:t>
+            </a:r>
+          </a:p>
+        </p:txBody>
+      </p:sp>
+      <p:sp>
+        <p:nvSpPr>
+          <p:cNvPr id="10" name="TextBox 9"/>
+          <p:cNvSpPr txBox="1"/>
+          <p:nvPr/>
+        </p:nvSpPr>
+        <p:spPr>
+          <a:xfrm>
+            <a:off x="8046720" y="2971800"/>
+            <a:ext cx="3291840" cy="2971800"/>
+          </a:xfrm>
+          <a:prstGeom prst="rect">
+            <a:avLst/>
+          </a:prstGeom>
+          <a:noFill/>
+        </p:spPr>
+        <p:txBody>
+          <a:bodyPr wrap="square" anchor="t" lIns="0" rIns="0" tIns="0" bIns="0"/>
+          <a:lstStyle/>
+          <a:p>
+            <a:pPr algn="l"/>
+            <a:r>
+              <a:rPr sz="1900" b="0" i="0">
                 <a:solidFill>
                   <a:srgbClr val="FFFFFF"/>
                 </a:solidFill>
-                <a:latin typeface="Calibri"/>
-              </a:rPr>
-              <a:t>Why store backups offsite?</a:t>
-            </a:r>
-          </a:p>
-        </p:txBody>
-      </p:sp>
-      <p:sp>
-        <p:nvSpPr>
-          <p:cNvPr id="10" name="Rounded Rectangle 9"/>
-          <p:cNvSpPr/>
-          <p:nvPr/>
-        </p:nvSpPr>
-        <p:spPr>
-          <a:xfrm>
-            <a:off x="8229600" y="1645920"/>
-            <a:ext cx="3410712" cy="2926080"/>
-          </a:xfrm>
-          <a:prstGeom prst="roundRect">
-            <a:avLst>
-              <a:gd name="adj" fmla="val 8000"/>
-            </a:avLst>
-          </a:prstGeom>
-          <a:solidFill>
-            <a:srgbClr val="0645AD"/>
-          </a:solidFill>
-          <a:ln>
-            <a:noFill/>
-          </a:ln>
-          <a:effectLst/>
-        </p:spPr>
-        <p:style>
-          <a:lnRef idx="1">
-            <a:schemeClr val="accent1"/>
-          </a:lnRef>
-          <a:fillRef idx="3">
-            <a:schemeClr val="accent1"/>
-          </a:fillRef>
-          <a:effectRef idx="2">
-            <a:schemeClr val="accent1"/>
-          </a:effectRef>
-          <a:fontRef idx="minor">
-            <a:schemeClr val="lt1"/>
-          </a:fontRef>
-        </p:style>
-        <p:txBody>
-          <a:bodyPr rtlCol="0" anchor="ctr"/>
-          <a:lstStyle/>
-          <a:p/>
-        </p:txBody>
-      </p:sp>
-      <p:sp>
-        <p:nvSpPr>
-          <p:cNvPr id="11" name="TextBox 10"/>
-          <p:cNvSpPr txBox="1"/>
-          <p:nvPr/>
-        </p:nvSpPr>
-        <p:spPr>
-          <a:xfrm>
-            <a:off x="8503920" y="1874519"/>
-            <a:ext cx="2926080" cy="365760"/>
-          </a:xfrm>
-          <a:prstGeom prst="rect">
-            <a:avLst/>
-          </a:prstGeom>
-          <a:noFill/>
-        </p:spPr>
-        <p:txBody>
-          <a:bodyPr wrap="square" anchor="t" lIns="0" rIns="0" tIns="0" bIns="0"/>
-          <a:lstStyle/>
-          <a:p>
-            <a:pPr algn="l"/>
-            <a:r>
-              <a:rPr sz="1300" b="1" i="0">
-                <a:solidFill>
-                  <a:srgbClr val="A9C8F0"/>
-                </a:solidFill>
-                <a:latin typeface="Calibri"/>
-              </a:rPr>
-              <a:t>REVISE THIS TOPIC</a:t>
-            </a:r>
-          </a:p>
-        </p:txBody>
-      </p:sp>
-      <p:sp>
-        <p:nvSpPr>
-          <p:cNvPr id="12" name="TextBox 11"/>
-          <p:cNvSpPr txBox="1"/>
-          <p:nvPr/>
-        </p:nvSpPr>
-        <p:spPr>
-          <a:xfrm>
-            <a:off x="8503920" y="2286000"/>
-            <a:ext cx="2926080" cy="548640"/>
-          </a:xfrm>
-          <a:prstGeom prst="rect">
-            <a:avLst/>
-          </a:prstGeom>
-          <a:noFill/>
-        </p:spPr>
-        <p:txBody>
-          <a:bodyPr wrap="square" anchor="t" lIns="0" rIns="0" tIns="0" bIns="0"/>
-          <a:lstStyle/>
-          <a:p>
-            <a:pPr algn="l"/>
-            <a:r>
-              <a:rPr sz="1400" b="0" i="0">
-                <a:solidFill>
-                  <a:srgbClr val="FFFFFF"/>
-                </a:solidFill>
-                <a:latin typeface="Calibri"/>
-              </a:rPr>
-              <a:t>Revision notes for this lesson are on the study wiki:</a:t>
-            </a:r>
-          </a:p>
-        </p:txBody>
-      </p:sp>
-      <p:sp>
-        <p:nvSpPr>
-          <p:cNvPr id="13" name="TextBox 12"/>
-          <p:cNvSpPr txBox="1"/>
-          <p:nvPr/>
-        </p:nvSpPr>
-        <p:spPr>
-          <a:xfrm>
-            <a:off x="8503920" y="2926080"/>
-            <a:ext cx="2926080" cy="1463040"/>
-          </a:xfrm>
-          <a:prstGeom prst="rect">
-            <a:avLst/>
-          </a:prstGeom>
-          <a:noFill/>
-        </p:spPr>
-        <p:txBody>
-          <a:bodyPr wrap="square" anchor="t" lIns="0" rIns="0" tIns="0" bIns="0"/>
-          <a:lstStyle/>
-          <a:p>
-            <a:pPr algn="l"/>
-            <a:r>
-              <a:rPr sz="2000" b="1" i="0">
-                <a:solidFill>
-                  <a:srgbClr val="FFFFFF"/>
-                </a:solidFill>
                 <a:latin typeface="Cambria"/>
               </a:rPr>
-              <a:t>Core Paper 2: Business Context, Data, Digital Environments and Security</a:t>
-            </a:r>
-          </a:p>
-        </p:txBody>
-      </p:sp>
-      <p:sp>
-        <p:nvSpPr>
-          <p:cNvPr id="14" name="TextBox 13"/>
-          <p:cNvSpPr txBox="1"/>
-          <p:nvPr/>
-        </p:nvSpPr>
-        <p:spPr>
-          <a:xfrm>
-            <a:off x="548640" y="5669280"/>
-            <a:ext cx="11094415" cy="548640"/>
-          </a:xfrm>
-          <a:prstGeom prst="rect">
-            <a:avLst/>
-          </a:prstGeom>
-          <a:noFill/>
-        </p:spPr>
-        <p:txBody>
-          <a:bodyPr wrap="square" anchor="t" lIns="0" rIns="0" tIns="0" bIns="0"/>
-          <a:lstStyle/>
-          <a:p>
-            <a:pPr algn="l"/>
-            <a:r>
-              <a:rPr sz="1200" b="0" i="0">
-                <a:solidFill>
-                  <a:srgbClr val="A9C8F0"/>
-                </a:solidFill>
-                <a:latin typeface="Calibri"/>
-              </a:rPr>
-              <a:t>https://lana6478.github.io/T-level-Digital-Software-Development/#/01-core-component/02-core-paper-2.md</a:t>
+              <a:t>An app runs in two cloud regions. When one data centre fails, traffic switches to the other and users don't notice.</a:t>
             </a:r>
           </a:p>
         </p:txBody>
